--- a/presentations/ispring-course/module-01-stropovka-gruzov/live-preview/S001-S007_live_preview_working_2026-06-22_v4.pptx
+++ b/presentations/ispring-course/module-01-stropovka-gruzov/live-preview/S001-S007_live_preview_working_2026-06-22_v4.pptx
@@ -7711,8 +7711,8 @@
         </p:nvSpPr>
         <p:spPr>
           <a:xfrm>
-            <a:off x="640080" y="1280160"/>
-            <a:ext cx="5303520" cy="4480560"/>
+            <a:off x="566928" y="1143000"/>
+            <a:ext cx="11045952" cy="4617720"/>
           </a:xfrm>
           <a:prstGeom prst="roundRect">
             <a:avLst/>
@@ -7751,25 +7751,57 @@
       </p:sp>
       <p:sp>
         <p:nvSpPr>
-          <p:cNvPr id="7" name="Rounded Rectangle 6"/>
+          <p:cNvPr id="7" name="TextBox 6"/>
+          <p:cNvSpPr txBox="1"/>
+          <p:nvPr/>
+        </p:nvSpPr>
+        <p:spPr>
+          <a:xfrm>
+            <a:off x="868680" y="1353312"/>
+            <a:ext cx="4754880" cy="219456"/>
+          </a:xfrm>
+          <a:prstGeom prst="rect">
+            <a:avLst/>
+          </a:prstGeom>
+          <a:noFill/>
+        </p:spPr>
+        <p:txBody>
+          <a:bodyPr wrap="square">
+            <a:spAutoFit/>
+          </a:bodyPr>
+          <a:lstStyle/>
+          <a:p>
+            <a:pPr algn="l"/>
+            <a:r>
+              <a:rPr sz="1100" b="0">
+                <a:solidFill>
+                  <a:srgbClr val="6E7A86"/>
+                </a:solidFill>
+              </a:rPr>
+              <a:t>Термины расположены по алфавиту</a:t>
+            </a:r>
+          </a:p>
+        </p:txBody>
+      </p:sp>
+      <p:sp>
+        <p:nvSpPr>
+          <p:cNvPr id="8" name="Rectangle 7"/>
           <p:cNvSpPr/>
           <p:nvPr/>
         </p:nvSpPr>
         <p:spPr>
           <a:xfrm>
-            <a:off x="640080" y="1280160"/>
-            <a:ext cx="5303520" cy="658368"/>
-          </a:xfrm>
-          <a:prstGeom prst="roundRect">
-            <a:avLst/>
-          </a:prstGeom>
-          <a:solidFill>
-            <a:srgbClr val="42855F"/>
+            <a:off x="6071616" y="1627632"/>
+            <a:ext cx="18288" cy="3794760"/>
+          </a:xfrm>
+          <a:prstGeom prst="rect">
+            <a:avLst/>
+          </a:prstGeom>
+          <a:solidFill>
+            <a:srgbClr val="D2DAE2"/>
           </a:solidFill>
           <a:ln>
-            <a:solidFill>
-              <a:srgbClr val="42855F"/>
-            </a:solidFill>
+            <a:noFill/>
           </a:ln>
         </p:spPr>
         <p:style>
@@ -7791,27 +7823,20 @@
           <a:lstStyle/>
           <a:p>
             <a:pPr algn="ctr"/>
-            <a:r>
-              <a:rPr sz="2200" b="1">
-                <a:solidFill>
-                  <a:srgbClr val="FFFFFF"/>
-                </a:solidFill>
-              </a:rPr>
-              <a:t>Левая колонка</a:t>
-            </a:r>
-          </a:p>
-        </p:txBody>
-      </p:sp>
-      <p:sp>
-        <p:nvSpPr>
-          <p:cNvPr id="8" name="TextBox 7"/>
+            <a:endParaRPr/>
+          </a:p>
+        </p:txBody>
+      </p:sp>
+      <p:sp>
+        <p:nvSpPr>
+          <p:cNvPr id="9" name="TextBox 8"/>
           <p:cNvSpPr txBox="1"/>
           <p:nvPr/>
         </p:nvSpPr>
         <p:spPr>
           <a:xfrm>
-            <a:off x="896112" y="2194560"/>
-            <a:ext cx="4791456" cy="3383280"/>
+            <a:off x="868680" y="1719072"/>
+            <a:ext cx="4892040" cy="3749039"/>
           </a:xfrm>
           <a:prstGeom prst="rect">
             <a:avLst/>
@@ -7824,161 +7849,224 @@
           </a:bodyPr>
           <a:lstStyle/>
           <a:p>
-            <a:pPr>
+            <a:pPr algn="l">
               <a:spcAft>
-                <a:spcPts val="800"/>
+                <a:spcPts val="300"/>
               </a:spcAft>
             </a:pPr>
             <a:r>
-              <a:rPr sz="1700">
+              <a:rPr sz="1200" b="1">
+                <a:solidFill>
+                  <a:srgbClr val="265A89"/>
+                </a:solidFill>
+              </a:rPr>
+              <a:t>Гак</a:t>
+            </a:r>
+            <a:r>
+              <a:rPr sz="1100">
                 <a:solidFill>
                   <a:srgbClr val="212B36"/>
                 </a:solidFill>
               </a:rPr>
-              <a:t>Стропальщик - рабочий, который выполняет строповку груза.</a:t>
-            </a:r>
-          </a:p>
-          <a:p>
-            <a:pPr>
+              <a:t> - крюк грузоподъёмного механизма.</a:t>
+            </a:r>
+          </a:p>
+          <a:p>
+            <a:pPr algn="l">
               <a:spcAft>
-                <a:spcPts val="800"/>
+                <a:spcPts val="300"/>
               </a:spcAft>
             </a:pPr>
             <a:r>
-              <a:rPr sz="1700">
+              <a:rPr sz="1200" b="1">
+                <a:solidFill>
+                  <a:srgbClr val="265A89"/>
+                </a:solidFill>
+              </a:rPr>
+              <a:t>Груз</a:t>
+            </a:r>
+            <a:r>
+              <a:rPr sz="1100">
                 <a:solidFill>
                   <a:srgbClr val="212B36"/>
                 </a:solidFill>
               </a:rPr>
-              <a:t>Строп - грузозахватное средство.</a:t>
-            </a:r>
-          </a:p>
-          <a:p>
-            <a:pPr>
+              <a:t> - предмет или конструкция для подъёма.</a:t>
+            </a:r>
+          </a:p>
+          <a:p>
+            <a:pPr algn="l">
               <a:spcAft>
-                <a:spcPts val="800"/>
+                <a:spcPts val="300"/>
               </a:spcAft>
             </a:pPr>
             <a:r>
-              <a:rPr sz="1700">
+              <a:rPr sz="1200" b="1">
+                <a:solidFill>
+                  <a:srgbClr val="265A89"/>
+                </a:solidFill>
+              </a:rPr>
+              <a:t>Грузозахватное приспособление</a:t>
+            </a:r>
+            <a:r>
+              <a:rPr sz="1100">
                 <a:solidFill>
                   <a:srgbClr val="212B36"/>
                 </a:solidFill>
               </a:rPr>
-              <a:t>Строповка - способ обвязки и зацепки.</a:t>
-            </a:r>
-          </a:p>
-        </p:txBody>
-      </p:sp>
-      <p:sp>
-        <p:nvSpPr>
-          <p:cNvPr id="9" name="Rounded Rectangle 8"/>
-          <p:cNvSpPr/>
-          <p:nvPr/>
-        </p:nvSpPr>
-        <p:spPr>
-          <a:xfrm>
-            <a:off x="6263640" y="1280160"/>
-            <a:ext cx="5303520" cy="4480560"/>
-          </a:xfrm>
-          <a:prstGeom prst="roundRect">
-            <a:avLst/>
-          </a:prstGeom>
-          <a:solidFill>
-            <a:srgbClr val="FFFFFF"/>
-          </a:solidFill>
-          <a:ln w="19050">
-            <a:solidFill>
-              <a:srgbClr val="42855F"/>
-            </a:solidFill>
-          </a:ln>
-        </p:spPr>
-        <p:style>
-          <a:lnRef idx="1">
-            <a:schemeClr val="accent1"/>
-          </a:lnRef>
-          <a:fillRef idx="3">
-            <a:schemeClr val="accent1"/>
-          </a:fillRef>
-          <a:effectRef idx="2">
-            <a:schemeClr val="accent1"/>
-          </a:effectRef>
-          <a:fontRef idx="minor">
-            <a:schemeClr val="lt1"/>
-          </a:fontRef>
-        </p:style>
-        <p:txBody>
-          <a:bodyPr rtlCol="0" anchor="ctr"/>
-          <a:lstStyle/>
-          <a:p>
-            <a:pPr algn="ctr"/>
-            <a:endParaRPr/>
-          </a:p>
-        </p:txBody>
-      </p:sp>
-      <p:sp>
-        <p:nvSpPr>
-          <p:cNvPr id="10" name="Rounded Rectangle 9"/>
-          <p:cNvSpPr/>
-          <p:nvPr/>
-        </p:nvSpPr>
-        <p:spPr>
-          <a:xfrm>
-            <a:off x="6263640" y="1280160"/>
-            <a:ext cx="5303520" cy="658368"/>
-          </a:xfrm>
-          <a:prstGeom prst="roundRect">
-            <a:avLst/>
-          </a:prstGeom>
-          <a:solidFill>
-            <a:srgbClr val="42855F"/>
-          </a:solidFill>
-          <a:ln>
-            <a:solidFill>
-              <a:srgbClr val="42855F"/>
-            </a:solidFill>
-          </a:ln>
-        </p:spPr>
-        <p:style>
-          <a:lnRef idx="1">
-            <a:schemeClr val="accent1"/>
-          </a:lnRef>
-          <a:fillRef idx="3">
-            <a:schemeClr val="accent1"/>
-          </a:fillRef>
-          <a:effectRef idx="2">
-            <a:schemeClr val="accent1"/>
-          </a:effectRef>
-          <a:fontRef idx="minor">
-            <a:schemeClr val="lt1"/>
-          </a:fontRef>
-        </p:style>
-        <p:txBody>
-          <a:bodyPr rtlCol="0" anchor="ctr"/>
-          <a:lstStyle/>
-          <a:p>
-            <a:pPr algn="ctr"/>
-            <a:r>
-              <a:rPr sz="2200" b="1">
-                <a:solidFill>
-                  <a:srgbClr val="FFFFFF"/>
-                </a:solidFill>
-              </a:rPr>
-              <a:t>Правая колонка</a:t>
-            </a:r>
-          </a:p>
-        </p:txBody>
-      </p:sp>
-      <p:sp>
-        <p:nvSpPr>
-          <p:cNvPr id="11" name="TextBox 10"/>
+              <a:t> - устройство для захвата груза.</a:t>
+            </a:r>
+          </a:p>
+          <a:p>
+            <a:pPr algn="l">
+              <a:spcAft>
+                <a:spcPts val="300"/>
+              </a:spcAft>
+            </a:pPr>
+            <a:r>
+              <a:rPr sz="1200" b="1">
+                <a:solidFill>
+                  <a:srgbClr val="265A89"/>
+                </a:solidFill>
+              </a:rPr>
+              <a:t>Зажимы</a:t>
+            </a:r>
+            <a:r>
+              <a:rPr sz="1100">
+                <a:solidFill>
+                  <a:srgbClr val="212B36"/>
+                </a:solidFill>
+              </a:rPr>
+              <a:t> - устройства для закрепления концов каната.</a:t>
+            </a:r>
+          </a:p>
+          <a:p>
+            <a:pPr algn="l">
+              <a:spcAft>
+                <a:spcPts val="300"/>
+              </a:spcAft>
+            </a:pPr>
+            <a:r>
+              <a:rPr sz="1200" b="1">
+                <a:solidFill>
+                  <a:srgbClr val="265A89"/>
+                </a:solidFill>
+              </a:rPr>
+              <a:t>Коуш</a:t>
+            </a:r>
+            <a:r>
+              <a:rPr sz="1100">
+                <a:solidFill>
+                  <a:srgbClr val="212B36"/>
+                </a:solidFill>
+              </a:rPr>
+              <a:t> - металлическая вставка, защищающая петлю каната от залома и износа.</a:t>
+            </a:r>
+          </a:p>
+          <a:p>
+            <a:pPr algn="l">
+              <a:spcAft>
+                <a:spcPts val="300"/>
+              </a:spcAft>
+            </a:pPr>
+            <a:r>
+              <a:rPr sz="1200" b="1">
+                <a:solidFill>
+                  <a:srgbClr val="265A89"/>
+                </a:solidFill>
+              </a:rPr>
+              <a:t>Магнитные зажимы</a:t>
+            </a:r>
+            <a:r>
+              <a:rPr sz="1100">
+                <a:solidFill>
+                  <a:srgbClr val="212B36"/>
+                </a:solidFill>
+              </a:rPr>
+              <a:t> - устройства, удерживающие металлический груз с помощью магнита.</a:t>
+            </a:r>
+          </a:p>
+          <a:p>
+            <a:pPr algn="l">
+              <a:spcAft>
+                <a:spcPts val="300"/>
+              </a:spcAft>
+            </a:pPr>
+            <a:r>
+              <a:rPr sz="1200" b="1">
+                <a:solidFill>
+                  <a:srgbClr val="265A89"/>
+                </a:solidFill>
+              </a:rPr>
+              <a:t>Мёртвый груз</a:t>
+            </a:r>
+            <a:r>
+              <a:rPr sz="1100">
+                <a:solidFill>
+                  <a:srgbClr val="212B36"/>
+                </a:solidFill>
+              </a:rPr>
+              <a:t> - груз, массу которого определить невозможно.</a:t>
+            </a:r>
+          </a:p>
+          <a:p>
+            <a:pPr algn="l">
+              <a:spcAft>
+                <a:spcPts val="300"/>
+              </a:spcAft>
+            </a:pPr>
+            <a:r>
+              <a:rPr sz="1200" b="1">
+                <a:solidFill>
+                  <a:srgbClr val="265A89"/>
+                </a:solidFill>
+              </a:rPr>
+              <a:t>Оттяжка</a:t>
+            </a:r>
+            <a:r>
+              <a:rPr sz="1100">
+                <a:solidFill>
+                  <a:srgbClr val="212B36"/>
+                </a:solidFill>
+              </a:rPr>
+              <a:t> - канат или верёвка для управления положением груза и предотвращения его раскачивания.</a:t>
+            </a:r>
+          </a:p>
+          <a:p>
+            <a:pPr algn="l">
+              <a:spcAft>
+                <a:spcPts val="300"/>
+              </a:spcAft>
+            </a:pPr>
+            <a:r>
+              <a:rPr sz="1200" b="1">
+                <a:solidFill>
+                  <a:srgbClr val="265A89"/>
+                </a:solidFill>
+              </a:rPr>
+              <a:t>Рым</a:t>
+            </a:r>
+            <a:r>
+              <a:rPr sz="1100">
+                <a:solidFill>
+                  <a:srgbClr val="212B36"/>
+                </a:solidFill>
+              </a:rPr>
+              <a:t> - кольцо или проушина для крепления стропа к грузу.</a:t>
+            </a:r>
+          </a:p>
+        </p:txBody>
+      </p:sp>
+      <p:sp>
+        <p:nvSpPr>
+          <p:cNvPr id="10" name="TextBox 9"/>
           <p:cNvSpPr txBox="1"/>
           <p:nvPr/>
         </p:nvSpPr>
         <p:spPr>
           <a:xfrm>
-            <a:off x="6519672" y="2194560"/>
-            <a:ext cx="4791456" cy="3383280"/>
+            <a:off x="6355080" y="1719072"/>
+            <a:ext cx="4892040" cy="3749039"/>
           </a:xfrm>
           <a:prstGeom prst="rect">
             <a:avLst/>
@@ -7991,55 +8079,194 @@
           </a:bodyPr>
           <a:lstStyle/>
           <a:p>
-            <a:pPr>
+            <a:pPr algn="l">
               <a:spcAft>
-                <a:spcPts val="800"/>
+                <a:spcPts val="300"/>
               </a:spcAft>
             </a:pPr>
             <a:r>
-              <a:rPr sz="1700">
+              <a:rPr sz="1200" b="1">
+                <a:solidFill>
+                  <a:srgbClr val="265A89"/>
+                </a:solidFill>
+              </a:rPr>
+              <a:t>Сигнальщик</a:t>
+            </a:r>
+            <a:r>
+              <a:rPr sz="1100">
                 <a:solidFill>
                   <a:srgbClr val="212B36"/>
                 </a:solidFill>
               </a:rPr>
-              <a:t>Груз - предмет или конструкция для подъема.</a:t>
-            </a:r>
-          </a:p>
-          <a:p>
-            <a:pPr>
+              <a:t> - работник, который подаёт команды крановщику при перемещении груза, если между стропальщиком и крановщиком контакт отсутствует.</a:t>
+            </a:r>
+          </a:p>
+          <a:p>
+            <a:pPr algn="l">
               <a:spcAft>
-                <a:spcPts val="800"/>
+                <a:spcPts val="300"/>
               </a:spcAft>
             </a:pPr>
             <a:r>
-              <a:rPr sz="1700">
+              <a:rPr sz="1200" b="1">
+                <a:solidFill>
+                  <a:srgbClr val="265A89"/>
+                </a:solidFill>
+              </a:rPr>
+              <a:t>СИЗ</a:t>
+            </a:r>
+            <a:r>
+              <a:rPr sz="1100">
                 <a:solidFill>
                   <a:srgbClr val="212B36"/>
                 </a:solidFill>
               </a:rPr>
-              <a:t>Грузозахватное приспособление - устройство для захвата груза.</a:t>
-            </a:r>
-          </a:p>
-          <a:p>
-            <a:pPr>
+              <a:t> - средства индивидуальной защиты.</a:t>
+            </a:r>
+          </a:p>
+          <a:p>
+            <a:pPr algn="l">
               <a:spcAft>
-                <a:spcPts val="800"/>
+                <a:spcPts val="300"/>
               </a:spcAft>
             </a:pPr>
             <a:r>
-              <a:rPr sz="1700">
+              <a:rPr sz="1200" b="1">
+                <a:solidFill>
+                  <a:srgbClr val="265A89"/>
+                </a:solidFill>
+              </a:rPr>
+              <a:t>Строп</a:t>
+            </a:r>
+            <a:r>
+              <a:rPr sz="1100">
                 <a:solidFill>
                   <a:srgbClr val="212B36"/>
                 </a:solidFill>
               </a:rPr>
-              <a:t>СИЗ - средства индивидуальной защиты.</a:t>
-            </a:r>
-          </a:p>
-        </p:txBody>
-      </p:sp>
-      <p:sp>
-        <p:nvSpPr>
-          <p:cNvPr id="12" name="Rounded Rectangle 11">
+              <a:t> - грузозахватное средство.</a:t>
+            </a:r>
+          </a:p>
+          <a:p>
+            <a:pPr algn="l">
+              <a:spcAft>
+                <a:spcPts val="300"/>
+              </a:spcAft>
+            </a:pPr>
+            <a:r>
+              <a:rPr sz="1200" b="1">
+                <a:solidFill>
+                  <a:srgbClr val="265A89"/>
+                </a:solidFill>
+              </a:rPr>
+              <a:t>Стропальщик</a:t>
+            </a:r>
+            <a:r>
+              <a:rPr sz="1100">
+                <a:solidFill>
+                  <a:srgbClr val="212B36"/>
+                </a:solidFill>
+              </a:rPr>
+              <a:t> - рабочий, который выполняет строповку груза.</a:t>
+            </a:r>
+          </a:p>
+          <a:p>
+            <a:pPr algn="l">
+              <a:spcAft>
+                <a:spcPts val="300"/>
+              </a:spcAft>
+            </a:pPr>
+            <a:r>
+              <a:rPr sz="1200" b="1">
+                <a:solidFill>
+                  <a:srgbClr val="265A89"/>
+                </a:solidFill>
+              </a:rPr>
+              <a:t>Строповка</a:t>
+            </a:r>
+            <a:r>
+              <a:rPr sz="1100">
+                <a:solidFill>
+                  <a:srgbClr val="212B36"/>
+                </a:solidFill>
+              </a:rPr>
+              <a:t> - способ обвязки и зацепки.</a:t>
+            </a:r>
+          </a:p>
+          <a:p>
+            <a:pPr algn="l">
+              <a:spcAft>
+                <a:spcPts val="300"/>
+              </a:spcAft>
+            </a:pPr>
+            <a:r>
+              <a:rPr sz="1200" b="1">
+                <a:solidFill>
+                  <a:srgbClr val="265A89"/>
+                </a:solidFill>
+              </a:rPr>
+              <a:t>Тара</a:t>
+            </a:r>
+            <a:r>
+              <a:rPr sz="1100">
+                <a:solidFill>
+                  <a:srgbClr val="212B36"/>
+                </a:solidFill>
+              </a:rPr>
+              <a:t> - ёмкость или приспособление для размещения и перемещения груза.</a:t>
+            </a:r>
+          </a:p>
+          <a:p>
+            <a:pPr algn="l">
+              <a:spcAft>
+                <a:spcPts val="300"/>
+              </a:spcAft>
+            </a:pPr>
+            <a:r>
+              <a:rPr sz="1200" b="1">
+                <a:solidFill>
+                  <a:srgbClr val="265A89"/>
+                </a:solidFill>
+              </a:rPr>
+              <a:t>Траверса</a:t>
+            </a:r>
+            <a:r>
+              <a:rPr sz="1100">
+                <a:solidFill>
+                  <a:srgbClr val="212B36"/>
+                </a:solidFill>
+              </a:rPr>
+              <a:t> - грузозахватная балка для подъёма длинных или крупногабаритных грузов.</a:t>
+            </a:r>
+          </a:p>
+          <a:p>
+            <a:pPr algn="l">
+              <a:spcAft>
+                <a:spcPts val="300"/>
+              </a:spcAft>
+            </a:pPr>
+            <a:r>
+              <a:rPr sz="1200" b="1">
+                <a:solidFill>
+                  <a:srgbClr val="265A89"/>
+                </a:solidFill>
+              </a:rPr>
+              <a:t>Цапфа</a:t>
+            </a:r>
+            <a:r>
+              <a:rPr sz="1100">
+                <a:solidFill>
+                  <a:srgbClr val="212B36"/>
+                </a:solidFill>
+              </a:rPr>
+              <a:t> - выступающая часть груза или оборудования, используемая как опора или место строповки.</a:t>
+            </a:r>
+          </a:p>
+        </p:txBody>
+      </p:sp>
+      <p:sp>
+        <p:nvSpPr>
+          <p:cNvPr id="11" name="Rounded Rectangle 10">
             <a:hlinkClick r:id="rId2" action="ppaction://hlinksldjump"/>
           </p:cNvPr>
           <p:cNvSpPr/>
@@ -9127,26 +9354,180 @@
           </a:p>
         </p:txBody>
       </p:sp>
-      <p:sp>
-        <p:nvSpPr>
-          <p:cNvPr id="22" name="Rounded Rectangle 21"/>
-          <p:cNvSpPr/>
-          <p:nvPr/>
-        </p:nvSpPr>
-        <p:spPr>
+      <p:grpSp>
+        <p:nvGrpSpPr>
+          <p:cNvPr id="27" name="S003_INFO_GROUP"/>
+          <p:cNvGrpSpPr/>
+          <p:nvPr/>
+        </p:nvGrpSpPr>
+        <p:grpSpPr>
           <a:xfrm>
             <a:off x="9555480" y="1691640"/>
-            <a:ext cx="1965960" cy="3154680"/>
-          </a:xfrm>
-          <a:prstGeom prst="roundRect">
-            <a:avLst/>
-          </a:prstGeom>
-          <a:solidFill>
-            <a:srgbClr val="FFFFFF"/>
-          </a:solidFill>
-          <a:ln w="19050">
+            <a:ext cx="1965960" cy="1965960"/>
+            <a:chOff x="9555480" y="1691640"/>
+            <a:chExt cx="1965960" cy="1965960"/>
+          </a:xfrm>
+        </p:grpSpPr>
+        <p:sp>
+          <p:nvSpPr>
+            <p:cNvPr id="22" name="Rounded Rectangle 21"/>
+            <p:cNvSpPr/>
+            <p:nvPr/>
+          </p:nvSpPr>
+          <p:spPr>
+            <a:xfrm>
+              <a:off x="9555480" y="1691640"/>
+              <a:ext cx="1965960" cy="1965960"/>
+            </a:xfrm>
+            <a:prstGeom prst="roundRect">
+              <a:avLst/>
+            </a:prstGeom>
+            <a:solidFill>
+              <a:srgbClr val="FFFFFF"/>
+            </a:solidFill>
+            <a:ln w="19050">
+              <a:solidFill>
+                <a:srgbClr val="42855F"/>
+              </a:solidFill>
+            </a:ln>
+          </p:spPr>
+          <p:style>
+            <a:lnRef idx="1">
+              <a:schemeClr val="accent1"/>
+            </a:lnRef>
+            <a:fillRef idx="3">
+              <a:schemeClr val="accent1"/>
+            </a:fillRef>
+            <a:effectRef idx="2">
+              <a:schemeClr val="accent1"/>
+            </a:effectRef>
+            <a:fontRef idx="minor">
+              <a:schemeClr val="lt1"/>
+            </a:fontRef>
+          </p:style>
+          <p:txBody>
+            <a:bodyPr rtlCol="0" anchor="ctr"/>
+            <a:lstStyle/>
+            <a:p>
+              <a:pPr algn="ctr"/>
+              <a:endParaRPr/>
+            </a:p>
+          </p:txBody>
+        </p:sp>
+        <p:sp>
+          <p:nvSpPr>
+            <p:cNvPr id="23" name="Rounded Rectangle 22"/>
+            <p:cNvSpPr/>
+            <p:nvPr/>
+          </p:nvSpPr>
+          <p:spPr>
+            <a:xfrm>
+              <a:off x="9555480" y="1691640"/>
+              <a:ext cx="1965960" cy="566928"/>
+            </a:xfrm>
+            <a:prstGeom prst="roundRect">
+              <a:avLst/>
+            </a:prstGeom>
             <a:solidFill>
               <a:srgbClr val="42855F"/>
+            </a:solidFill>
+            <a:ln>
+              <a:solidFill>
+                <a:srgbClr val="42855F"/>
+              </a:solidFill>
+            </a:ln>
+          </p:spPr>
+          <p:style>
+            <a:lnRef idx="1">
+              <a:schemeClr val="accent1"/>
+            </a:lnRef>
+            <a:fillRef idx="3">
+              <a:schemeClr val="accent1"/>
+            </a:fillRef>
+            <a:effectRef idx="2">
+              <a:schemeClr val="accent1"/>
+            </a:effectRef>
+            <a:fontRef idx="minor">
+              <a:schemeClr val="lt1"/>
+            </a:fontRef>
+          </p:style>
+          <p:txBody>
+            <a:bodyPr rtlCol="0" anchor="ctr"/>
+            <a:lstStyle/>
+            <a:p>
+              <a:pPr algn="ctr"/>
+              <a:r>
+                <a:rPr sz="1900" b="1">
+                  <a:solidFill>
+                    <a:srgbClr val="FFFFFF"/>
+                  </a:solidFill>
+                </a:rPr>
+                <a:t>Интерактив</a:t>
+              </a:r>
+            </a:p>
+          </p:txBody>
+        </p:sp>
+        <p:sp>
+          <p:nvSpPr>
+            <p:cNvPr id="24" name="TextBox 23"/>
+            <p:cNvSpPr txBox="1"/>
+            <p:nvPr/>
+          </p:nvSpPr>
+          <p:spPr>
+            <a:xfrm>
+              <a:off x="9784080" y="2478024"/>
+              <a:ext cx="1508760" cy="996696"/>
+            </a:xfrm>
+            <a:prstGeom prst="rect">
+              <a:avLst/>
+            </a:prstGeom>
+            <a:noFill/>
+          </p:spPr>
+          <p:txBody>
+            <a:bodyPr wrap="square">
+              <a:spAutoFit/>
+            </a:bodyPr>
+            <a:lstStyle/>
+            <a:p>
+              <a:pPr>
+                <a:spcAft>
+                  <a:spcPts val="800"/>
+                </a:spcAft>
+              </a:pPr>
+              <a:r>
+                <a:rPr sz="1500">
+                  <a:solidFill>
+                    <a:srgbClr val="212B36"/>
+                  </a:solidFill>
+                </a:rPr>
+                <a:t>Нажмите на название документа.</a:t>
+              </a:r>
+            </a:p>
+          </p:txBody>
+        </p:sp>
+      </p:grpSp>
+      <p:sp>
+        <p:nvSpPr>
+          <p:cNvPr id="25" name="Rounded Rectangle 24">
+            <a:hlinkClick r:id="rId6" action="ppaction://hlinksldjump"/>
+          </p:cNvPr>
+          <p:cNvSpPr/>
+          <p:nvPr/>
+        </p:nvSpPr>
+        <p:spPr>
+          <a:xfrm>
+            <a:off x="640080" y="5989320"/>
+            <a:ext cx="2148840" cy="457200"/>
+          </a:xfrm>
+          <a:prstGeom prst="roundRect">
+            <a:avLst/>
+          </a:prstGeom>
+          <a:solidFill>
+            <a:srgbClr val="537795"/>
+          </a:solidFill>
+          <a:ln>
+            <a:solidFill>
+              <a:srgbClr val="537795"/>
             </a:solidFill>
           </a:ln>
         </p:spPr>
@@ -9169,30 +9550,39 @@
           <a:lstStyle/>
           <a:p>
             <a:pPr algn="ctr"/>
-            <a:endParaRPr/>
-          </a:p>
-        </p:txBody>
-      </p:sp>
-      <p:sp>
-        <p:nvSpPr>
-          <p:cNvPr id="23" name="Rounded Rectangle 22"/>
+            <a:r>
+              <a:rPr sz="1800" b="1">
+                <a:solidFill>
+                  <a:srgbClr val="FFFFFF"/>
+                </a:solidFill>
+              </a:rPr>
+              <a:t>НАЗАД</a:t>
+            </a:r>
+          </a:p>
+        </p:txBody>
+      </p:sp>
+      <p:sp>
+        <p:nvSpPr>
+          <p:cNvPr id="26" name="Rounded Rectangle 25">
+            <a:hlinkClick r:id="rId7" action="ppaction://hlinksldjump"/>
+          </p:cNvPr>
           <p:cNvSpPr/>
           <p:nvPr/>
         </p:nvSpPr>
         <p:spPr>
           <a:xfrm>
-            <a:off x="9555480" y="1691640"/>
-            <a:ext cx="1965960" cy="566928"/>
+            <a:off x="9372600" y="5989320"/>
+            <a:ext cx="2148840" cy="457200"/>
           </a:xfrm>
           <a:prstGeom prst="roundRect">
             <a:avLst/>
           </a:prstGeom>
           <a:solidFill>
-            <a:srgbClr val="42855F"/>
+            <a:srgbClr val="DE7436"/>
           </a:solidFill>
           <a:ln>
             <a:solidFill>
-              <a:srgbClr val="42855F"/>
+              <a:srgbClr val="DE7436"/>
             </a:solidFill>
           </a:ln>
         </p:spPr>
@@ -9216,184 +9606,6 @@
           <a:p>
             <a:pPr algn="ctr"/>
             <a:r>
-              <a:rPr sz="1900" b="1">
-                <a:solidFill>
-                  <a:srgbClr val="FFFFFF"/>
-                </a:solidFill>
-              </a:rPr>
-              <a:t>Интерактив</a:t>
-            </a:r>
-          </a:p>
-        </p:txBody>
-      </p:sp>
-      <p:sp>
-        <p:nvSpPr>
-          <p:cNvPr id="24" name="TextBox 23"/>
-          <p:cNvSpPr txBox="1"/>
-          <p:nvPr/>
-        </p:nvSpPr>
-        <p:spPr>
-          <a:xfrm>
-            <a:off x="9784080" y="2478024"/>
-            <a:ext cx="1508760" cy="2185416"/>
-          </a:xfrm>
-          <a:prstGeom prst="rect">
-            <a:avLst/>
-          </a:prstGeom>
-          <a:noFill/>
-        </p:spPr>
-        <p:txBody>
-          <a:bodyPr wrap="square">
-            <a:spAutoFit/>
-          </a:bodyPr>
-          <a:lstStyle/>
-          <a:p>
-            <a:pPr>
-              <a:spcAft>
-                <a:spcPts val="800"/>
-              </a:spcAft>
-            </a:pPr>
-            <a:r>
-              <a:rPr sz="1500">
-                <a:solidFill>
-                  <a:srgbClr val="212B36"/>
-                </a:solidFill>
-              </a:rPr>
-              <a:t>Нажмите на название документа.</a:t>
-            </a:r>
-          </a:p>
-          <a:p>
-            <a:pPr>
-              <a:spcAft>
-                <a:spcPts val="800"/>
-              </a:spcAft>
-            </a:pPr>
-            <a:r>
-              <a:rPr sz="1500">
-                <a:solidFill>
-                  <a:srgbClr val="212B36"/>
-                </a:solidFill>
-              </a:rPr>
-              <a:t>Откроется подвал с короткой справкой.</a:t>
-            </a:r>
-          </a:p>
-          <a:p>
-            <a:pPr>
-              <a:spcAft>
-                <a:spcPts val="800"/>
-              </a:spcAft>
-            </a:pPr>
-            <a:r>
-              <a:rPr sz="1500">
-                <a:solidFill>
-                  <a:srgbClr val="212B36"/>
-                </a:solidFill>
-              </a:rPr>
-              <a:t>Из подвала можно вернуться в S003.</a:t>
-            </a:r>
-          </a:p>
-        </p:txBody>
-      </p:sp>
-      <p:sp>
-        <p:nvSpPr>
-          <p:cNvPr id="25" name="Rounded Rectangle 24">
-            <a:hlinkClick r:id="rId6" action="ppaction://hlinksldjump"/>
-          </p:cNvPr>
-          <p:cNvSpPr/>
-          <p:nvPr/>
-        </p:nvSpPr>
-        <p:spPr>
-          <a:xfrm>
-            <a:off x="640080" y="5989320"/>
-            <a:ext cx="2148840" cy="457200"/>
-          </a:xfrm>
-          <a:prstGeom prst="roundRect">
-            <a:avLst/>
-          </a:prstGeom>
-          <a:solidFill>
-            <a:srgbClr val="537795"/>
-          </a:solidFill>
-          <a:ln>
-            <a:solidFill>
-              <a:srgbClr val="537795"/>
-            </a:solidFill>
-          </a:ln>
-        </p:spPr>
-        <p:style>
-          <a:lnRef idx="1">
-            <a:schemeClr val="accent1"/>
-          </a:lnRef>
-          <a:fillRef idx="3">
-            <a:schemeClr val="accent1"/>
-          </a:fillRef>
-          <a:effectRef idx="2">
-            <a:schemeClr val="accent1"/>
-          </a:effectRef>
-          <a:fontRef idx="minor">
-            <a:schemeClr val="lt1"/>
-          </a:fontRef>
-        </p:style>
-        <p:txBody>
-          <a:bodyPr rtlCol="0" anchor="ctr"/>
-          <a:lstStyle/>
-          <a:p>
-            <a:pPr algn="ctr"/>
-            <a:r>
-              <a:rPr sz="1800" b="1">
-                <a:solidFill>
-                  <a:srgbClr val="FFFFFF"/>
-                </a:solidFill>
-              </a:rPr>
-              <a:t>НАЗАД</a:t>
-            </a:r>
-          </a:p>
-        </p:txBody>
-      </p:sp>
-      <p:sp>
-        <p:nvSpPr>
-          <p:cNvPr id="26" name="Rounded Rectangle 25">
-            <a:hlinkClick r:id="rId7" action="ppaction://hlinksldjump"/>
-          </p:cNvPr>
-          <p:cNvSpPr/>
-          <p:nvPr/>
-        </p:nvSpPr>
-        <p:spPr>
-          <a:xfrm>
-            <a:off x="9372600" y="5989320"/>
-            <a:ext cx="2148840" cy="457200"/>
-          </a:xfrm>
-          <a:prstGeom prst="roundRect">
-            <a:avLst/>
-          </a:prstGeom>
-          <a:solidFill>
-            <a:srgbClr val="DE7436"/>
-          </a:solidFill>
-          <a:ln>
-            <a:solidFill>
-              <a:srgbClr val="DE7436"/>
-            </a:solidFill>
-          </a:ln>
-        </p:spPr>
-        <p:style>
-          <a:lnRef idx="1">
-            <a:schemeClr val="accent1"/>
-          </a:lnRef>
-          <a:fillRef idx="3">
-            <a:schemeClr val="accent1"/>
-          </a:fillRef>
-          <a:effectRef idx="2">
-            <a:schemeClr val="accent1"/>
-          </a:effectRef>
-          <a:fontRef idx="minor">
-            <a:schemeClr val="lt1"/>
-          </a:fontRef>
-        </p:style>
-        <p:txBody>
-          <a:bodyPr rtlCol="0" anchor="ctr"/>
-          <a:lstStyle/>
-          <a:p>
-            <a:pPr algn="ctr"/>
-            <a:r>
               <a:rPr sz="1800" b="1">
                 <a:solidFill>
                   <a:srgbClr val="FFFFFF"/>
@@ -9409,6 +9621,136 @@
   <p:clrMapOvr>
     <a:masterClrMapping/>
   </p:clrMapOvr>
+  <p:timing>
+    <p:tnLst>
+      <p:par>
+        <p:cTn id="1" dur="indefinite" restart="never" nodeType="tmRoot">
+          <p:childTnLst>
+            <p:seq concurrent="1" nextAc="seek">
+              <p:cTn id="2" dur="indefinite" nodeType="mainSeq">
+                <p:childTnLst>
+                  <p:par>
+                    <p:cTn id="3" fill="hold">
+                      <p:stCondLst>
+                        <p:cond delay="indefinite"/>
+                        <p:cond evt="onBegin" delay="0">
+                          <p:tn val="2"/>
+                        </p:cond>
+                      </p:stCondLst>
+                      <p:childTnLst>
+                        <p:par>
+                          <p:cTn id="4" fill="hold">
+                            <p:stCondLst>
+                              <p:cond delay="0"/>
+                            </p:stCondLst>
+                            <p:childTnLst>
+                              <p:par>
+                                <p:cTn id="5" presetID="10" presetClass="entr" presetSubtype="0" fill="hold" nodeType="afterEffect">
+                                  <p:stCondLst>
+                                    <p:cond delay="2000"/>
+                                  </p:stCondLst>
+                                  <p:childTnLst>
+                                    <p:set>
+                                      <p:cBhvr>
+                                        <p:cTn id="6" dur="1" fill="hold">
+                                          <p:stCondLst>
+                                            <p:cond delay="0"/>
+                                          </p:stCondLst>
+                                        </p:cTn>
+                                        <p:tgtEl>
+                                          <p:spTgt spid="27"/>
+                                        </p:tgtEl>
+                                        <p:attrNameLst>
+                                          <p:attrName>style.visibility</p:attrName>
+                                        </p:attrNameLst>
+                                      </p:cBhvr>
+                                      <p:to>
+                                        <p:strVal val="visible"/>
+                                      </p:to>
+                                    </p:set>
+                                    <p:animEffect transition="in" filter="fade">
+                                      <p:cBhvr>
+                                        <p:cTn id="7" dur="900"/>
+                                        <p:tgtEl>
+                                          <p:spTgt spid="27"/>
+                                        </p:tgtEl>
+                                      </p:cBhvr>
+                                    </p:animEffect>
+                                  </p:childTnLst>
+                                </p:cTn>
+                              </p:par>
+                            </p:childTnLst>
+                          </p:cTn>
+                        </p:par>
+                        <p:par>
+                          <p:cTn id="8" fill="hold">
+                            <p:stCondLst>
+                              <p:cond delay="2900"/>
+                            </p:stCondLst>
+                            <p:childTnLst>
+                              <p:par>
+                                <p:cTn id="9" presetID="10" presetClass="exit" presetSubtype="0" fill="hold" nodeType="afterEffect">
+                                  <p:stCondLst>
+                                    <p:cond delay="5000"/>
+                                  </p:stCondLst>
+                                  <p:childTnLst>
+                                    <p:animEffect transition="out" filter="fade">
+                                      <p:cBhvr>
+                                        <p:cTn id="10" dur="900"/>
+                                        <p:tgtEl>
+                                          <p:spTgt spid="27"/>
+                                        </p:tgtEl>
+                                      </p:cBhvr>
+                                    </p:animEffect>
+                                    <p:set>
+                                      <p:cBhvr>
+                                        <p:cTn id="11" dur="1" fill="hold">
+                                          <p:stCondLst>
+                                            <p:cond delay="899"/>
+                                          </p:stCondLst>
+                                        </p:cTn>
+                                        <p:tgtEl>
+                                          <p:spTgt spid="27"/>
+                                        </p:tgtEl>
+                                        <p:attrNameLst>
+                                          <p:attrName>style.visibility</p:attrName>
+                                        </p:attrNameLst>
+                                      </p:cBhvr>
+                                      <p:to>
+                                        <p:strVal val="hidden"/>
+                                      </p:to>
+                                    </p:set>
+                                  </p:childTnLst>
+                                </p:cTn>
+                              </p:par>
+                            </p:childTnLst>
+                          </p:cTn>
+                        </p:par>
+                      </p:childTnLst>
+                    </p:cTn>
+                  </p:par>
+                </p:childTnLst>
+              </p:cTn>
+              <p:prevCondLst>
+                <p:cond evt="onPrev" delay="0">
+                  <p:tgtEl>
+                    <p:sldTgt/>
+                  </p:tgtEl>
+                </p:cond>
+              </p:prevCondLst>
+              <p:nextCondLst>
+                <p:cond evt="onNext" delay="0">
+                  <p:tgtEl>
+                    <p:sldTgt/>
+                  </p:tgtEl>
+                </p:cond>
+              </p:nextCondLst>
+            </p:seq>
+          </p:childTnLst>
+        </p:cTn>
+      </p:par>
+    </p:tnLst>
+  </p:timing>
 </p:sld>
 </file>
 

--- a/presentations/ispring-course/module-01-stropovka-gruzov/live-preview/S001-S007_live_preview_working_2026-06-22_v4.pptx
+++ b/presentations/ispring-course/module-01-stropovka-gruzov/live-preview/S001-S007_live_preview_working_2026-06-22_v4.pptx
@@ -5,21 +5,21 @@
     <p:sldMasterId id="2147483648" r:id="rId1"/>
   </p:sldMasterIdLst>
   <p:sldIdLst>
-    <p:sldId id="256" r:id="rId2"/>
-    <p:sldId id="257" r:id="rId3"/>
-    <p:sldId id="258" r:id="rId4"/>
-    <p:sldId id="259" r:id="rId5"/>
-    <p:sldId id="260" r:id="rId6"/>
-    <p:sldId id="261" r:id="rId7"/>
-    <p:sldId id="262" r:id="rId8"/>
-    <p:sldId id="263" r:id="rId9"/>
-    <p:sldId id="264" r:id="rId10"/>
-    <p:sldId id="265" r:id="rId11"/>
-    <p:sldId id="266" r:id="rId12"/>
-    <p:sldId id="267" r:id="rId13"/>
-    <p:sldId id="268" r:id="rId14"/>
+    <p:sldId id="256" r:id="rId7"/>
+    <p:sldId id="257" r:id="rId8"/>
+    <p:sldId id="258" r:id="rId9"/>
+    <p:sldId id="259" r:id="rId10"/>
+    <p:sldId id="260" r:id="rId11"/>
+    <p:sldId id="261" r:id="rId12"/>
+    <p:sldId id="262" r:id="rId13"/>
+    <p:sldId id="263" r:id="rId14"/>
+    <p:sldId id="264" r:id="rId15"/>
+    <p:sldId id="265" r:id="rId16"/>
+    <p:sldId id="266" r:id="rId17"/>
+    <p:sldId id="267" r:id="rId18"/>
+    <p:sldId id="268" r:id="rId19"/>
   </p:sldIdLst>
-  <p:sldSz cx="12192000" cy="6858000"/>
+  <p:sldSz cx="12191695" cy="6858000" type="screen4x3"/>
   <p:notesSz cx="6858000" cy="9144000"/>
   <p:defaultTextStyle>
     <a:defPPr>
@@ -300,7 +300,7 @@
           <a:p>
             <a:fld id="{5BCAD085-E8A6-8845-BD4E-CB4CCA059FC4}" type="datetimeFigureOut">
               <a:rPr lang="en-US" smtClean="0"/>
-              <a:t>6/22/2026</a:t>
+              <a:t>1/27/13</a:t>
             </a:fld>
             <a:endParaRPr lang="en-US"/>
           </a:p>
@@ -470,7 +470,7 @@
           <a:p>
             <a:fld id="{5BCAD085-E8A6-8845-BD4E-CB4CCA059FC4}" type="datetimeFigureOut">
               <a:rPr lang="en-US" smtClean="0"/>
-              <a:t>6/22/2026</a:t>
+              <a:t>1/27/13</a:t>
             </a:fld>
             <a:endParaRPr lang="en-US"/>
           </a:p>
@@ -650,7 +650,7 @@
           <a:p>
             <a:fld id="{5BCAD085-E8A6-8845-BD4E-CB4CCA059FC4}" type="datetimeFigureOut">
               <a:rPr lang="en-US" smtClean="0"/>
-              <a:t>6/22/2026</a:t>
+              <a:t>1/27/13</a:t>
             </a:fld>
             <a:endParaRPr lang="en-US"/>
           </a:p>
@@ -820,7 +820,7 @@
           <a:p>
             <a:fld id="{5BCAD085-E8A6-8845-BD4E-CB4CCA059FC4}" type="datetimeFigureOut">
               <a:rPr lang="en-US" smtClean="0"/>
-              <a:t>6/22/2026</a:t>
+              <a:t>1/27/13</a:t>
             </a:fld>
             <a:endParaRPr lang="en-US"/>
           </a:p>
@@ -1066,7 +1066,7 @@
           <a:p>
             <a:fld id="{5BCAD085-E8A6-8845-BD4E-CB4CCA059FC4}" type="datetimeFigureOut">
               <a:rPr lang="en-US" smtClean="0"/>
-              <a:t>6/22/2026</a:t>
+              <a:t>1/27/13</a:t>
             </a:fld>
             <a:endParaRPr lang="en-US"/>
           </a:p>
@@ -1354,7 +1354,7 @@
           <a:p>
             <a:fld id="{5BCAD085-E8A6-8845-BD4E-CB4CCA059FC4}" type="datetimeFigureOut">
               <a:rPr lang="en-US" smtClean="0"/>
-              <a:t>6/22/2026</a:t>
+              <a:t>1/27/13</a:t>
             </a:fld>
             <a:endParaRPr lang="en-US"/>
           </a:p>
@@ -1776,7 +1776,7 @@
           <a:p>
             <a:fld id="{5BCAD085-E8A6-8845-BD4E-CB4CCA059FC4}" type="datetimeFigureOut">
               <a:rPr lang="en-US" smtClean="0"/>
-              <a:t>6/22/2026</a:t>
+              <a:t>1/27/13</a:t>
             </a:fld>
             <a:endParaRPr lang="en-US"/>
           </a:p>
@@ -1894,7 +1894,7 @@
           <a:p>
             <a:fld id="{5BCAD085-E8A6-8845-BD4E-CB4CCA059FC4}" type="datetimeFigureOut">
               <a:rPr lang="en-US" smtClean="0"/>
-              <a:t>6/22/2026</a:t>
+              <a:t>1/27/13</a:t>
             </a:fld>
             <a:endParaRPr lang="en-US"/>
           </a:p>
@@ -1989,7 +1989,7 @@
           <a:p>
             <a:fld id="{5BCAD085-E8A6-8845-BD4E-CB4CCA059FC4}" type="datetimeFigureOut">
               <a:rPr lang="en-US" smtClean="0"/>
-              <a:t>6/22/2026</a:t>
+              <a:t>1/27/13</a:t>
             </a:fld>
             <a:endParaRPr lang="en-US"/>
           </a:p>
@@ -2266,7 +2266,7 @@
           <a:p>
             <a:fld id="{5BCAD085-E8A6-8845-BD4E-CB4CCA059FC4}" type="datetimeFigureOut">
               <a:rPr lang="en-US" smtClean="0"/>
-              <a:t>6/22/2026</a:t>
+              <a:t>1/27/13</a:t>
             </a:fld>
             <a:endParaRPr lang="en-US"/>
           </a:p>
@@ -2519,7 +2519,7 @@
           <a:p>
             <a:fld id="{5BCAD085-E8A6-8845-BD4E-CB4CCA059FC4}" type="datetimeFigureOut">
               <a:rPr lang="en-US" smtClean="0"/>
-              <a:t>6/22/2026</a:t>
+              <a:t>1/27/13</a:t>
             </a:fld>
             <a:endParaRPr lang="en-US"/>
           </a:p>
@@ -2732,7 +2732,7 @@
           <a:p>
             <a:fld id="{5BCAD085-E8A6-8845-BD4E-CB4CCA059FC4}" type="datetimeFigureOut">
               <a:rPr lang="en-US" smtClean="0"/>
-              <a:t>6/22/2026</a:t>
+              <a:t>1/27/13</a:t>
             </a:fld>
             <a:endParaRPr lang="en-US"/>
           </a:p>
@@ -3091,7 +3091,7 @@
 </file>
 
 <file path=ppt/slides/slide1.xml><?xml version="1.0" encoding="utf-8"?>
-<p:sld xmlns:a="http://schemas.openxmlformats.org/drawingml/2006/main" xmlns:r="http://schemas.openxmlformats.org/officeDocument/2006/relationships" xmlns:p="http://schemas.openxmlformats.org/presentationml/2006/main">
+<p:sld xmlns:a="http://schemas.openxmlformats.org/drawingml/2006/main" xmlns:p="http://schemas.openxmlformats.org/presentationml/2006/main" xmlns:r="http://schemas.openxmlformats.org/officeDocument/2006/relationships">
   <p:cSld>
     <p:bg>
       <p:bgPr>
@@ -3107,14 +3107,7 @@
         <p:cNvGrpSpPr/>
         <p:nvPr/>
       </p:nvGrpSpPr>
-      <p:grpSpPr>
-        <a:xfrm>
-          <a:off x="0" y="0"/>
-          <a:ext cx="0" cy="0"/>
-          <a:chOff x="0" y="0"/>
-          <a:chExt cx="0" cy="0"/>
-        </a:xfrm>
-      </p:grpSpPr>
+      <p:grpSpPr/>
       <p:sp>
         <p:nvSpPr>
           <p:cNvPr id="2" name="Rectangle 1"/>
@@ -3155,7 +3148,6 @@
           <a:lstStyle/>
           <a:p>
             <a:pPr algn="ctr"/>
-            <a:endParaRPr/>
           </a:p>
         </p:txBody>
       </p:sp>
@@ -3473,7 +3465,6 @@
           <a:lstStyle/>
           <a:p>
             <a:pPr algn="ctr"/>
-            <a:endParaRPr/>
           </a:p>
         </p:txBody>
       </p:sp>
@@ -3552,7 +3543,7 @@
       <p:sp>
         <p:nvSpPr>
           <p:cNvPr id="13" name="Rounded Rectangle 12">
-            <a:hlinkClick r:id="rId2" action="ppaction://hlinksldjump"/>
+            <a:hlinkClick action="ppaction://hlinksldjump" r:id="rId2"/>
           </p:cNvPr>
           <p:cNvSpPr/>
           <p:nvPr/>
@@ -3613,7 +3604,7 @@
 </file>
 
 <file path=ppt/slides/slide10.xml><?xml version="1.0" encoding="utf-8"?>
-<p:sld xmlns:a="http://schemas.openxmlformats.org/drawingml/2006/main" xmlns:r="http://schemas.openxmlformats.org/officeDocument/2006/relationships" xmlns:p="http://schemas.openxmlformats.org/presentationml/2006/main">
+<p:sld xmlns:a="http://schemas.openxmlformats.org/drawingml/2006/main" xmlns:p="http://schemas.openxmlformats.org/presentationml/2006/main" xmlns:r="http://schemas.openxmlformats.org/officeDocument/2006/relationships">
   <p:cSld>
     <p:bg>
       <p:bgPr>
@@ -3629,14 +3620,7 @@
         <p:cNvGrpSpPr/>
         <p:nvPr/>
       </p:nvGrpSpPr>
-      <p:grpSpPr>
-        <a:xfrm>
-          <a:off x="0" y="0"/>
-          <a:ext cx="0" cy="0"/>
-          <a:chOff x="0" y="0"/>
-          <a:chExt cx="0" cy="0"/>
-        </a:xfrm>
-      </p:grpSpPr>
+      <p:grpSpPr/>
       <p:sp>
         <p:nvSpPr>
           <p:cNvPr id="2" name="Rectangle 1"/>
@@ -3677,7 +3661,6 @@
           <a:lstStyle/>
           <a:p>
             <a:pPr algn="ctr"/>
-            <a:endParaRPr/>
           </a:p>
         </p:txBody>
       </p:sp>
@@ -3808,8 +3791,8 @@
         </p:nvSpPr>
         <p:spPr>
           <a:xfrm>
-            <a:off x="640080" y="1325880"/>
-            <a:ext cx="5303520" cy="4297680"/>
+            <a:off x="640080" y="1261872"/>
+            <a:ext cx="6400800" cy="4526280"/>
           </a:xfrm>
           <a:prstGeom prst="roundRect">
             <a:avLst/>
@@ -3817,9 +3800,9 @@
           <a:solidFill>
             <a:srgbClr val="FFFFFF"/>
           </a:solidFill>
-          <a:ln w="19050">
+          <a:ln w="15240">
             <a:solidFill>
-              <a:srgbClr val="265A89"/>
+              <a:srgbClr val="D2DAE2"/>
             </a:solidFill>
           </a:ln>
         </p:spPr>
@@ -3842,30 +3825,53 @@
           <a:lstStyle/>
           <a:p>
             <a:pPr algn="ctr"/>
-            <a:endParaRPr/>
-          </a:p>
-        </p:txBody>
-      </p:sp>
-      <p:sp>
-        <p:nvSpPr>
-          <p:cNvPr id="7" name="Rounded Rectangle 6"/>
+          </a:p>
+        </p:txBody>
+      </p:sp>
+      <p:pic>
+        <p:nvPicPr>
+          <p:cNvPr id="7" name="Picture 6" descr="S004_avatar-1_signal-podnyat-gruz_white-bg.png"/>
+          <p:cNvPicPr>
+            <a:picLocks noChangeAspect="1"/>
+          </p:cNvPicPr>
+          <p:nvPr/>
+        </p:nvPicPr>
+        <p:blipFill>
+          <a:blip r:embed="rId2"/>
+          <a:stretch>
+            <a:fillRect/>
+          </a:stretch>
+        </p:blipFill>
+        <p:spPr>
+          <a:xfrm>
+            <a:off x="841248" y="1463040"/>
+            <a:ext cx="5989320" cy="3995928"/>
+          </a:xfrm>
+          <a:prstGeom prst="rect">
+            <a:avLst/>
+          </a:prstGeom>
+        </p:spPr>
+      </p:pic>
+      <p:sp>
+        <p:nvSpPr>
+          <p:cNvPr id="8" name="Rounded Rectangle 7"/>
           <p:cNvSpPr/>
           <p:nvPr/>
         </p:nvSpPr>
         <p:spPr>
           <a:xfrm>
-            <a:off x="640080" y="1325880"/>
-            <a:ext cx="5303520" cy="658368"/>
+            <a:off x="7269480" y="1261872"/>
+            <a:ext cx="4343400" cy="3886200"/>
           </a:xfrm>
           <a:prstGeom prst="roundRect">
             <a:avLst/>
           </a:prstGeom>
           <a:solidFill>
-            <a:srgbClr val="265A89"/>
-          </a:solidFill>
-          <a:ln>
+            <a:srgbClr val="FFFFFF"/>
+          </a:solidFill>
+          <a:ln w="19050">
             <a:solidFill>
-              <a:srgbClr val="265A89"/>
+              <a:srgbClr val="DE7436"/>
             </a:solidFill>
           </a:ln>
         </p:spPr>
@@ -3888,97 +3894,6 @@
           <a:lstStyle/>
           <a:p>
             <a:pPr algn="ctr"/>
-            <a:r>
-              <a:rPr sz="2200" b="1">
-                <a:solidFill>
-                  <a:srgbClr val="FFFFFF"/>
-                </a:solidFill>
-              </a:rPr>
-              <a:t>Основные действия</a:t>
-            </a:r>
-          </a:p>
-        </p:txBody>
-      </p:sp>
-      <p:sp>
-        <p:nvSpPr>
-          <p:cNvPr id="8" name="TextBox 7"/>
-          <p:cNvSpPr txBox="1"/>
-          <p:nvPr/>
-        </p:nvSpPr>
-        <p:spPr>
-          <a:xfrm>
-            <a:off x="896112" y="2240280"/>
-            <a:ext cx="4791456" cy="3200400"/>
-          </a:xfrm>
-          <a:prstGeom prst="rect">
-            <a:avLst/>
-          </a:prstGeom>
-          <a:noFill/>
-        </p:spPr>
-        <p:txBody>
-          <a:bodyPr wrap="square">
-            <a:spAutoFit/>
-          </a:bodyPr>
-          <a:lstStyle/>
-          <a:p>
-            <a:pPr>
-              <a:spcAft>
-                <a:spcPts val="800"/>
-              </a:spcAft>
-            </a:pPr>
-            <a:r>
-              <a:rPr sz="1700">
-                <a:solidFill>
-                  <a:srgbClr val="212B36"/>
-                </a:solidFill>
-              </a:rPr>
-              <a:t>Подбирает и проверяет стропы.</a:t>
-            </a:r>
-          </a:p>
-          <a:p>
-            <a:pPr>
-              <a:spcAft>
-                <a:spcPts val="800"/>
-              </a:spcAft>
-            </a:pPr>
-            <a:r>
-              <a:rPr sz="1700">
-                <a:solidFill>
-                  <a:srgbClr val="212B36"/>
-                </a:solidFill>
-              </a:rPr>
-              <a:t>Стропит груз по схеме.</a:t>
-            </a:r>
-          </a:p>
-          <a:p>
-            <a:pPr>
-              <a:spcAft>
-                <a:spcPts val="800"/>
-              </a:spcAft>
-            </a:pPr>
-            <a:r>
-              <a:rPr sz="1700">
-                <a:solidFill>
-                  <a:srgbClr val="212B36"/>
-                </a:solidFill>
-              </a:rPr>
-              <a:t>Подает сигналы крановщику.</a:t>
-            </a:r>
-          </a:p>
-          <a:p>
-            <a:pPr>
-              <a:spcAft>
-                <a:spcPts val="800"/>
-              </a:spcAft>
-            </a:pPr>
-            <a:r>
-              <a:rPr sz="1700">
-                <a:solidFill>
-                  <a:srgbClr val="212B36"/>
-                </a:solidFill>
-              </a:rPr>
-              <a:t>Следит за безопасным перемещением груза.</a:t>
-            </a:r>
           </a:p>
         </p:txBody>
       </p:sp>
@@ -3990,18 +3905,18 @@
         </p:nvSpPr>
         <p:spPr>
           <a:xfrm>
-            <a:off x="6309360" y="1325880"/>
-            <a:ext cx="5212080" cy="4297680"/>
+            <a:off x="7269480" y="1261872"/>
+            <a:ext cx="4343400" cy="621792"/>
           </a:xfrm>
           <a:prstGeom prst="roundRect">
             <a:avLst/>
           </a:prstGeom>
           <a:solidFill>
-            <a:srgbClr val="FFFFFF"/>
-          </a:solidFill>
-          <a:ln w="19050">
+            <a:srgbClr val="DE7436"/>
+          </a:solidFill>
+          <a:ln>
             <a:solidFill>
-              <a:srgbClr val="42855F"/>
+              <a:srgbClr val="DE7436"/>
             </a:solidFill>
           </a:ln>
         </p:spPr>
@@ -4024,30 +3939,85 @@
           <a:lstStyle/>
           <a:p>
             <a:pPr algn="ctr"/>
-            <a:endParaRPr/>
-          </a:p>
-        </p:txBody>
-      </p:sp>
-      <p:sp>
-        <p:nvSpPr>
-          <p:cNvPr id="10" name="Rounded Rectangle 9"/>
+            <a:r>
+              <a:rPr sz="2000" b="1">
+                <a:solidFill>
+                  <a:srgbClr val="FFFFFF"/>
+                </a:solidFill>
+              </a:rPr>
+              <a:t>Определение профессии</a:t>
+            </a:r>
+          </a:p>
+        </p:txBody>
+      </p:sp>
+      <p:sp>
+        <p:nvSpPr>
+          <p:cNvPr id="10" name="TextBox 9"/>
+          <p:cNvSpPr txBox="1"/>
+          <p:nvPr/>
+        </p:nvSpPr>
+        <p:spPr>
+          <a:xfrm>
+            <a:off x="7562088" y="2157984"/>
+            <a:ext cx="3758184" cy="2770632"/>
+          </a:xfrm>
+          <a:prstGeom prst="rect">
+            <a:avLst/>
+          </a:prstGeom>
+          <a:noFill/>
+        </p:spPr>
+        <p:txBody>
+          <a:bodyPr wrap="square">
+            <a:spAutoFit/>
+          </a:bodyPr>
+          <a:lstStyle/>
+          <a:p>
+            <a:pPr algn="l">
+              <a:spcAft>
+                <a:spcPts val="0"/>
+              </a:spcAft>
+            </a:pPr>
+            <a:r>
+              <a:rPr sz="1800" b="1">
+                <a:solidFill>
+                  <a:srgbClr val="122B42"/>
+                </a:solidFill>
+              </a:rPr>
+              <a:t>Стропальщик</a:t>
+            </a:r>
+            <a:r>
+              <a:rPr sz="1800">
+                <a:solidFill>
+                  <a:srgbClr val="212B36"/>
+                </a:solidFill>
+              </a:rPr>
+              <a:t> — рабочая профессия, связанная с подготовкой, обвязкой, зацепкой и безопасным перемещением грузов с помощью грузоподъёмных механизмов.</a:t>
+            </a:r>
+          </a:p>
+        </p:txBody>
+      </p:sp>
+      <p:sp>
+        <p:nvSpPr>
+          <p:cNvPr id="11" name="Rounded Rectangle 10">
+            <a:hlinkClick action="ppaction://hlinksldjump" r:id="rId3"/>
+          </p:cNvPr>
           <p:cNvSpPr/>
           <p:nvPr/>
         </p:nvSpPr>
         <p:spPr>
           <a:xfrm>
-            <a:off x="6309360" y="1325880"/>
-            <a:ext cx="5212080" cy="658368"/>
+            <a:off x="640080" y="5989320"/>
+            <a:ext cx="2148840" cy="457200"/>
           </a:xfrm>
           <a:prstGeom prst="roundRect">
             <a:avLst/>
           </a:prstGeom>
           <a:solidFill>
-            <a:srgbClr val="42855F"/>
+            <a:srgbClr val="537795"/>
           </a:solidFill>
           <a:ln>
             <a:solidFill>
-              <a:srgbClr val="42855F"/>
+              <a:srgbClr val="537795"/>
             </a:solidFill>
           </a:ln>
         </p:spPr>
@@ -4071,80 +4041,12 @@
           <a:p>
             <a:pPr algn="ctr"/>
             <a:r>
-              <a:rPr sz="2200" b="1">
+              <a:rPr sz="1800" b="1">
                 <a:solidFill>
                   <a:srgbClr val="FFFFFF"/>
                 </a:solidFill>
               </a:rPr>
-              <a:t>Ответственность</a:t>
-            </a:r>
-          </a:p>
-        </p:txBody>
-      </p:sp>
-      <p:sp>
-        <p:nvSpPr>
-          <p:cNvPr id="11" name="TextBox 10"/>
-          <p:cNvSpPr txBox="1"/>
-          <p:nvPr/>
-        </p:nvSpPr>
-        <p:spPr>
-          <a:xfrm>
-            <a:off x="6565392" y="2240280"/>
-            <a:ext cx="4700016" cy="3200400"/>
-          </a:xfrm>
-          <a:prstGeom prst="rect">
-            <a:avLst/>
-          </a:prstGeom>
-          <a:noFill/>
-        </p:spPr>
-        <p:txBody>
-          <a:bodyPr wrap="square">
-            <a:spAutoFit/>
-          </a:bodyPr>
-          <a:lstStyle/>
-          <a:p>
-            <a:pPr>
-              <a:spcAft>
-                <a:spcPts val="800"/>
-              </a:spcAft>
-            </a:pPr>
-            <a:r>
-              <a:rPr sz="1700">
-                <a:solidFill>
-                  <a:srgbClr val="212B36"/>
-                </a:solidFill>
-              </a:rPr>
-              <a:t>Он отвечает не только за строп, но и за безопасность.</a:t>
-            </a:r>
-          </a:p>
-          <a:p>
-            <a:pPr>
-              <a:spcAft>
-                <a:spcPts val="800"/>
-              </a:spcAft>
-            </a:pPr>
-            <a:r>
-              <a:rPr sz="1700">
-                <a:solidFill>
-                  <a:srgbClr val="212B36"/>
-                </a:solidFill>
-              </a:rPr>
-              <a:t>Ошибка при строповке может привести к аварии.</a:t>
-            </a:r>
-          </a:p>
-          <a:p>
-            <a:pPr>
-              <a:spcAft>
-                <a:spcPts val="800"/>
-              </a:spcAft>
-            </a:pPr>
-            <a:r>
-              <a:rPr sz="1700">
-                <a:solidFill>
-                  <a:srgbClr val="212B36"/>
-                </a:solidFill>
-              </a:rPr>
-              <a:t>Поэтому все действия должны быть точными и по правилам.</a:t>
+              <a:t>НАЗАД</a:t>
             </a:r>
           </a:p>
         </p:txBody>
@@ -4152,62 +4054,7 @@
       <p:sp>
         <p:nvSpPr>
           <p:cNvPr id="12" name="Rounded Rectangle 11">
-            <a:hlinkClick r:id="rId2" action="ppaction://hlinksldjump"/>
-          </p:cNvPr>
-          <p:cNvSpPr/>
-          <p:nvPr/>
-        </p:nvSpPr>
-        <p:spPr>
-          <a:xfrm>
-            <a:off x="640080" y="5989320"/>
-            <a:ext cx="2148840" cy="457200"/>
-          </a:xfrm>
-          <a:prstGeom prst="roundRect">
-            <a:avLst/>
-          </a:prstGeom>
-          <a:solidFill>
-            <a:srgbClr val="537795"/>
-          </a:solidFill>
-          <a:ln>
-            <a:solidFill>
-              <a:srgbClr val="537795"/>
-            </a:solidFill>
-          </a:ln>
-        </p:spPr>
-        <p:style>
-          <a:lnRef idx="1">
-            <a:schemeClr val="accent1"/>
-          </a:lnRef>
-          <a:fillRef idx="3">
-            <a:schemeClr val="accent1"/>
-          </a:fillRef>
-          <a:effectRef idx="2">
-            <a:schemeClr val="accent1"/>
-          </a:effectRef>
-          <a:fontRef idx="minor">
-            <a:schemeClr val="lt1"/>
-          </a:fontRef>
-        </p:style>
-        <p:txBody>
-          <a:bodyPr rtlCol="0" anchor="ctr"/>
-          <a:lstStyle/>
-          <a:p>
-            <a:pPr algn="ctr"/>
-            <a:r>
-              <a:rPr sz="1800" b="1">
-                <a:solidFill>
-                  <a:srgbClr val="FFFFFF"/>
-                </a:solidFill>
-              </a:rPr>
-              <a:t>НАЗАД</a:t>
-            </a:r>
-          </a:p>
-        </p:txBody>
-      </p:sp>
-      <p:sp>
-        <p:nvSpPr>
-          <p:cNvPr id="13" name="Rounded Rectangle 12">
-            <a:hlinkClick r:id="rId3" action="ppaction://hlinksldjump"/>
+            <a:hlinkClick action="ppaction://hlinksldjump" r:id="rId4"/>
           </p:cNvPr>
           <p:cNvSpPr/>
           <p:nvPr/>
@@ -4268,7 +4115,7 @@
 </file>
 
 <file path=ppt/slides/slide11.xml><?xml version="1.0" encoding="utf-8"?>
-<p:sld xmlns:a="http://schemas.openxmlformats.org/drawingml/2006/main" xmlns:r="http://schemas.openxmlformats.org/officeDocument/2006/relationships" xmlns:p="http://schemas.openxmlformats.org/presentationml/2006/main">
+<p:sld xmlns:a="http://schemas.openxmlformats.org/drawingml/2006/main" xmlns:p="http://schemas.openxmlformats.org/presentationml/2006/main" xmlns:r="http://schemas.openxmlformats.org/officeDocument/2006/relationships">
   <p:cSld>
     <p:bg>
       <p:bgPr>
@@ -4284,14 +4131,7 @@
         <p:cNvGrpSpPr/>
         <p:nvPr/>
       </p:nvGrpSpPr>
-      <p:grpSpPr>
-        <a:xfrm>
-          <a:off x="0" y="0"/>
-          <a:ext cx="0" cy="0"/>
-          <a:chOff x="0" y="0"/>
-          <a:chExt cx="0" cy="0"/>
-        </a:xfrm>
-      </p:grpSpPr>
+      <p:grpSpPr/>
       <p:sp>
         <p:nvSpPr>
           <p:cNvPr id="2" name="Rectangle 1"/>
@@ -4332,7 +4172,6 @@
           <a:lstStyle/>
           <a:p>
             <a:pPr algn="ctr"/>
-            <a:endParaRPr/>
           </a:p>
         </p:txBody>
       </p:sp>
@@ -4463,8 +4302,8 @@
         </p:nvSpPr>
         <p:spPr>
           <a:xfrm>
-            <a:off x="640080" y="1325880"/>
-            <a:ext cx="5303520" cy="4297680"/>
+            <a:off x="694944" y="1188720"/>
+            <a:ext cx="10789920" cy="4590288"/>
           </a:xfrm>
           <a:prstGeom prst="roundRect">
             <a:avLst/>
@@ -4472,9 +4311,9 @@
           <a:solidFill>
             <a:srgbClr val="FFFFFF"/>
           </a:solidFill>
-          <a:ln w="19050">
+          <a:ln w="15240">
             <a:solidFill>
-              <a:srgbClr val="265A89"/>
+              <a:srgbClr val="D2DAE2"/>
             </a:solidFill>
           </a:ln>
         </p:spPr>
@@ -4497,30 +4336,63 @@
           <a:lstStyle/>
           <a:p>
             <a:pPr algn="ctr"/>
-            <a:endParaRPr/>
-          </a:p>
-        </p:txBody>
-      </p:sp>
-      <p:sp>
-        <p:nvSpPr>
-          <p:cNvPr id="7" name="Rounded Rectangle 6"/>
+          </a:p>
+        </p:txBody>
+      </p:sp>
+      <p:sp>
+        <p:nvSpPr>
+          <p:cNvPr id="7" name="TextBox 6"/>
+          <p:cNvSpPr txBox="1"/>
+          <p:nvPr/>
+        </p:nvSpPr>
+        <p:spPr>
+          <a:xfrm>
+            <a:off x="1143000" y="1444752"/>
+            <a:ext cx="9692640" cy="347472"/>
+          </a:xfrm>
+          <a:prstGeom prst="rect">
+            <a:avLst/>
+          </a:prstGeom>
+          <a:noFill/>
+        </p:spPr>
+        <p:txBody>
+          <a:bodyPr wrap="square">
+            <a:spAutoFit/>
+          </a:bodyPr>
+          <a:lstStyle/>
+          <a:p>
+            <a:pPr algn="ctr"/>
+            <a:r>
+              <a:rPr sz="1600" b="0">
+                <a:solidFill>
+                  <a:srgbClr val="6E7A86"/>
+                </a:solidFill>
+              </a:rPr>
+              <a:t>К работе допускаются работники, которые:</a:t>
+            </a:r>
+          </a:p>
+        </p:txBody>
+      </p:sp>
+      <p:sp>
+        <p:nvSpPr>
+          <p:cNvPr id="8" name="Rounded Rectangle 7"/>
           <p:cNvSpPr/>
           <p:nvPr/>
         </p:nvSpPr>
         <p:spPr>
           <a:xfrm>
-            <a:off x="640080" y="1325880"/>
-            <a:ext cx="5303520" cy="658368"/>
+            <a:off x="1115568" y="1938528"/>
+            <a:ext cx="4663440" cy="1078992"/>
           </a:xfrm>
           <a:prstGeom prst="roundRect">
             <a:avLst/>
           </a:prstGeom>
           <a:solidFill>
-            <a:srgbClr val="265A89"/>
-          </a:solidFill>
-          <a:ln>
+            <a:srgbClr val="FFFFFF"/>
+          </a:solidFill>
+          <a:ln w="22860">
             <a:solidFill>
-              <a:srgbClr val="265A89"/>
+              <a:srgbClr val="DE7436"/>
             </a:solidFill>
           </a:ln>
         </p:spPr>
@@ -4539,115 +4411,17 @@
           </a:fontRef>
         </p:style>
         <p:txBody>
-          <a:bodyPr rtlCol="0" anchor="ctr"/>
+          <a:bodyPr rtlCol="0" anchor="ctr" wrap="square"/>
           <a:lstStyle/>
           <a:p>
             <a:pPr algn="ctr"/>
             <a:r>
-              <a:rPr sz="2200" b="1">
-                <a:solidFill>
-                  <a:srgbClr val="FFFFFF"/>
-                </a:solidFill>
-              </a:rPr>
-              <a:t>Допуск к работе</a:t>
-            </a:r>
-          </a:p>
-        </p:txBody>
-      </p:sp>
-      <p:sp>
-        <p:nvSpPr>
-          <p:cNvPr id="8" name="TextBox 7"/>
-          <p:cNvSpPr txBox="1"/>
-          <p:nvPr/>
-        </p:nvSpPr>
-        <p:spPr>
-          <a:xfrm>
-            <a:off x="896112" y="2240280"/>
-            <a:ext cx="4791456" cy="3200400"/>
-          </a:xfrm>
-          <a:prstGeom prst="rect">
-            <a:avLst/>
-          </a:prstGeom>
-          <a:noFill/>
-        </p:spPr>
-        <p:txBody>
-          <a:bodyPr wrap="square">
-            <a:spAutoFit/>
-          </a:bodyPr>
-          <a:lstStyle/>
-          <a:p>
-            <a:pPr>
-              <a:spcAft>
-                <a:spcPts val="800"/>
-              </a:spcAft>
-            </a:pPr>
-            <a:r>
-              <a:rPr sz="1700">
-                <a:solidFill>
-                  <a:srgbClr val="212B36"/>
-                </a:solidFill>
-              </a:rPr>
-              <a:t>Прошел обучение.</a:t>
-            </a:r>
-          </a:p>
-          <a:p>
-            <a:pPr>
-              <a:spcAft>
-                <a:spcPts val="800"/>
-              </a:spcAft>
-            </a:pPr>
-            <a:r>
-              <a:rPr sz="1700">
-                <a:solidFill>
-                  <a:srgbClr val="212B36"/>
-                </a:solidFill>
-              </a:rPr>
-              <a:t>Прошел инструктаж.</a:t>
-            </a:r>
-          </a:p>
-          <a:p>
-            <a:pPr>
-              <a:spcAft>
-                <a:spcPts val="800"/>
-              </a:spcAft>
-            </a:pPr>
-            <a:r>
-              <a:rPr sz="1700">
-                <a:solidFill>
-                  <a:srgbClr val="212B36"/>
-                </a:solidFill>
-              </a:rPr>
-              <a:t>Сдал проверку знаний.</a:t>
-            </a:r>
-          </a:p>
-          <a:p>
-            <a:pPr>
-              <a:spcAft>
-                <a:spcPts val="800"/>
-              </a:spcAft>
-            </a:pPr>
-            <a:r>
-              <a:rPr sz="1700">
-                <a:solidFill>
-                  <a:srgbClr val="212B36"/>
-                </a:solidFill>
-              </a:rPr>
-              <a:t>Получил допуск работодателя.</a:t>
-            </a:r>
-          </a:p>
-          <a:p>
-            <a:pPr>
-              <a:spcAft>
-                <a:spcPts val="800"/>
-              </a:spcAft>
-            </a:pPr>
-            <a:r>
-              <a:rPr sz="1700">
-                <a:solidFill>
-                  <a:srgbClr val="212B36"/>
-                </a:solidFill>
-              </a:rPr>
-              <a:t>Использует СИЗ.</a:t>
+              <a:rPr sz="2400" b="1">
+                <a:solidFill>
+                  <a:srgbClr val="DE7436"/>
+                </a:solidFill>
+              </a:rPr>
+              <a:t>18 лет и старше</a:t>
             </a:r>
           </a:p>
         </p:txBody>
@@ -4660,8 +4434,8 @@
         </p:nvSpPr>
         <p:spPr>
           <a:xfrm>
-            <a:off x="6309360" y="1325880"/>
-            <a:ext cx="5212080" cy="4297680"/>
+            <a:off x="6181344" y="1938528"/>
+            <a:ext cx="4663440" cy="1078992"/>
           </a:xfrm>
           <a:prstGeom prst="roundRect">
             <a:avLst/>
@@ -4669,9 +4443,9 @@
           <a:solidFill>
             <a:srgbClr val="FFFFFF"/>
           </a:solidFill>
-          <a:ln w="19050">
+          <a:ln w="22860">
             <a:solidFill>
-              <a:srgbClr val="42855F"/>
+              <a:srgbClr val="DE7436"/>
             </a:solidFill>
           </a:ln>
         </p:spPr>
@@ -4690,11 +4464,18 @@
           </a:fontRef>
         </p:style>
         <p:txBody>
-          <a:bodyPr rtlCol="0" anchor="ctr"/>
+          <a:bodyPr rtlCol="0" anchor="ctr" wrap="square"/>
           <a:lstStyle/>
           <a:p>
             <a:pPr algn="ctr"/>
-            <a:endParaRPr/>
+            <a:r>
+              <a:rPr sz="2200" b="1">
+                <a:solidFill>
+                  <a:srgbClr val="DE7436"/>
+                </a:solidFill>
+              </a:rPr>
+              <a:t>медицинский осмотр</a:t>
+            </a:r>
           </a:p>
         </p:txBody>
       </p:sp>
@@ -4706,18 +4487,18 @@
         </p:nvSpPr>
         <p:spPr>
           <a:xfrm>
-            <a:off x="6309360" y="1325880"/>
-            <a:ext cx="5212080" cy="658368"/>
+            <a:off x="1115568" y="3401568"/>
+            <a:ext cx="4663440" cy="1298448"/>
           </a:xfrm>
           <a:prstGeom prst="roundRect">
             <a:avLst/>
           </a:prstGeom>
           <a:solidFill>
-            <a:srgbClr val="42855F"/>
-          </a:solidFill>
-          <a:ln>
+            <a:srgbClr val="FFFFFF"/>
+          </a:solidFill>
+          <a:ln w="22860">
             <a:solidFill>
-              <a:srgbClr val="42855F"/>
+              <a:srgbClr val="DE7436"/>
             </a:solidFill>
           </a:ln>
         </p:spPr>
@@ -4736,85 +4517,71 @@
           </a:fontRef>
         </p:style>
         <p:txBody>
-          <a:bodyPr rtlCol="0" anchor="ctr"/>
+          <a:bodyPr rtlCol="0" anchor="ctr" wrap="square"/>
           <a:lstStyle/>
           <a:p>
             <a:pPr algn="ctr"/>
             <a:r>
               <a:rPr sz="2200" b="1">
                 <a:solidFill>
-                  <a:srgbClr val="FFFFFF"/>
-                </a:solidFill>
-              </a:rPr>
-              <a:t>Важный вывод</a:t>
-            </a:r>
-          </a:p>
-        </p:txBody>
-      </p:sp>
-      <p:sp>
-        <p:nvSpPr>
-          <p:cNvPr id="11" name="TextBox 10"/>
-          <p:cNvSpPr txBox="1"/>
-          <p:nvPr/>
-        </p:nvSpPr>
-        <p:spPr>
-          <a:xfrm>
-            <a:off x="6565392" y="2240280"/>
-            <a:ext cx="4700016" cy="3200400"/>
-          </a:xfrm>
-          <a:prstGeom prst="rect">
-            <a:avLst/>
-          </a:prstGeom>
-          <a:noFill/>
-        </p:spPr>
-        <p:txBody>
-          <a:bodyPr wrap="square">
-            <a:spAutoFit/>
-          </a:bodyPr>
-          <a:lstStyle/>
-          <a:p>
-            <a:pPr>
-              <a:spcAft>
-                <a:spcPts val="800"/>
-              </a:spcAft>
-            </a:pPr>
-            <a:r>
-              <a:rPr sz="1700">
-                <a:solidFill>
-                  <a:srgbClr val="212B36"/>
-                </a:solidFill>
-              </a:rPr>
-              <a:t>Допуск к работе - это не формальность.</a:t>
-            </a:r>
-          </a:p>
-          <a:p>
-            <a:pPr>
-              <a:spcAft>
-                <a:spcPts val="800"/>
-              </a:spcAft>
-            </a:pPr>
-            <a:r>
-              <a:rPr sz="1700">
-                <a:solidFill>
-                  <a:srgbClr val="212B36"/>
-                </a:solidFill>
-              </a:rPr>
-              <a:t>Без подготовки и проверки знаний работать нельзя.</a:t>
-            </a:r>
-          </a:p>
-          <a:p>
-            <a:pPr>
-              <a:spcAft>
-                <a:spcPts val="800"/>
-              </a:spcAft>
-            </a:pPr>
-            <a:r>
-              <a:rPr sz="1700">
-                <a:solidFill>
-                  <a:srgbClr val="212B36"/>
-                </a:solidFill>
-              </a:rPr>
-              <a:t>Безопасная работа начинается с допуска.</a:t>
+                  <a:srgbClr val="DE7436"/>
+                </a:solidFill>
+              </a:rPr>
+              <a:t>обученные
+и аттестованные</a:t>
+            </a:r>
+          </a:p>
+        </p:txBody>
+      </p:sp>
+      <p:sp>
+        <p:nvSpPr>
+          <p:cNvPr id="11" name="Rounded Rectangle 10"/>
+          <p:cNvSpPr/>
+          <p:nvPr/>
+        </p:nvSpPr>
+        <p:spPr>
+          <a:xfrm>
+            <a:off x="6181344" y="3401568"/>
+            <a:ext cx="4663440" cy="1298448"/>
+          </a:xfrm>
+          <a:prstGeom prst="roundRect">
+            <a:avLst/>
+          </a:prstGeom>
+          <a:solidFill>
+            <a:srgbClr val="FFFFFF"/>
+          </a:solidFill>
+          <a:ln w="22860">
+            <a:solidFill>
+              <a:srgbClr val="DE7436"/>
+            </a:solidFill>
+          </a:ln>
+        </p:spPr>
+        <p:style>
+          <a:lnRef idx="1">
+            <a:schemeClr val="accent1"/>
+          </a:lnRef>
+          <a:fillRef idx="3">
+            <a:schemeClr val="accent1"/>
+          </a:fillRef>
+          <a:effectRef idx="2">
+            <a:schemeClr val="accent1"/>
+          </a:effectRef>
+          <a:fontRef idx="minor">
+            <a:schemeClr val="lt1"/>
+          </a:fontRef>
+        </p:style>
+        <p:txBody>
+          <a:bodyPr rtlCol="0" anchor="ctr" wrap="square"/>
+          <a:lstStyle/>
+          <a:p>
+            <a:pPr algn="ctr"/>
+            <a:r>
+              <a:rPr sz="2100" b="1">
+                <a:solidFill>
+                  <a:srgbClr val="DE7436"/>
+                </a:solidFill>
+              </a:rPr>
+              <a:t>получившие удостоверение</a:t>
             </a:r>
           </a:p>
         </p:txBody>
@@ -4822,7 +4589,7 @@
       <p:sp>
         <p:nvSpPr>
           <p:cNvPr id="12" name="Rounded Rectangle 11">
-            <a:hlinkClick r:id="rId2" action="ppaction://hlinksldjump"/>
+            <a:hlinkClick action="ppaction://hlinksldjump" r:id="rId2"/>
           </p:cNvPr>
           <p:cNvSpPr/>
           <p:nvPr/>
@@ -4877,7 +4644,7 @@
       <p:sp>
         <p:nvSpPr>
           <p:cNvPr id="13" name="Rounded Rectangle 12">
-            <a:hlinkClick r:id="rId3" action="ppaction://hlinksldjump"/>
+            <a:hlinkClick action="ppaction://hlinksldjump" r:id="rId3"/>
           </p:cNvPr>
           <p:cNvSpPr/>
           <p:nvPr/>
@@ -4938,7 +4705,7 @@
 </file>
 
 <file path=ppt/slides/slide12.xml><?xml version="1.0" encoding="utf-8"?>
-<p:sld xmlns:a="http://schemas.openxmlformats.org/drawingml/2006/main" xmlns:r="http://schemas.openxmlformats.org/officeDocument/2006/relationships" xmlns:p="http://schemas.openxmlformats.org/presentationml/2006/main">
+<p:sld xmlns:a="http://schemas.openxmlformats.org/drawingml/2006/main" xmlns:p="http://schemas.openxmlformats.org/presentationml/2006/main" xmlns:r="http://schemas.openxmlformats.org/officeDocument/2006/relationships">
   <p:cSld>
     <p:bg>
       <p:bgPr>
@@ -4954,14 +4721,7 @@
         <p:cNvGrpSpPr/>
         <p:nvPr/>
       </p:nvGrpSpPr>
-      <p:grpSpPr>
-        <a:xfrm>
-          <a:off x="0" y="0"/>
-          <a:ext cx="0" cy="0"/>
-          <a:chOff x="0" y="0"/>
-          <a:chExt cx="0" cy="0"/>
-        </a:xfrm>
-      </p:grpSpPr>
+      <p:grpSpPr/>
       <p:sp>
         <p:nvSpPr>
           <p:cNvPr id="2" name="Rectangle 1"/>
@@ -5002,7 +4762,6 @@
           <a:lstStyle/>
           <a:p>
             <a:pPr algn="ctr"/>
-            <a:endParaRPr/>
           </a:p>
         </p:txBody>
       </p:sp>
@@ -5167,7 +4926,6 @@
           <a:lstStyle/>
           <a:p>
             <a:pPr algn="ctr"/>
-            <a:endParaRPr/>
           </a:p>
         </p:txBody>
       </p:sp>
@@ -5334,7 +5092,6 @@
           <a:lstStyle/>
           <a:p>
             <a:pPr algn="ctr"/>
-            <a:endParaRPr/>
           </a:p>
         </p:txBody>
       </p:sp>
@@ -5462,7 +5219,7 @@
       <p:sp>
         <p:nvSpPr>
           <p:cNvPr id="12" name="Rounded Rectangle 11">
-            <a:hlinkClick r:id="rId2" action="ppaction://hlinksldjump"/>
+            <a:hlinkClick action="ppaction://hlinksldjump" r:id="rId2"/>
           </p:cNvPr>
           <p:cNvSpPr/>
           <p:nvPr/>
@@ -5517,7 +5274,7 @@
       <p:sp>
         <p:nvSpPr>
           <p:cNvPr id="13" name="Rounded Rectangle 12">
-            <a:hlinkClick r:id="rId3" action="ppaction://hlinksldjump"/>
+            <a:hlinkClick action="ppaction://hlinksldjump" r:id="rId3"/>
           </p:cNvPr>
           <p:cNvSpPr/>
           <p:nvPr/>
@@ -5578,7 +5335,7 @@
 </file>
 
 <file path=ppt/slides/slide13.xml><?xml version="1.0" encoding="utf-8"?>
-<p:sld xmlns:a="http://schemas.openxmlformats.org/drawingml/2006/main" xmlns:r="http://schemas.openxmlformats.org/officeDocument/2006/relationships" xmlns:p="http://schemas.openxmlformats.org/presentationml/2006/main">
+<p:sld xmlns:a="http://schemas.openxmlformats.org/drawingml/2006/main" xmlns:p="http://schemas.openxmlformats.org/presentationml/2006/main" xmlns:r="http://schemas.openxmlformats.org/officeDocument/2006/relationships">
   <p:cSld>
     <p:bg>
       <p:bgPr>
@@ -5594,14 +5351,7 @@
         <p:cNvGrpSpPr/>
         <p:nvPr/>
       </p:nvGrpSpPr>
-      <p:grpSpPr>
-        <a:xfrm>
-          <a:off x="0" y="0"/>
-          <a:ext cx="0" cy="0"/>
-          <a:chOff x="0" y="0"/>
-          <a:chExt cx="0" cy="0"/>
-        </a:xfrm>
-      </p:grpSpPr>
+      <p:grpSpPr/>
       <p:sp>
         <p:nvSpPr>
           <p:cNvPr id="2" name="Rectangle 1"/>
@@ -5642,7 +5392,6 @@
           <a:lstStyle/>
           <a:p>
             <a:pPr algn="ctr"/>
-            <a:endParaRPr/>
           </a:p>
         </p:txBody>
       </p:sp>
@@ -5807,7 +5556,6 @@
           <a:lstStyle/>
           <a:p>
             <a:pPr algn="ctr"/>
-            <a:endParaRPr/>
           </a:p>
         </p:txBody>
       </p:sp>
@@ -5974,7 +5722,6 @@
           <a:lstStyle/>
           <a:p>
             <a:pPr algn="ctr"/>
-            <a:endParaRPr/>
           </a:p>
         </p:txBody>
       </p:sp>
@@ -6017,7 +5764,7 @@
       <p:sp>
         <p:nvSpPr>
           <p:cNvPr id="11" name="Rounded Rectangle 10">
-            <a:hlinkClick r:id="rId2" action="ppaction://hlinksldjump"/>
+            <a:hlinkClick action="ppaction://hlinksldjump" r:id="rId2"/>
           </p:cNvPr>
           <p:cNvSpPr/>
           <p:nvPr/>
@@ -6078,7 +5825,7 @@
 </file>
 
 <file path=ppt/slides/slide2.xml><?xml version="1.0" encoding="utf-8"?>
-<p:sld xmlns:a="http://schemas.openxmlformats.org/drawingml/2006/main" xmlns:r="http://schemas.openxmlformats.org/officeDocument/2006/relationships" xmlns:p="http://schemas.openxmlformats.org/presentationml/2006/main">
+<p:sld xmlns:a="http://schemas.openxmlformats.org/drawingml/2006/main" xmlns:p="http://schemas.openxmlformats.org/presentationml/2006/main" xmlns:r="http://schemas.openxmlformats.org/officeDocument/2006/relationships">
   <p:cSld>
     <p:bg>
       <p:bgPr>
@@ -6094,14 +5841,7 @@
         <p:cNvGrpSpPr/>
         <p:nvPr/>
       </p:nvGrpSpPr>
-      <p:grpSpPr>
-        <a:xfrm>
-          <a:off x="0" y="0"/>
-          <a:ext cx="0" cy="0"/>
-          <a:chOff x="0" y="0"/>
-          <a:chExt cx="0" cy="0"/>
-        </a:xfrm>
-      </p:grpSpPr>
+      <p:grpSpPr/>
       <p:sp>
         <p:nvSpPr>
           <p:cNvPr id="2" name="Rectangle 1"/>
@@ -6142,7 +5882,6 @@
           <a:lstStyle/>
           <a:p>
             <a:pPr algn="ctr"/>
-            <a:endParaRPr/>
           </a:p>
         </p:txBody>
       </p:sp>
@@ -6302,7 +6041,7 @@
       <p:sp>
         <p:nvSpPr>
           <p:cNvPr id="7" name="Rounded Rectangle 6">
-            <a:hlinkClick r:id="rId2" action="ppaction://hlinksldjump"/>
+            <a:hlinkClick action="ppaction://hlinksldjump" r:id="rId2"/>
           </p:cNvPr>
           <p:cNvSpPr/>
           <p:nvPr/>
@@ -6343,7 +6082,6 @@
           <a:lstStyle/>
           <a:p>
             <a:pPr algn="ctr"/>
-            <a:endParaRPr/>
           </a:p>
         </p:txBody>
       </p:sp>
@@ -6471,7 +6209,7 @@
       <p:sp>
         <p:nvSpPr>
           <p:cNvPr id="10" name="Rounded Rectangle 9">
-            <a:hlinkClick r:id="rId3" action="ppaction://hlinksldjump"/>
+            <a:hlinkClick action="ppaction://hlinksldjump" r:id="rId3"/>
           </p:cNvPr>
           <p:cNvSpPr/>
           <p:nvPr/>
@@ -6512,7 +6250,6 @@
           <a:lstStyle/>
           <a:p>
             <a:pPr algn="ctr"/>
-            <a:endParaRPr/>
           </a:p>
         </p:txBody>
       </p:sp>
@@ -6640,7 +6377,7 @@
       <p:sp>
         <p:nvSpPr>
           <p:cNvPr id="13" name="Rounded Rectangle 12">
-            <a:hlinkClick r:id="rId2" action="ppaction://hlinksldjump"/>
+            <a:hlinkClick action="ppaction://hlinksldjump" r:id="rId2"/>
           </p:cNvPr>
           <p:cNvSpPr/>
           <p:nvPr/>
@@ -6695,7 +6432,7 @@
       <p:sp>
         <p:nvSpPr>
           <p:cNvPr id="14" name="Rounded Rectangle 13">
-            <a:hlinkClick r:id="rId3" action="ppaction://hlinksldjump"/>
+            <a:hlinkClick action="ppaction://hlinksldjump" r:id="rId3"/>
           </p:cNvPr>
           <p:cNvSpPr/>
           <p:nvPr/>
@@ -6750,7 +6487,7 @@
       <p:sp>
         <p:nvSpPr>
           <p:cNvPr id="15" name="Rounded Rectangle 14">
-            <a:hlinkClick r:id="rId4" action="ppaction://hlinksldjump"/>
+            <a:hlinkClick action="ppaction://hlinksldjump" r:id="rId4"/>
           </p:cNvPr>
           <p:cNvSpPr/>
           <p:nvPr/>
@@ -6805,7 +6542,7 @@
       <p:sp>
         <p:nvSpPr>
           <p:cNvPr id="16" name="Rounded Rectangle 15">
-            <a:hlinkClick r:id="rId5" action="ppaction://hlinksldjump"/>
+            <a:hlinkClick action="ppaction://hlinksldjump" r:id="rId5"/>
           </p:cNvPr>
           <p:cNvSpPr/>
           <p:nvPr/>
@@ -6866,7 +6603,7 @@
 </file>
 
 <file path=ppt/slides/slide3.xml><?xml version="1.0" encoding="utf-8"?>
-<p:sld xmlns:a="http://schemas.openxmlformats.org/drawingml/2006/main" xmlns:r="http://schemas.openxmlformats.org/officeDocument/2006/relationships" xmlns:p="http://schemas.openxmlformats.org/presentationml/2006/main">
+<p:sld xmlns:a="http://schemas.openxmlformats.org/drawingml/2006/main" xmlns:p="http://schemas.openxmlformats.org/presentationml/2006/main" xmlns:r="http://schemas.openxmlformats.org/officeDocument/2006/relationships">
   <p:cSld>
     <p:bg>
       <p:bgPr>
@@ -6882,14 +6619,7 @@
         <p:cNvGrpSpPr/>
         <p:nvPr/>
       </p:nvGrpSpPr>
-      <p:grpSpPr>
-        <a:xfrm>
-          <a:off x="0" y="0"/>
-          <a:ext cx="0" cy="0"/>
-          <a:chOff x="0" y="0"/>
-          <a:chExt cx="0" cy="0"/>
-        </a:xfrm>
-      </p:grpSpPr>
+      <p:grpSpPr/>
       <p:sp>
         <p:nvSpPr>
           <p:cNvPr id="2" name="Rectangle 1"/>
@@ -6930,7 +6660,6 @@
           <a:lstStyle/>
           <a:p>
             <a:pPr algn="ctr"/>
-            <a:endParaRPr/>
           </a:p>
         </p:txBody>
       </p:sp>
@@ -7095,7 +6824,6 @@
           <a:lstStyle/>
           <a:p>
             <a:pPr algn="ctr"/>
-            <a:endParaRPr/>
           </a:p>
         </p:txBody>
       </p:sp>
@@ -7297,7 +7025,6 @@
           <a:lstStyle/>
           <a:p>
             <a:pPr algn="ctr"/>
-            <a:endParaRPr/>
           </a:p>
         </p:txBody>
       </p:sp>
@@ -7455,7 +7182,7 @@
       <p:sp>
         <p:nvSpPr>
           <p:cNvPr id="14" name="Rounded Rectangle 13">
-            <a:hlinkClick r:id="rId2" action="ppaction://hlinksldjump"/>
+            <a:hlinkClick action="ppaction://hlinksldjump" r:id="rId2"/>
           </p:cNvPr>
           <p:cNvSpPr/>
           <p:nvPr/>
@@ -7516,7 +7243,7 @@
 </file>
 
 <file path=ppt/slides/slide4.xml><?xml version="1.0" encoding="utf-8"?>
-<p:sld xmlns:a="http://schemas.openxmlformats.org/drawingml/2006/main" xmlns:r="http://schemas.openxmlformats.org/officeDocument/2006/relationships" xmlns:p="http://schemas.openxmlformats.org/presentationml/2006/main">
+<p:sld xmlns:a="http://schemas.openxmlformats.org/drawingml/2006/main" xmlns:p="http://schemas.openxmlformats.org/presentationml/2006/main" xmlns:r="http://schemas.openxmlformats.org/officeDocument/2006/relationships">
   <p:cSld>
     <p:bg>
       <p:bgPr>
@@ -7532,14 +7259,7 @@
         <p:cNvGrpSpPr/>
         <p:nvPr/>
       </p:nvGrpSpPr>
-      <p:grpSpPr>
-        <a:xfrm>
-          <a:off x="0" y="0"/>
-          <a:ext cx="0" cy="0"/>
-          <a:chOff x="0" y="0"/>
-          <a:chExt cx="0" cy="0"/>
-        </a:xfrm>
-      </p:grpSpPr>
+      <p:grpSpPr/>
       <p:sp>
         <p:nvSpPr>
           <p:cNvPr id="2" name="Rectangle 1"/>
@@ -7580,7 +7300,6 @@
           <a:lstStyle/>
           <a:p>
             <a:pPr algn="ctr"/>
-            <a:endParaRPr/>
           </a:p>
         </p:txBody>
       </p:sp>
@@ -7745,7 +7464,6 @@
           <a:lstStyle/>
           <a:p>
             <a:pPr algn="ctr"/>
-            <a:endParaRPr/>
           </a:p>
         </p:txBody>
       </p:sp>
@@ -7823,7 +7541,6 @@
           <a:lstStyle/>
           <a:p>
             <a:pPr algn="ctr"/>
-            <a:endParaRPr/>
           </a:p>
         </p:txBody>
       </p:sp>
@@ -8267,7 +7984,7 @@
       <p:sp>
         <p:nvSpPr>
           <p:cNvPr id="11" name="Rounded Rectangle 10">
-            <a:hlinkClick r:id="rId2" action="ppaction://hlinksldjump"/>
+            <a:hlinkClick action="ppaction://hlinksldjump" r:id="rId2"/>
           </p:cNvPr>
           <p:cNvSpPr/>
           <p:nvPr/>
@@ -8328,7 +8045,7 @@
 </file>
 
 <file path=ppt/slides/slide5.xml><?xml version="1.0" encoding="utf-8"?>
-<p:sld xmlns:a="http://schemas.openxmlformats.org/drawingml/2006/main" xmlns:r="http://schemas.openxmlformats.org/officeDocument/2006/relationships" xmlns:p="http://schemas.openxmlformats.org/presentationml/2006/main">
+<p:sld xmlns:a="http://schemas.openxmlformats.org/drawingml/2006/main" xmlns:p="http://schemas.openxmlformats.org/presentationml/2006/main" xmlns:r="http://schemas.openxmlformats.org/officeDocument/2006/relationships">
   <p:cSld>
     <p:bg>
       <p:bgPr>
@@ -8344,14 +8061,7 @@
         <p:cNvGrpSpPr/>
         <p:nvPr/>
       </p:nvGrpSpPr>
-      <p:grpSpPr>
-        <a:xfrm>
-          <a:off x="0" y="0"/>
-          <a:ext cx="0" cy="0"/>
-          <a:chOff x="0" y="0"/>
-          <a:chExt cx="0" cy="0"/>
-        </a:xfrm>
-      </p:grpSpPr>
+      <p:grpSpPr/>
       <p:sp>
         <p:nvSpPr>
           <p:cNvPr id="2" name="Rectangle 1"/>
@@ -8392,7 +8102,6 @@
           <a:lstStyle/>
           <a:p>
             <a:pPr algn="ctr"/>
-            <a:endParaRPr/>
           </a:p>
         </p:txBody>
       </p:sp>
@@ -8711,7 +8420,7 @@
       <p:sp>
         <p:nvSpPr>
           <p:cNvPr id="10" name="Rectangle 9">
-            <a:hlinkClick r:id="rId2" action="ppaction://hlinksldjump"/>
+            <a:hlinkClick action="ppaction://hlinksldjump" r:id="rId3"/>
           </p:cNvPr>
           <p:cNvSpPr/>
           <p:nvPr/>
@@ -8748,7 +8457,7 @@
           </a:fontRef>
         </p:style>
         <p:txBody>
-          <a:bodyPr wrap="square" rtlCol="0" anchor="ctr"/>
+          <a:bodyPr rtlCol="0" anchor="ctr" wrap="square"/>
           <a:lstStyle/>
           <a:p>
             <a:pPr algn="l"/>
@@ -8801,7 +8510,7 @@
           </a:fontRef>
         </p:style>
         <p:txBody>
-          <a:bodyPr wrap="square" rtlCol="0" anchor="ctr"/>
+          <a:bodyPr rtlCol="0" anchor="ctr" wrap="square"/>
           <a:lstStyle/>
           <a:p>
             <a:pPr algn="ctr"/>
@@ -8854,7 +8563,7 @@
           </a:fontRef>
         </p:style>
         <p:txBody>
-          <a:bodyPr wrap="square" rtlCol="0" anchor="ctr"/>
+          <a:bodyPr rtlCol="0" anchor="ctr" wrap="square"/>
           <a:lstStyle/>
           <a:p>
             <a:pPr algn="l"/>
@@ -8873,7 +8582,7 @@
       <p:sp>
         <p:nvSpPr>
           <p:cNvPr id="13" name="Rectangle 12">
-            <a:hlinkClick r:id="rId3" action="ppaction://hlinksldjump"/>
+            <a:hlinkClick action="ppaction://hlinksldjump" r:id="rId4"/>
           </p:cNvPr>
           <p:cNvSpPr/>
           <p:nvPr/>
@@ -8910,7 +8619,7 @@
           </a:fontRef>
         </p:style>
         <p:txBody>
-          <a:bodyPr wrap="square" rtlCol="0" anchor="ctr"/>
+          <a:bodyPr rtlCol="0" anchor="ctr" wrap="square"/>
           <a:lstStyle/>
           <a:p>
             <a:pPr algn="l"/>
@@ -8963,7 +8672,7 @@
           </a:fontRef>
         </p:style>
         <p:txBody>
-          <a:bodyPr wrap="square" rtlCol="0" anchor="ctr"/>
+          <a:bodyPr rtlCol="0" anchor="ctr" wrap="square"/>
           <a:lstStyle/>
           <a:p>
             <a:pPr algn="ctr"/>
@@ -9016,7 +8725,7 @@
           </a:fontRef>
         </p:style>
         <p:txBody>
-          <a:bodyPr wrap="square" rtlCol="0" anchor="ctr"/>
+          <a:bodyPr rtlCol="0" anchor="ctr" wrap="square"/>
           <a:lstStyle/>
           <a:p>
             <a:pPr algn="l"/>
@@ -9034,7 +8743,7 @@
       <p:sp>
         <p:nvSpPr>
           <p:cNvPr id="16" name="Rectangle 15">
-            <a:hlinkClick r:id="rId4" action="ppaction://hlinksldjump"/>
+            <a:hlinkClick action="ppaction://hlinksldjump" r:id="rId5"/>
           </p:cNvPr>
           <p:cNvSpPr/>
           <p:nvPr/>
@@ -9071,7 +8780,7 @@
           </a:fontRef>
         </p:style>
         <p:txBody>
-          <a:bodyPr wrap="square" rtlCol="0" anchor="ctr"/>
+          <a:bodyPr rtlCol="0" anchor="ctr" wrap="square"/>
           <a:lstStyle/>
           <a:p>
             <a:pPr algn="l"/>
@@ -9124,7 +8833,7 @@
           </a:fontRef>
         </p:style>
         <p:txBody>
-          <a:bodyPr wrap="square" rtlCol="0" anchor="ctr"/>
+          <a:bodyPr rtlCol="0" anchor="ctr" wrap="square"/>
           <a:lstStyle/>
           <a:p>
             <a:pPr algn="ctr"/>
@@ -9177,7 +8886,7 @@
           </a:fontRef>
         </p:style>
         <p:txBody>
-          <a:bodyPr wrap="square" rtlCol="0" anchor="ctr"/>
+          <a:bodyPr rtlCol="0" anchor="ctr" wrap="square"/>
           <a:lstStyle/>
           <a:p>
             <a:pPr algn="l"/>
@@ -9196,7 +8905,7 @@
       <p:sp>
         <p:nvSpPr>
           <p:cNvPr id="19" name="Rectangle 18">
-            <a:hlinkClick r:id="rId5" action="ppaction://hlinksldjump"/>
+            <a:hlinkClick action="ppaction://hlinksldjump" r:id="rId6"/>
           </p:cNvPr>
           <p:cNvSpPr/>
           <p:nvPr/>
@@ -9233,7 +8942,7 @@
           </a:fontRef>
         </p:style>
         <p:txBody>
-          <a:bodyPr wrap="square" rtlCol="0" anchor="ctr"/>
+          <a:bodyPr rtlCol="0" anchor="ctr" wrap="square"/>
           <a:lstStyle/>
           <a:p>
             <a:pPr algn="l"/>
@@ -9286,7 +8995,7 @@
           </a:fontRef>
         </p:style>
         <p:txBody>
-          <a:bodyPr wrap="square" rtlCol="0" anchor="ctr"/>
+          <a:bodyPr rtlCol="0" anchor="ctr" wrap="square"/>
           <a:lstStyle/>
           <a:p>
             <a:pPr algn="ctr"/>
@@ -9339,7 +9048,7 @@
           </a:fontRef>
         </p:style>
         <p:txBody>
-          <a:bodyPr wrap="square" rtlCol="0" anchor="ctr"/>
+          <a:bodyPr rtlCol="0" anchor="ctr" wrap="square"/>
           <a:lstStyle/>
           <a:p>
             <a:pPr algn="l"/>
@@ -9354,162 +9063,146 @@
           </a:p>
         </p:txBody>
       </p:sp>
-      <p:grpSp>
-        <p:nvGrpSpPr>
-          <p:cNvPr id="27" name="S003_INFO_GROUP"/>
-          <p:cNvGrpSpPr/>
-          <p:nvPr/>
-        </p:nvGrpSpPr>
-        <p:grpSpPr>
+      <p:sp>
+        <p:nvSpPr>
+          <p:cNvPr id="22" name="Rounded Rectangle 21"/>
+          <p:cNvSpPr/>
+          <p:nvPr/>
+        </p:nvSpPr>
+        <p:spPr>
           <a:xfrm>
             <a:off x="9555480" y="1691640"/>
             <a:ext cx="1965960" cy="1965960"/>
-            <a:chOff x="9555480" y="1691640"/>
-            <a:chExt cx="1965960" cy="1965960"/>
-          </a:xfrm>
-        </p:grpSpPr>
-        <p:sp>
-          <p:nvSpPr>
-            <p:cNvPr id="22" name="Rounded Rectangle 21"/>
-            <p:cNvSpPr/>
-            <p:nvPr/>
-          </p:nvSpPr>
-          <p:spPr>
-            <a:xfrm>
-              <a:off x="9555480" y="1691640"/>
-              <a:ext cx="1965960" cy="1965960"/>
-            </a:xfrm>
-            <a:prstGeom prst="roundRect">
-              <a:avLst/>
-            </a:prstGeom>
-            <a:solidFill>
-              <a:srgbClr val="FFFFFF"/>
-            </a:solidFill>
-            <a:ln w="19050">
-              <a:solidFill>
-                <a:srgbClr val="42855F"/>
-              </a:solidFill>
-            </a:ln>
-          </p:spPr>
-          <p:style>
-            <a:lnRef idx="1">
-              <a:schemeClr val="accent1"/>
-            </a:lnRef>
-            <a:fillRef idx="3">
-              <a:schemeClr val="accent1"/>
-            </a:fillRef>
-            <a:effectRef idx="2">
-              <a:schemeClr val="accent1"/>
-            </a:effectRef>
-            <a:fontRef idx="minor">
-              <a:schemeClr val="lt1"/>
-            </a:fontRef>
-          </p:style>
-          <p:txBody>
-            <a:bodyPr rtlCol="0" anchor="ctr"/>
-            <a:lstStyle/>
-            <a:p>
-              <a:pPr algn="ctr"/>
-              <a:endParaRPr/>
-            </a:p>
-          </p:txBody>
-        </p:sp>
-        <p:sp>
-          <p:nvSpPr>
-            <p:cNvPr id="23" name="Rounded Rectangle 22"/>
-            <p:cNvSpPr/>
-            <p:nvPr/>
-          </p:nvSpPr>
-          <p:spPr>
-            <a:xfrm>
-              <a:off x="9555480" y="1691640"/>
-              <a:ext cx="1965960" cy="566928"/>
-            </a:xfrm>
-            <a:prstGeom prst="roundRect">
-              <a:avLst/>
-            </a:prstGeom>
+          </a:xfrm>
+          <a:prstGeom prst="roundRect">
+            <a:avLst/>
+          </a:prstGeom>
+          <a:solidFill>
+            <a:srgbClr val="FFFFFF"/>
+          </a:solidFill>
+          <a:ln w="19050">
             <a:solidFill>
               <a:srgbClr val="42855F"/>
             </a:solidFill>
-            <a:ln>
-              <a:solidFill>
-                <a:srgbClr val="42855F"/>
-              </a:solidFill>
-            </a:ln>
-          </p:spPr>
-          <p:style>
-            <a:lnRef idx="1">
-              <a:schemeClr val="accent1"/>
-            </a:lnRef>
-            <a:fillRef idx="3">
-              <a:schemeClr val="accent1"/>
-            </a:fillRef>
-            <a:effectRef idx="2">
-              <a:schemeClr val="accent1"/>
-            </a:effectRef>
-            <a:fontRef idx="minor">
-              <a:schemeClr val="lt1"/>
-            </a:fontRef>
-          </p:style>
-          <p:txBody>
-            <a:bodyPr rtlCol="0" anchor="ctr"/>
-            <a:lstStyle/>
-            <a:p>
-              <a:pPr algn="ctr"/>
-              <a:r>
-                <a:rPr sz="1900" b="1">
-                  <a:solidFill>
-                    <a:srgbClr val="FFFFFF"/>
-                  </a:solidFill>
-                </a:rPr>
-                <a:t>Интерактив</a:t>
-              </a:r>
-            </a:p>
-          </p:txBody>
-        </p:sp>
-        <p:sp>
-          <p:nvSpPr>
-            <p:cNvPr id="24" name="TextBox 23"/>
-            <p:cNvSpPr txBox="1"/>
-            <p:nvPr/>
-          </p:nvSpPr>
-          <p:spPr>
-            <a:xfrm>
-              <a:off x="9784080" y="2478024"/>
-              <a:ext cx="1508760" cy="996696"/>
-            </a:xfrm>
-            <a:prstGeom prst="rect">
-              <a:avLst/>
-            </a:prstGeom>
-            <a:noFill/>
-          </p:spPr>
-          <p:txBody>
-            <a:bodyPr wrap="square">
-              <a:spAutoFit/>
-            </a:bodyPr>
-            <a:lstStyle/>
-            <a:p>
-              <a:pPr>
-                <a:spcAft>
-                  <a:spcPts val="800"/>
-                </a:spcAft>
-              </a:pPr>
-              <a:r>
-                <a:rPr sz="1500">
-                  <a:solidFill>
-                    <a:srgbClr val="212B36"/>
-                  </a:solidFill>
-                </a:rPr>
-                <a:t>Нажмите на название документа.</a:t>
-              </a:r>
-            </a:p>
-          </p:txBody>
-        </p:sp>
-      </p:grpSp>
+          </a:ln>
+        </p:spPr>
+        <p:style>
+          <a:lnRef idx="1">
+            <a:schemeClr val="accent1"/>
+          </a:lnRef>
+          <a:fillRef idx="3">
+            <a:schemeClr val="accent1"/>
+          </a:fillRef>
+          <a:effectRef idx="2">
+            <a:schemeClr val="accent1"/>
+          </a:effectRef>
+          <a:fontRef idx="minor">
+            <a:schemeClr val="lt1"/>
+          </a:fontRef>
+        </p:style>
+        <p:txBody>
+          <a:bodyPr rtlCol="0" anchor="ctr"/>
+          <a:lstStyle/>
+          <a:p>
+            <a:pPr algn="ctr"/>
+          </a:p>
+        </p:txBody>
+      </p:sp>
+      <p:sp>
+        <p:nvSpPr>
+          <p:cNvPr id="23" name="Rounded Rectangle 22"/>
+          <p:cNvSpPr/>
+          <p:nvPr/>
+        </p:nvSpPr>
+        <p:spPr>
+          <a:xfrm>
+            <a:off x="9555480" y="1691640"/>
+            <a:ext cx="1965960" cy="566928"/>
+          </a:xfrm>
+          <a:prstGeom prst="roundRect">
+            <a:avLst/>
+          </a:prstGeom>
+          <a:solidFill>
+            <a:srgbClr val="42855F"/>
+          </a:solidFill>
+          <a:ln>
+            <a:solidFill>
+              <a:srgbClr val="42855F"/>
+            </a:solidFill>
+          </a:ln>
+        </p:spPr>
+        <p:style>
+          <a:lnRef idx="1">
+            <a:schemeClr val="accent1"/>
+          </a:lnRef>
+          <a:fillRef idx="3">
+            <a:schemeClr val="accent1"/>
+          </a:fillRef>
+          <a:effectRef idx="2">
+            <a:schemeClr val="accent1"/>
+          </a:effectRef>
+          <a:fontRef idx="minor">
+            <a:schemeClr val="lt1"/>
+          </a:fontRef>
+        </p:style>
+        <p:txBody>
+          <a:bodyPr rtlCol="0" anchor="ctr"/>
+          <a:lstStyle/>
+          <a:p>
+            <a:pPr algn="ctr"/>
+            <a:r>
+              <a:rPr sz="1900" b="1">
+                <a:solidFill>
+                  <a:srgbClr val="FFFFFF"/>
+                </a:solidFill>
+              </a:rPr>
+              <a:t>Интерактив</a:t>
+            </a:r>
+          </a:p>
+        </p:txBody>
+      </p:sp>
+      <p:sp>
+        <p:nvSpPr>
+          <p:cNvPr id="24" name="TextBox 23"/>
+          <p:cNvSpPr txBox="1"/>
+          <p:nvPr/>
+        </p:nvSpPr>
+        <p:spPr>
+          <a:xfrm>
+            <a:off x="9784080" y="2478024"/>
+            <a:ext cx="1508760" cy="996696"/>
+          </a:xfrm>
+          <a:prstGeom prst="rect">
+            <a:avLst/>
+          </a:prstGeom>
+          <a:noFill/>
+        </p:spPr>
+        <p:txBody>
+          <a:bodyPr wrap="square">
+            <a:spAutoFit/>
+          </a:bodyPr>
+          <a:lstStyle/>
+          <a:p>
+            <a:pPr>
+              <a:spcAft>
+                <a:spcPts val="800"/>
+              </a:spcAft>
+            </a:pPr>
+            <a:r>
+              <a:rPr sz="1500">
+                <a:solidFill>
+                  <a:srgbClr val="212B36"/>
+                </a:solidFill>
+              </a:rPr>
+              <a:t>Нажмите на название документа.</a:t>
+            </a:r>
+          </a:p>
+        </p:txBody>
+      </p:sp>
       <p:sp>
         <p:nvSpPr>
           <p:cNvPr id="25" name="Rounded Rectangle 24">
-            <a:hlinkClick r:id="rId6" action="ppaction://hlinksldjump"/>
+            <a:hlinkClick action="ppaction://hlinksldjump" r:id="rId2"/>
           </p:cNvPr>
           <p:cNvSpPr/>
           <p:nvPr/>
@@ -9564,7 +9257,7 @@
       <p:sp>
         <p:nvSpPr>
           <p:cNvPr id="26" name="Rounded Rectangle 25">
-            <a:hlinkClick r:id="rId7" action="ppaction://hlinksldjump"/>
+            <a:hlinkClick action="ppaction://hlinksldjump" r:id="rId7"/>
           </p:cNvPr>
           <p:cNvSpPr/>
           <p:nvPr/>
@@ -9621,141 +9314,11 @@
   <p:clrMapOvr>
     <a:masterClrMapping/>
   </p:clrMapOvr>
-  <p:timing>
-    <p:tnLst>
-      <p:par>
-        <p:cTn id="1" dur="indefinite" restart="never" nodeType="tmRoot">
-          <p:childTnLst>
-            <p:seq concurrent="1" nextAc="seek">
-              <p:cTn id="2" dur="indefinite" nodeType="mainSeq">
-                <p:childTnLst>
-                  <p:par>
-                    <p:cTn id="3" fill="hold">
-                      <p:stCondLst>
-                        <p:cond delay="indefinite"/>
-                        <p:cond evt="onBegin" delay="0">
-                          <p:tn val="2"/>
-                        </p:cond>
-                      </p:stCondLst>
-                      <p:childTnLst>
-                        <p:par>
-                          <p:cTn id="4" fill="hold">
-                            <p:stCondLst>
-                              <p:cond delay="0"/>
-                            </p:stCondLst>
-                            <p:childTnLst>
-                              <p:par>
-                                <p:cTn id="5" presetID="10" presetClass="entr" presetSubtype="0" fill="hold" nodeType="afterEffect">
-                                  <p:stCondLst>
-                                    <p:cond delay="2000"/>
-                                  </p:stCondLst>
-                                  <p:childTnLst>
-                                    <p:set>
-                                      <p:cBhvr>
-                                        <p:cTn id="6" dur="1" fill="hold">
-                                          <p:stCondLst>
-                                            <p:cond delay="0"/>
-                                          </p:stCondLst>
-                                        </p:cTn>
-                                        <p:tgtEl>
-                                          <p:spTgt spid="27"/>
-                                        </p:tgtEl>
-                                        <p:attrNameLst>
-                                          <p:attrName>style.visibility</p:attrName>
-                                        </p:attrNameLst>
-                                      </p:cBhvr>
-                                      <p:to>
-                                        <p:strVal val="visible"/>
-                                      </p:to>
-                                    </p:set>
-                                    <p:animEffect transition="in" filter="fade">
-                                      <p:cBhvr>
-                                        <p:cTn id="7" dur="900"/>
-                                        <p:tgtEl>
-                                          <p:spTgt spid="27"/>
-                                        </p:tgtEl>
-                                      </p:cBhvr>
-                                    </p:animEffect>
-                                  </p:childTnLst>
-                                </p:cTn>
-                              </p:par>
-                            </p:childTnLst>
-                          </p:cTn>
-                        </p:par>
-                        <p:par>
-                          <p:cTn id="8" fill="hold">
-                            <p:stCondLst>
-                              <p:cond delay="2900"/>
-                            </p:stCondLst>
-                            <p:childTnLst>
-                              <p:par>
-                                <p:cTn id="9" presetID="10" presetClass="exit" presetSubtype="0" fill="hold" nodeType="afterEffect">
-                                  <p:stCondLst>
-                                    <p:cond delay="5000"/>
-                                  </p:stCondLst>
-                                  <p:childTnLst>
-                                    <p:animEffect transition="out" filter="fade">
-                                      <p:cBhvr>
-                                        <p:cTn id="10" dur="900"/>
-                                        <p:tgtEl>
-                                          <p:spTgt spid="27"/>
-                                        </p:tgtEl>
-                                      </p:cBhvr>
-                                    </p:animEffect>
-                                    <p:set>
-                                      <p:cBhvr>
-                                        <p:cTn id="11" dur="1" fill="hold">
-                                          <p:stCondLst>
-                                            <p:cond delay="899"/>
-                                          </p:stCondLst>
-                                        </p:cTn>
-                                        <p:tgtEl>
-                                          <p:spTgt spid="27"/>
-                                        </p:tgtEl>
-                                        <p:attrNameLst>
-                                          <p:attrName>style.visibility</p:attrName>
-                                        </p:attrNameLst>
-                                      </p:cBhvr>
-                                      <p:to>
-                                        <p:strVal val="hidden"/>
-                                      </p:to>
-                                    </p:set>
-                                  </p:childTnLst>
-                                </p:cTn>
-                              </p:par>
-                            </p:childTnLst>
-                          </p:cTn>
-                        </p:par>
-                      </p:childTnLst>
-                    </p:cTn>
-                  </p:par>
-                </p:childTnLst>
-              </p:cTn>
-              <p:prevCondLst>
-                <p:cond evt="onPrev" delay="0">
-                  <p:tgtEl>
-                    <p:sldTgt/>
-                  </p:tgtEl>
-                </p:cond>
-              </p:prevCondLst>
-              <p:nextCondLst>
-                <p:cond evt="onNext" delay="0">
-                  <p:tgtEl>
-                    <p:sldTgt/>
-                  </p:tgtEl>
-                </p:cond>
-              </p:nextCondLst>
-            </p:seq>
-          </p:childTnLst>
-        </p:cTn>
-      </p:par>
-    </p:tnLst>
-  </p:timing>
 </p:sld>
 </file>
 
 <file path=ppt/slides/slide6.xml><?xml version="1.0" encoding="utf-8"?>
-<p:sld xmlns:a="http://schemas.openxmlformats.org/drawingml/2006/main" xmlns:r="http://schemas.openxmlformats.org/officeDocument/2006/relationships" xmlns:p="http://schemas.openxmlformats.org/presentationml/2006/main">
+<p:sld xmlns:a="http://schemas.openxmlformats.org/drawingml/2006/main" xmlns:p="http://schemas.openxmlformats.org/presentationml/2006/main" xmlns:r="http://schemas.openxmlformats.org/officeDocument/2006/relationships">
   <p:cSld>
     <p:bg>
       <p:bgPr>
@@ -9771,14 +9334,7 @@
         <p:cNvGrpSpPr/>
         <p:nvPr/>
       </p:nvGrpSpPr>
-      <p:grpSpPr>
-        <a:xfrm>
-          <a:off x="0" y="0"/>
-          <a:ext cx="0" cy="0"/>
-          <a:chOff x="0" y="0"/>
-          <a:chExt cx="0" cy="0"/>
-        </a:xfrm>
-      </p:grpSpPr>
+      <p:grpSpPr/>
       <p:sp>
         <p:nvSpPr>
           <p:cNvPr id="2" name="Rectangle 1"/>
@@ -9819,7 +9375,6 @@
           <a:lstStyle/>
           <a:p>
             <a:pPr algn="ctr"/>
-            <a:endParaRPr/>
           </a:p>
         </p:txBody>
       </p:sp>
@@ -10120,7 +9675,7 @@
           </a:fontRef>
         </p:style>
         <p:txBody>
-          <a:bodyPr wrap="square" rtlCol="0" anchor="ctr"/>
+          <a:bodyPr rtlCol="0" anchor="ctr" wrap="square"/>
           <a:lstStyle/>
           <a:p>
             <a:pPr algn="l"/>
@@ -10173,7 +9728,7 @@
           </a:fontRef>
         </p:style>
         <p:txBody>
-          <a:bodyPr wrap="square" rtlCol="0" anchor="ctr"/>
+          <a:bodyPr rtlCol="0" anchor="ctr" wrap="square"/>
           <a:lstStyle/>
           <a:p>
             <a:pPr algn="l"/>
@@ -10226,7 +9781,7 @@
           </a:fontRef>
         </p:style>
         <p:txBody>
-          <a:bodyPr wrap="square" rtlCol="0" anchor="ctr"/>
+          <a:bodyPr rtlCol="0" anchor="ctr" wrap="square"/>
           <a:lstStyle/>
           <a:p>
             <a:pPr algn="l"/>
@@ -10279,7 +9834,7 @@
           </a:fontRef>
         </p:style>
         <p:txBody>
-          <a:bodyPr wrap="square" rtlCol="0" anchor="ctr"/>
+          <a:bodyPr rtlCol="0" anchor="ctr" wrap="square"/>
           <a:lstStyle/>
           <a:p>
             <a:pPr algn="l"/>
@@ -10332,7 +9887,7 @@
           </a:fontRef>
         </p:style>
         <p:txBody>
-          <a:bodyPr wrap="square" rtlCol="0" anchor="ctr"/>
+          <a:bodyPr rtlCol="0" anchor="ctr" wrap="square"/>
           <a:lstStyle/>
           <a:p>
             <a:pPr algn="l"/>
@@ -10385,7 +9940,7 @@
           </a:fontRef>
         </p:style>
         <p:txBody>
-          <a:bodyPr wrap="square" rtlCol="0" anchor="ctr"/>
+          <a:bodyPr rtlCol="0" anchor="ctr" wrap="square"/>
           <a:lstStyle/>
           <a:p>
             <a:pPr algn="l"/>
@@ -10403,7 +9958,7 @@
       <p:sp>
         <p:nvSpPr>
           <p:cNvPr id="15" name="Rounded Rectangle 14">
-            <a:hlinkClick r:id="rId2" action="ppaction://hlinksldjump"/>
+            <a:hlinkClick action="ppaction://hlinksldjump" r:id="rId2"/>
           </p:cNvPr>
           <p:cNvSpPr/>
           <p:nvPr/>
@@ -10464,7 +10019,7 @@
 </file>
 
 <file path=ppt/slides/slide7.xml><?xml version="1.0" encoding="utf-8"?>
-<p:sld xmlns:a="http://schemas.openxmlformats.org/drawingml/2006/main" xmlns:r="http://schemas.openxmlformats.org/officeDocument/2006/relationships" xmlns:p="http://schemas.openxmlformats.org/presentationml/2006/main">
+<p:sld xmlns:a="http://schemas.openxmlformats.org/drawingml/2006/main" xmlns:p="http://schemas.openxmlformats.org/presentationml/2006/main" xmlns:r="http://schemas.openxmlformats.org/officeDocument/2006/relationships">
   <p:cSld>
     <p:bg>
       <p:bgPr>
@@ -10480,14 +10035,7 @@
         <p:cNvGrpSpPr/>
         <p:nvPr/>
       </p:nvGrpSpPr>
-      <p:grpSpPr>
-        <a:xfrm>
-          <a:off x="0" y="0"/>
-          <a:ext cx="0" cy="0"/>
-          <a:chOff x="0" y="0"/>
-          <a:chExt cx="0" cy="0"/>
-        </a:xfrm>
-      </p:grpSpPr>
+      <p:grpSpPr/>
       <p:sp>
         <p:nvSpPr>
           <p:cNvPr id="2" name="Rectangle 1"/>
@@ -10528,7 +10076,6 @@
           <a:lstStyle/>
           <a:p>
             <a:pPr algn="ctr"/>
-            <a:endParaRPr/>
           </a:p>
         </p:txBody>
       </p:sp>
@@ -10829,7 +10376,7 @@
           </a:fontRef>
         </p:style>
         <p:txBody>
-          <a:bodyPr wrap="square" rtlCol="0" anchor="ctr"/>
+          <a:bodyPr rtlCol="0" anchor="ctr" wrap="square"/>
           <a:lstStyle/>
           <a:p>
             <a:pPr algn="l"/>
@@ -10882,7 +10429,7 @@
           </a:fontRef>
         </p:style>
         <p:txBody>
-          <a:bodyPr wrap="square" rtlCol="0" anchor="ctr"/>
+          <a:bodyPr rtlCol="0" anchor="ctr" wrap="square"/>
           <a:lstStyle/>
           <a:p>
             <a:pPr algn="l"/>
@@ -10935,7 +10482,7 @@
           </a:fontRef>
         </p:style>
         <p:txBody>
-          <a:bodyPr wrap="square" rtlCol="0" anchor="ctr"/>
+          <a:bodyPr rtlCol="0" anchor="ctr" wrap="square"/>
           <a:lstStyle/>
           <a:p>
             <a:pPr algn="l"/>
@@ -10988,7 +10535,7 @@
           </a:fontRef>
         </p:style>
         <p:txBody>
-          <a:bodyPr wrap="square" rtlCol="0" anchor="ctr"/>
+          <a:bodyPr rtlCol="0" anchor="ctr" wrap="square"/>
           <a:lstStyle/>
           <a:p>
             <a:pPr algn="l"/>
@@ -11041,7 +10588,7 @@
           </a:fontRef>
         </p:style>
         <p:txBody>
-          <a:bodyPr wrap="square" rtlCol="0" anchor="ctr"/>
+          <a:bodyPr rtlCol="0" anchor="ctr" wrap="square"/>
           <a:lstStyle/>
           <a:p>
             <a:pPr algn="l"/>
@@ -11094,7 +10641,7 @@
           </a:fontRef>
         </p:style>
         <p:txBody>
-          <a:bodyPr wrap="square" rtlCol="0" anchor="ctr"/>
+          <a:bodyPr rtlCol="0" anchor="ctr" wrap="square"/>
           <a:lstStyle/>
           <a:p>
             <a:pPr algn="l"/>
@@ -11112,7 +10659,7 @@
       <p:sp>
         <p:nvSpPr>
           <p:cNvPr id="15" name="Rounded Rectangle 14">
-            <a:hlinkClick r:id="rId2" action="ppaction://hlinksldjump"/>
+            <a:hlinkClick action="ppaction://hlinksldjump" r:id="rId2"/>
           </p:cNvPr>
           <p:cNvSpPr/>
           <p:nvPr/>
@@ -11173,7 +10720,7 @@
 </file>
 
 <file path=ppt/slides/slide8.xml><?xml version="1.0" encoding="utf-8"?>
-<p:sld xmlns:a="http://schemas.openxmlformats.org/drawingml/2006/main" xmlns:r="http://schemas.openxmlformats.org/officeDocument/2006/relationships" xmlns:p="http://schemas.openxmlformats.org/presentationml/2006/main">
+<p:sld xmlns:a="http://schemas.openxmlformats.org/drawingml/2006/main" xmlns:p="http://schemas.openxmlformats.org/presentationml/2006/main" xmlns:r="http://schemas.openxmlformats.org/officeDocument/2006/relationships">
   <p:cSld>
     <p:bg>
       <p:bgPr>
@@ -11189,14 +10736,7 @@
         <p:cNvGrpSpPr/>
         <p:nvPr/>
       </p:nvGrpSpPr>
-      <p:grpSpPr>
-        <a:xfrm>
-          <a:off x="0" y="0"/>
-          <a:ext cx="0" cy="0"/>
-          <a:chOff x="0" y="0"/>
-          <a:chExt cx="0" cy="0"/>
-        </a:xfrm>
-      </p:grpSpPr>
+      <p:grpSpPr/>
       <p:sp>
         <p:nvSpPr>
           <p:cNvPr id="2" name="Rectangle 1"/>
@@ -11237,7 +10777,6 @@
           <a:lstStyle/>
           <a:p>
             <a:pPr algn="ctr"/>
-            <a:endParaRPr/>
           </a:p>
         </p:txBody>
       </p:sp>
@@ -11538,7 +11077,7 @@
           </a:fontRef>
         </p:style>
         <p:txBody>
-          <a:bodyPr wrap="square" rtlCol="0" anchor="ctr"/>
+          <a:bodyPr rtlCol="0" anchor="ctr" wrap="square"/>
           <a:lstStyle/>
           <a:p>
             <a:pPr algn="l"/>
@@ -11591,7 +11130,7 @@
           </a:fontRef>
         </p:style>
         <p:txBody>
-          <a:bodyPr wrap="square" rtlCol="0" anchor="ctr"/>
+          <a:bodyPr rtlCol="0" anchor="ctr" wrap="square"/>
           <a:lstStyle/>
           <a:p>
             <a:pPr algn="l"/>
@@ -11644,7 +11183,7 @@
           </a:fontRef>
         </p:style>
         <p:txBody>
-          <a:bodyPr wrap="square" rtlCol="0" anchor="ctr"/>
+          <a:bodyPr rtlCol="0" anchor="ctr" wrap="square"/>
           <a:lstStyle/>
           <a:p>
             <a:pPr algn="l"/>
@@ -11697,7 +11236,7 @@
           </a:fontRef>
         </p:style>
         <p:txBody>
-          <a:bodyPr wrap="square" rtlCol="0" anchor="ctr"/>
+          <a:bodyPr rtlCol="0" anchor="ctr" wrap="square"/>
           <a:lstStyle/>
           <a:p>
             <a:pPr algn="l"/>
@@ -11750,7 +11289,7 @@
           </a:fontRef>
         </p:style>
         <p:txBody>
-          <a:bodyPr wrap="square" rtlCol="0" anchor="ctr"/>
+          <a:bodyPr rtlCol="0" anchor="ctr" wrap="square"/>
           <a:lstStyle/>
           <a:p>
             <a:pPr algn="l"/>
@@ -11803,7 +11342,7 @@
           </a:fontRef>
         </p:style>
         <p:txBody>
-          <a:bodyPr wrap="square" rtlCol="0" anchor="ctr"/>
+          <a:bodyPr rtlCol="0" anchor="ctr" wrap="square"/>
           <a:lstStyle/>
           <a:p>
             <a:pPr algn="l"/>
@@ -11821,7 +11360,7 @@
       <p:sp>
         <p:nvSpPr>
           <p:cNvPr id="15" name="Rounded Rectangle 14">
-            <a:hlinkClick r:id="rId2" action="ppaction://hlinksldjump"/>
+            <a:hlinkClick action="ppaction://hlinksldjump" r:id="rId2"/>
           </p:cNvPr>
           <p:cNvSpPr/>
           <p:nvPr/>
@@ -11882,7 +11421,7 @@
 </file>
 
 <file path=ppt/slides/slide9.xml><?xml version="1.0" encoding="utf-8"?>
-<p:sld xmlns:a="http://schemas.openxmlformats.org/drawingml/2006/main" xmlns:r="http://schemas.openxmlformats.org/officeDocument/2006/relationships" xmlns:p="http://schemas.openxmlformats.org/presentationml/2006/main">
+<p:sld xmlns:a="http://schemas.openxmlformats.org/drawingml/2006/main" xmlns:p="http://schemas.openxmlformats.org/presentationml/2006/main" xmlns:r="http://schemas.openxmlformats.org/officeDocument/2006/relationships">
   <p:cSld>
     <p:bg>
       <p:bgPr>
@@ -11898,14 +11437,7 @@
         <p:cNvGrpSpPr/>
         <p:nvPr/>
       </p:nvGrpSpPr>
-      <p:grpSpPr>
-        <a:xfrm>
-          <a:off x="0" y="0"/>
-          <a:ext cx="0" cy="0"/>
-          <a:chOff x="0" y="0"/>
-          <a:chExt cx="0" cy="0"/>
-        </a:xfrm>
-      </p:grpSpPr>
+      <p:grpSpPr/>
       <p:sp>
         <p:nvSpPr>
           <p:cNvPr id="2" name="Rectangle 1"/>
@@ -11946,7 +11478,6 @@
           <a:lstStyle/>
           <a:p>
             <a:pPr algn="ctr"/>
-            <a:endParaRPr/>
           </a:p>
         </p:txBody>
       </p:sp>
@@ -12247,7 +11778,7 @@
           </a:fontRef>
         </p:style>
         <p:txBody>
-          <a:bodyPr wrap="square" rtlCol="0" anchor="ctr"/>
+          <a:bodyPr rtlCol="0" anchor="ctr" wrap="square"/>
           <a:lstStyle/>
           <a:p>
             <a:pPr algn="l"/>
@@ -12300,7 +11831,7 @@
           </a:fontRef>
         </p:style>
         <p:txBody>
-          <a:bodyPr wrap="square" rtlCol="0" anchor="ctr"/>
+          <a:bodyPr rtlCol="0" anchor="ctr" wrap="square"/>
           <a:lstStyle/>
           <a:p>
             <a:pPr algn="l"/>
@@ -12353,7 +11884,7 @@
           </a:fontRef>
         </p:style>
         <p:txBody>
-          <a:bodyPr wrap="square" rtlCol="0" anchor="ctr"/>
+          <a:bodyPr rtlCol="0" anchor="ctr" wrap="square"/>
           <a:lstStyle/>
           <a:p>
             <a:pPr algn="l"/>
@@ -12406,7 +11937,7 @@
           </a:fontRef>
         </p:style>
         <p:txBody>
-          <a:bodyPr wrap="square" rtlCol="0" anchor="ctr"/>
+          <a:bodyPr rtlCol="0" anchor="ctr" wrap="square"/>
           <a:lstStyle/>
           <a:p>
             <a:pPr algn="l"/>
@@ -12459,7 +11990,7 @@
           </a:fontRef>
         </p:style>
         <p:txBody>
-          <a:bodyPr wrap="square" rtlCol="0" anchor="ctr"/>
+          <a:bodyPr rtlCol="0" anchor="ctr" wrap="square"/>
           <a:lstStyle/>
           <a:p>
             <a:pPr algn="l"/>
@@ -12512,7 +12043,7 @@
           </a:fontRef>
         </p:style>
         <p:txBody>
-          <a:bodyPr wrap="square" rtlCol="0" anchor="ctr"/>
+          <a:bodyPr rtlCol="0" anchor="ctr" wrap="square"/>
           <a:lstStyle/>
           <a:p>
             <a:pPr algn="l"/>
@@ -12530,7 +12061,7 @@
       <p:sp>
         <p:nvSpPr>
           <p:cNvPr id="15" name="Rounded Rectangle 14">
-            <a:hlinkClick r:id="rId2" action="ppaction://hlinksldjump"/>
+            <a:hlinkClick action="ppaction://hlinksldjump" r:id="rId2"/>
           </p:cNvPr>
           <p:cNvSpPr/>
           <p:nvPr/>

--- a/presentations/ispring-course/module-01-stropovka-gruzov/live-preview/S001-S007_live_preview_working_2026-06-22_v4.pptx
+++ b/presentations/ispring-course/module-01-stropovka-gruzov/live-preview/S001-S007_live_preview_working_2026-06-22_v4.pptx
@@ -5,21 +5,21 @@
     <p:sldMasterId id="2147483648" r:id="rId1"/>
   </p:sldMasterIdLst>
   <p:sldIdLst>
-    <p:sldId id="256" r:id="rId7"/>
-    <p:sldId id="257" r:id="rId8"/>
-    <p:sldId id="258" r:id="rId9"/>
-    <p:sldId id="259" r:id="rId10"/>
-    <p:sldId id="260" r:id="rId11"/>
-    <p:sldId id="261" r:id="rId12"/>
-    <p:sldId id="262" r:id="rId13"/>
-    <p:sldId id="263" r:id="rId14"/>
-    <p:sldId id="264" r:id="rId15"/>
-    <p:sldId id="265" r:id="rId16"/>
-    <p:sldId id="266" r:id="rId17"/>
-    <p:sldId id="267" r:id="rId18"/>
-    <p:sldId id="268" r:id="rId19"/>
+    <p:sldId id="256" r:id="rId2"/>
+    <p:sldId id="257" r:id="rId3"/>
+    <p:sldId id="258" r:id="rId4"/>
+    <p:sldId id="259" r:id="rId5"/>
+    <p:sldId id="260" r:id="rId6"/>
+    <p:sldId id="261" r:id="rId7"/>
+    <p:sldId id="262" r:id="rId8"/>
+    <p:sldId id="263" r:id="rId9"/>
+    <p:sldId id="264" r:id="rId10"/>
+    <p:sldId id="265" r:id="rId11"/>
+    <p:sldId id="266" r:id="rId12"/>
+    <p:sldId id="267" r:id="rId13"/>
+    <p:sldId id="268" r:id="rId14"/>
   </p:sldIdLst>
-  <p:sldSz cx="12191695" cy="6858000" type="screen4x3"/>
+  <p:sldSz cx="12192000" cy="6858000"/>
   <p:notesSz cx="6858000" cy="9144000"/>
   <p:defaultTextStyle>
     <a:defPPr>
@@ -300,7 +300,7 @@
           <a:p>
             <a:fld id="{5BCAD085-E8A6-8845-BD4E-CB4CCA059FC4}" type="datetimeFigureOut">
               <a:rPr lang="en-US" smtClean="0"/>
-              <a:t>1/27/13</a:t>
+              <a:t>6/23/2026</a:t>
             </a:fld>
             <a:endParaRPr lang="en-US"/>
           </a:p>
@@ -470,7 +470,7 @@
           <a:p>
             <a:fld id="{5BCAD085-E8A6-8845-BD4E-CB4CCA059FC4}" type="datetimeFigureOut">
               <a:rPr lang="en-US" smtClean="0"/>
-              <a:t>1/27/13</a:t>
+              <a:t>6/23/2026</a:t>
             </a:fld>
             <a:endParaRPr lang="en-US"/>
           </a:p>
@@ -650,7 +650,7 @@
           <a:p>
             <a:fld id="{5BCAD085-E8A6-8845-BD4E-CB4CCA059FC4}" type="datetimeFigureOut">
               <a:rPr lang="en-US" smtClean="0"/>
-              <a:t>1/27/13</a:t>
+              <a:t>6/23/2026</a:t>
             </a:fld>
             <a:endParaRPr lang="en-US"/>
           </a:p>
@@ -820,7 +820,7 @@
           <a:p>
             <a:fld id="{5BCAD085-E8A6-8845-BD4E-CB4CCA059FC4}" type="datetimeFigureOut">
               <a:rPr lang="en-US" smtClean="0"/>
-              <a:t>1/27/13</a:t>
+              <a:t>6/23/2026</a:t>
             </a:fld>
             <a:endParaRPr lang="en-US"/>
           </a:p>
@@ -1066,7 +1066,7 @@
           <a:p>
             <a:fld id="{5BCAD085-E8A6-8845-BD4E-CB4CCA059FC4}" type="datetimeFigureOut">
               <a:rPr lang="en-US" smtClean="0"/>
-              <a:t>1/27/13</a:t>
+              <a:t>6/23/2026</a:t>
             </a:fld>
             <a:endParaRPr lang="en-US"/>
           </a:p>
@@ -1354,7 +1354,7 @@
           <a:p>
             <a:fld id="{5BCAD085-E8A6-8845-BD4E-CB4CCA059FC4}" type="datetimeFigureOut">
               <a:rPr lang="en-US" smtClean="0"/>
-              <a:t>1/27/13</a:t>
+              <a:t>6/23/2026</a:t>
             </a:fld>
             <a:endParaRPr lang="en-US"/>
           </a:p>
@@ -1776,7 +1776,7 @@
           <a:p>
             <a:fld id="{5BCAD085-E8A6-8845-BD4E-CB4CCA059FC4}" type="datetimeFigureOut">
               <a:rPr lang="en-US" smtClean="0"/>
-              <a:t>1/27/13</a:t>
+              <a:t>6/23/2026</a:t>
             </a:fld>
             <a:endParaRPr lang="en-US"/>
           </a:p>
@@ -1894,7 +1894,7 @@
           <a:p>
             <a:fld id="{5BCAD085-E8A6-8845-BD4E-CB4CCA059FC4}" type="datetimeFigureOut">
               <a:rPr lang="en-US" smtClean="0"/>
-              <a:t>1/27/13</a:t>
+              <a:t>6/23/2026</a:t>
             </a:fld>
             <a:endParaRPr lang="en-US"/>
           </a:p>
@@ -1989,7 +1989,7 @@
           <a:p>
             <a:fld id="{5BCAD085-E8A6-8845-BD4E-CB4CCA059FC4}" type="datetimeFigureOut">
               <a:rPr lang="en-US" smtClean="0"/>
-              <a:t>1/27/13</a:t>
+              <a:t>6/23/2026</a:t>
             </a:fld>
             <a:endParaRPr lang="en-US"/>
           </a:p>
@@ -2266,7 +2266,7 @@
           <a:p>
             <a:fld id="{5BCAD085-E8A6-8845-BD4E-CB4CCA059FC4}" type="datetimeFigureOut">
               <a:rPr lang="en-US" smtClean="0"/>
-              <a:t>1/27/13</a:t>
+              <a:t>6/23/2026</a:t>
             </a:fld>
             <a:endParaRPr lang="en-US"/>
           </a:p>
@@ -2519,7 +2519,7 @@
           <a:p>
             <a:fld id="{5BCAD085-E8A6-8845-BD4E-CB4CCA059FC4}" type="datetimeFigureOut">
               <a:rPr lang="en-US" smtClean="0"/>
-              <a:t>1/27/13</a:t>
+              <a:t>6/23/2026</a:t>
             </a:fld>
             <a:endParaRPr lang="en-US"/>
           </a:p>
@@ -2732,7 +2732,7 @@
           <a:p>
             <a:fld id="{5BCAD085-E8A6-8845-BD4E-CB4CCA059FC4}" type="datetimeFigureOut">
               <a:rPr lang="en-US" smtClean="0"/>
-              <a:t>1/27/13</a:t>
+              <a:t>6/23/2026</a:t>
             </a:fld>
             <a:endParaRPr lang="en-US"/>
           </a:p>
@@ -3091,7 +3091,7 @@
 </file>
 
 <file path=ppt/slides/slide1.xml><?xml version="1.0" encoding="utf-8"?>
-<p:sld xmlns:a="http://schemas.openxmlformats.org/drawingml/2006/main" xmlns:p="http://schemas.openxmlformats.org/presentationml/2006/main" xmlns:r="http://schemas.openxmlformats.org/officeDocument/2006/relationships">
+<p:sld xmlns:a="http://schemas.openxmlformats.org/drawingml/2006/main" xmlns:r="http://schemas.openxmlformats.org/officeDocument/2006/relationships" xmlns:p="http://schemas.openxmlformats.org/presentationml/2006/main">
   <p:cSld>
     <p:bg>
       <p:bgPr>
@@ -3107,7 +3107,14 @@
         <p:cNvGrpSpPr/>
         <p:nvPr/>
       </p:nvGrpSpPr>
-      <p:grpSpPr/>
+      <p:grpSpPr>
+        <a:xfrm>
+          <a:off x="0" y="0"/>
+          <a:ext cx="0" cy="0"/>
+          <a:chOff x="0" y="0"/>
+          <a:chExt cx="0" cy="0"/>
+        </a:xfrm>
+      </p:grpSpPr>
       <p:sp>
         <p:nvSpPr>
           <p:cNvPr id="2" name="Rectangle 1"/>
@@ -3148,6 +3155,7 @@
           <a:lstStyle/>
           <a:p>
             <a:pPr algn="ctr"/>
+            <a:endParaRPr/>
           </a:p>
         </p:txBody>
       </p:sp>
@@ -3465,6 +3473,7 @@
           <a:lstStyle/>
           <a:p>
             <a:pPr algn="ctr"/>
+            <a:endParaRPr/>
           </a:p>
         </p:txBody>
       </p:sp>
@@ -3543,7 +3552,7 @@
       <p:sp>
         <p:nvSpPr>
           <p:cNvPr id="13" name="Rounded Rectangle 12">
-            <a:hlinkClick action="ppaction://hlinksldjump" r:id="rId2"/>
+            <a:hlinkClick r:id="rId2" action="ppaction://hlinksldjump"/>
           </p:cNvPr>
           <p:cNvSpPr/>
           <p:nvPr/>
@@ -3604,7 +3613,7 @@
 </file>
 
 <file path=ppt/slides/slide10.xml><?xml version="1.0" encoding="utf-8"?>
-<p:sld xmlns:a="http://schemas.openxmlformats.org/drawingml/2006/main" xmlns:p="http://schemas.openxmlformats.org/presentationml/2006/main" xmlns:r="http://schemas.openxmlformats.org/officeDocument/2006/relationships">
+<p:sld xmlns:a="http://schemas.openxmlformats.org/drawingml/2006/main" xmlns:r="http://schemas.openxmlformats.org/officeDocument/2006/relationships" xmlns:p="http://schemas.openxmlformats.org/presentationml/2006/main">
   <p:cSld>
     <p:bg>
       <p:bgPr>
@@ -3620,7 +3629,14 @@
         <p:cNvGrpSpPr/>
         <p:nvPr/>
       </p:nvGrpSpPr>
-      <p:grpSpPr/>
+      <p:grpSpPr>
+        <a:xfrm>
+          <a:off x="0" y="0"/>
+          <a:ext cx="0" cy="0"/>
+          <a:chOff x="0" y="0"/>
+          <a:chExt cx="0" cy="0"/>
+        </a:xfrm>
+      </p:grpSpPr>
       <p:sp>
         <p:nvSpPr>
           <p:cNvPr id="2" name="Rectangle 1"/>
@@ -3661,6 +3677,7 @@
           <a:lstStyle/>
           <a:p>
             <a:pPr algn="ctr"/>
+            <a:endParaRPr/>
           </a:p>
         </p:txBody>
       </p:sp>
@@ -3825,36 +3842,372 @@
           <a:lstStyle/>
           <a:p>
             <a:pPr algn="ctr"/>
-          </a:p>
-        </p:txBody>
-      </p:sp>
-      <p:pic>
-        <p:nvPicPr>
-          <p:cNvPr id="7" name="Picture 6" descr="S004_avatar-1_signal-podnyat-gruz_white-bg.png"/>
-          <p:cNvPicPr>
-            <a:picLocks noChangeAspect="1"/>
-          </p:cNvPicPr>
-          <p:nvPr/>
-        </p:nvPicPr>
-        <p:blipFill>
-          <a:blip r:embed="rId2"/>
-          <a:stretch>
-            <a:fillRect/>
-          </a:stretch>
-        </p:blipFill>
-        <p:spPr>
-          <a:xfrm>
-            <a:off x="841248" y="1463040"/>
-            <a:ext cx="5989320" cy="3995928"/>
+            <a:endParaRPr/>
+          </a:p>
+        </p:txBody>
+      </p:sp>
+      <p:sp>
+        <p:nvSpPr>
+          <p:cNvPr id="7" name="Rounded Rectangle 6"/>
+          <p:cNvSpPr/>
+          <p:nvPr/>
+        </p:nvSpPr>
+        <p:spPr>
+          <a:xfrm>
+            <a:off x="868680" y="1481328"/>
+            <a:ext cx="5943600" cy="566928"/>
+          </a:xfrm>
+          <a:prstGeom prst="roundRect">
+            <a:avLst/>
+          </a:prstGeom>
+          <a:solidFill>
+            <a:srgbClr val="122B42"/>
+          </a:solidFill>
+          <a:ln>
+            <a:noFill/>
+          </a:ln>
+        </p:spPr>
+        <p:style>
+          <a:lnRef idx="1">
+            <a:schemeClr val="accent1"/>
+          </a:lnRef>
+          <a:fillRef idx="3">
+            <a:schemeClr val="accent1"/>
+          </a:fillRef>
+          <a:effectRef idx="2">
+            <a:schemeClr val="accent1"/>
+          </a:effectRef>
+          <a:fontRef idx="minor">
+            <a:schemeClr val="lt1"/>
+          </a:fontRef>
+        </p:style>
+        <p:txBody>
+          <a:bodyPr rtlCol="0" anchor="ctr"/>
+          <a:lstStyle/>
+          <a:p>
+            <a:pPr algn="ctr"/>
+            <a:r>
+              <a:rPr sz="1800" b="1">
+                <a:solidFill>
+                  <a:srgbClr val="FFFFFF"/>
+                </a:solidFill>
+              </a:rPr>
+              <a:t>Визуальная сцена</a:t>
+            </a:r>
+          </a:p>
+        </p:txBody>
+      </p:sp>
+      <p:sp>
+        <p:nvSpPr>
+          <p:cNvPr id="8" name="Rounded Rectangle 7"/>
+          <p:cNvSpPr/>
+          <p:nvPr/>
+        </p:nvSpPr>
+        <p:spPr>
+          <a:xfrm>
+            <a:off x="1051560" y="2240280"/>
+            <a:ext cx="1920240" cy="2560320"/>
+          </a:xfrm>
+          <a:prstGeom prst="roundRect">
+            <a:avLst/>
+          </a:prstGeom>
+          <a:solidFill>
+            <a:srgbClr val="DFE6EC"/>
+          </a:solidFill>
+          <a:ln w="15240">
+            <a:solidFill>
+              <a:srgbClr val="537795"/>
+            </a:solidFill>
+          </a:ln>
+        </p:spPr>
+        <p:style>
+          <a:lnRef idx="1">
+            <a:schemeClr val="accent1"/>
+          </a:lnRef>
+          <a:fillRef idx="3">
+            <a:schemeClr val="accent1"/>
+          </a:fillRef>
+          <a:effectRef idx="2">
+            <a:schemeClr val="accent1"/>
+          </a:effectRef>
+          <a:fontRef idx="minor">
+            <a:schemeClr val="lt1"/>
+          </a:fontRef>
+        </p:style>
+        <p:txBody>
+          <a:bodyPr rtlCol="0" anchor="ctr"/>
+          <a:lstStyle/>
+          <a:p>
+            <a:pPr algn="ctr"/>
+            <a:endParaRPr/>
+          </a:p>
+        </p:txBody>
+      </p:sp>
+      <p:sp>
+        <p:nvSpPr>
+          <p:cNvPr id="9" name="Rounded Rectangle 8"/>
+          <p:cNvSpPr/>
+          <p:nvPr/>
+        </p:nvSpPr>
+        <p:spPr>
+          <a:xfrm>
+            <a:off x="3246120" y="2240280"/>
+            <a:ext cx="2514600" cy="1097280"/>
+          </a:xfrm>
+          <a:prstGeom prst="roundRect">
+            <a:avLst/>
+          </a:prstGeom>
+          <a:solidFill>
+            <a:srgbClr val="F5F7F9"/>
+          </a:solidFill>
+          <a:ln w="15240">
+            <a:solidFill>
+              <a:srgbClr val="DE7436"/>
+            </a:solidFill>
+          </a:ln>
+        </p:spPr>
+        <p:style>
+          <a:lnRef idx="1">
+            <a:schemeClr val="accent1"/>
+          </a:lnRef>
+          <a:fillRef idx="3">
+            <a:schemeClr val="accent1"/>
+          </a:fillRef>
+          <a:effectRef idx="2">
+            <a:schemeClr val="accent1"/>
+          </a:effectRef>
+          <a:fontRef idx="minor">
+            <a:schemeClr val="lt1"/>
+          </a:fontRef>
+        </p:style>
+        <p:txBody>
+          <a:bodyPr rtlCol="0" anchor="ctr"/>
+          <a:lstStyle/>
+          <a:p>
+            <a:pPr algn="ctr"/>
+            <a:endParaRPr/>
+          </a:p>
+        </p:txBody>
+      </p:sp>
+      <p:sp>
+        <p:nvSpPr>
+          <p:cNvPr id="10" name="Rounded Rectangle 9"/>
+          <p:cNvSpPr/>
+          <p:nvPr/>
+        </p:nvSpPr>
+        <p:spPr>
+          <a:xfrm>
+            <a:off x="3246120" y="3703320"/>
+            <a:ext cx="2514600" cy="1097280"/>
+          </a:xfrm>
+          <a:prstGeom prst="roundRect">
+            <a:avLst/>
+          </a:prstGeom>
+          <a:solidFill>
+            <a:srgbClr val="F5F7F9"/>
+          </a:solidFill>
+          <a:ln w="15240">
+            <a:solidFill>
+              <a:srgbClr val="42855F"/>
+            </a:solidFill>
+          </a:ln>
+        </p:spPr>
+        <p:style>
+          <a:lnRef idx="1">
+            <a:schemeClr val="accent1"/>
+          </a:lnRef>
+          <a:fillRef idx="3">
+            <a:schemeClr val="accent1"/>
+          </a:fillRef>
+          <a:effectRef idx="2">
+            <a:schemeClr val="accent1"/>
+          </a:effectRef>
+          <a:fontRef idx="minor">
+            <a:schemeClr val="lt1"/>
+          </a:fontRef>
+        </p:style>
+        <p:txBody>
+          <a:bodyPr rtlCol="0" anchor="ctr"/>
+          <a:lstStyle/>
+          <a:p>
+            <a:pPr algn="ctr"/>
+            <a:endParaRPr/>
+          </a:p>
+        </p:txBody>
+      </p:sp>
+      <p:sp>
+        <p:nvSpPr>
+          <p:cNvPr id="11" name="TextBox 10"/>
+          <p:cNvSpPr txBox="1"/>
+          <p:nvPr/>
+        </p:nvSpPr>
+        <p:spPr>
+          <a:xfrm>
+            <a:off x="1261872" y="2834640"/>
+            <a:ext cx="1417320" cy="640080"/>
           </a:xfrm>
           <a:prstGeom prst="rect">
             <a:avLst/>
           </a:prstGeom>
-        </p:spPr>
-      </p:pic>
-      <p:sp>
-        <p:nvSpPr>
-          <p:cNvPr id="8" name="Rounded Rectangle 7"/>
+          <a:noFill/>
+        </p:spPr>
+        <p:txBody>
+          <a:bodyPr wrap="square">
+            <a:spAutoFit/>
+          </a:bodyPr>
+          <a:lstStyle/>
+          <a:p>
+            <a:pPr algn="ctr"/>
+            <a:r>
+              <a:rPr sz="1500" b="1">
+                <a:solidFill>
+                  <a:srgbClr val="122B42"/>
+                </a:solidFill>
+              </a:rPr>
+              <a:t>СТРОПАЛЬЩИК</a:t>
+            </a:r>
+          </a:p>
+        </p:txBody>
+      </p:sp>
+      <p:sp>
+        <p:nvSpPr>
+          <p:cNvPr id="12" name="TextBox 11"/>
+          <p:cNvSpPr txBox="1"/>
+          <p:nvPr/>
+        </p:nvSpPr>
+        <p:spPr>
+          <a:xfrm>
+            <a:off x="3493008" y="2560320"/>
+            <a:ext cx="2011680" cy="320040"/>
+          </a:xfrm>
+          <a:prstGeom prst="rect">
+            <a:avLst/>
+          </a:prstGeom>
+          <a:noFill/>
+        </p:spPr>
+        <p:txBody>
+          <a:bodyPr wrap="square">
+            <a:spAutoFit/>
+          </a:bodyPr>
+          <a:lstStyle/>
+          <a:p>
+            <a:pPr algn="ctr"/>
+            <a:r>
+              <a:rPr sz="1600" b="1">
+                <a:solidFill>
+                  <a:srgbClr val="DE7436"/>
+                </a:solidFill>
+              </a:rPr>
+              <a:t>Крюк крана</a:t>
+            </a:r>
+          </a:p>
+        </p:txBody>
+      </p:sp>
+      <p:sp>
+        <p:nvSpPr>
+          <p:cNvPr id="13" name="TextBox 12"/>
+          <p:cNvSpPr txBox="1"/>
+          <p:nvPr/>
+        </p:nvSpPr>
+        <p:spPr>
+          <a:xfrm>
+            <a:off x="3493008" y="2852928"/>
+            <a:ext cx="2011680" cy="384048"/>
+          </a:xfrm>
+          <a:prstGeom prst="rect">
+            <a:avLst/>
+          </a:prstGeom>
+          <a:noFill/>
+        </p:spPr>
+        <p:txBody>
+          <a:bodyPr wrap="square">
+            <a:spAutoFit/>
+          </a:bodyPr>
+          <a:lstStyle/>
+          <a:p>
+            <a:pPr algn="ctr"/>
+            <a:r>
+              <a:rPr sz="1100" b="0">
+                <a:solidFill>
+                  <a:srgbClr val="212B36"/>
+                </a:solidFill>
+              </a:rPr>
+              <a:t>Стропальщик работает у зоны подъема.</a:t>
+            </a:r>
+          </a:p>
+        </p:txBody>
+      </p:sp>
+      <p:sp>
+        <p:nvSpPr>
+          <p:cNvPr id="14" name="TextBox 13"/>
+          <p:cNvSpPr txBox="1"/>
+          <p:nvPr/>
+        </p:nvSpPr>
+        <p:spPr>
+          <a:xfrm>
+            <a:off x="3493008" y="4023360"/>
+            <a:ext cx="2011680" cy="320040"/>
+          </a:xfrm>
+          <a:prstGeom prst="rect">
+            <a:avLst/>
+          </a:prstGeom>
+          <a:noFill/>
+        </p:spPr>
+        <p:txBody>
+          <a:bodyPr wrap="square">
+            <a:spAutoFit/>
+          </a:bodyPr>
+          <a:lstStyle/>
+          <a:p>
+            <a:pPr algn="ctr"/>
+            <a:r>
+              <a:rPr sz="1600" b="1">
+                <a:solidFill>
+                  <a:srgbClr val="42855F"/>
+                </a:solidFill>
+              </a:rPr>
+              <a:t>Груз и стропы</a:t>
+            </a:r>
+          </a:p>
+        </p:txBody>
+      </p:sp>
+      <p:sp>
+        <p:nvSpPr>
+          <p:cNvPr id="15" name="TextBox 14"/>
+          <p:cNvSpPr txBox="1"/>
+          <p:nvPr/>
+        </p:nvSpPr>
+        <p:spPr>
+          <a:xfrm>
+            <a:off x="3493008" y="4315968"/>
+            <a:ext cx="2011680" cy="384048"/>
+          </a:xfrm>
+          <a:prstGeom prst="rect">
+            <a:avLst/>
+          </a:prstGeom>
+          <a:noFill/>
+        </p:spPr>
+        <p:txBody>
+          <a:bodyPr wrap="square">
+            <a:spAutoFit/>
+          </a:bodyPr>
+          <a:lstStyle/>
+          <a:p>
+            <a:pPr algn="ctr"/>
+            <a:r>
+              <a:rPr sz="1100" b="0">
+                <a:solidFill>
+                  <a:srgbClr val="212B36"/>
+                </a:solidFill>
+              </a:rPr>
+              <a:t>Отвечает за зацепку, сигналы и безопасное перемещение.</a:t>
+            </a:r>
+          </a:p>
+        </p:txBody>
+      </p:sp>
+      <p:sp>
+        <p:nvSpPr>
+          <p:cNvPr id="16" name="Rounded Rectangle 15"/>
           <p:cNvSpPr/>
           <p:nvPr/>
         </p:nvSpPr>
@@ -3894,12 +4247,13 @@
           <a:lstStyle/>
           <a:p>
             <a:pPr algn="ctr"/>
-          </a:p>
-        </p:txBody>
-      </p:sp>
-      <p:sp>
-        <p:nvSpPr>
-          <p:cNvPr id="9" name="Rounded Rectangle 8"/>
+            <a:endParaRPr/>
+          </a:p>
+        </p:txBody>
+      </p:sp>
+      <p:sp>
+        <p:nvSpPr>
+          <p:cNvPr id="17" name="Rounded Rectangle 16"/>
           <p:cNvSpPr/>
           <p:nvPr/>
         </p:nvSpPr>
@@ -3952,7 +4306,7 @@
       </p:sp>
       <p:sp>
         <p:nvSpPr>
-          <p:cNvPr id="10" name="TextBox 9"/>
+          <p:cNvPr id="18" name="TextBox 17"/>
           <p:cNvSpPr txBox="1"/>
           <p:nvPr/>
         </p:nvSpPr>
@@ -3998,8 +4352,8 @@
       </p:sp>
       <p:sp>
         <p:nvSpPr>
-          <p:cNvPr id="11" name="Rounded Rectangle 10">
-            <a:hlinkClick action="ppaction://hlinksldjump" r:id="rId3"/>
+          <p:cNvPr id="19" name="Rounded Rectangle 18">
+            <a:hlinkClick r:id="rId2" action="ppaction://hlinksldjump"/>
           </p:cNvPr>
           <p:cNvSpPr/>
           <p:nvPr/>
@@ -4053,8 +4407,8 @@
       </p:sp>
       <p:sp>
         <p:nvSpPr>
-          <p:cNvPr id="12" name="Rounded Rectangle 11">
-            <a:hlinkClick action="ppaction://hlinksldjump" r:id="rId4"/>
+          <p:cNvPr id="20" name="Rounded Rectangle 19">
+            <a:hlinkClick r:id="rId3" action="ppaction://hlinksldjump"/>
           </p:cNvPr>
           <p:cNvSpPr/>
           <p:nvPr/>
@@ -4115,7 +4469,7 @@
 </file>
 
 <file path=ppt/slides/slide11.xml><?xml version="1.0" encoding="utf-8"?>
-<p:sld xmlns:a="http://schemas.openxmlformats.org/drawingml/2006/main" xmlns:p="http://schemas.openxmlformats.org/presentationml/2006/main" xmlns:r="http://schemas.openxmlformats.org/officeDocument/2006/relationships">
+<p:sld xmlns:a="http://schemas.openxmlformats.org/drawingml/2006/main" xmlns:r="http://schemas.openxmlformats.org/officeDocument/2006/relationships" xmlns:p="http://schemas.openxmlformats.org/presentationml/2006/main">
   <p:cSld>
     <p:bg>
       <p:bgPr>
@@ -4131,7 +4485,14 @@
         <p:cNvGrpSpPr/>
         <p:nvPr/>
       </p:nvGrpSpPr>
-      <p:grpSpPr/>
+      <p:grpSpPr>
+        <a:xfrm>
+          <a:off x="0" y="0"/>
+          <a:ext cx="0" cy="0"/>
+          <a:chOff x="0" y="0"/>
+          <a:chExt cx="0" cy="0"/>
+        </a:xfrm>
+      </p:grpSpPr>
       <p:sp>
         <p:nvSpPr>
           <p:cNvPr id="2" name="Rectangle 1"/>
@@ -4172,6 +4533,7 @@
           <a:lstStyle/>
           <a:p>
             <a:pPr algn="ctr"/>
+            <a:endParaRPr/>
           </a:p>
         </p:txBody>
       </p:sp>
@@ -4336,6 +4698,7 @@
           <a:lstStyle/>
           <a:p>
             <a:pPr algn="ctr"/>
+            <a:endParaRPr/>
           </a:p>
         </p:txBody>
       </p:sp>
@@ -4411,7 +4774,7 @@
           </a:fontRef>
         </p:style>
         <p:txBody>
-          <a:bodyPr rtlCol="0" anchor="ctr" wrap="square"/>
+          <a:bodyPr wrap="square" rtlCol="0" anchor="ctr"/>
           <a:lstStyle/>
           <a:p>
             <a:pPr algn="ctr"/>
@@ -4464,7 +4827,7 @@
           </a:fontRef>
         </p:style>
         <p:txBody>
-          <a:bodyPr rtlCol="0" anchor="ctr" wrap="square"/>
+          <a:bodyPr wrap="square" rtlCol="0" anchor="ctr"/>
           <a:lstStyle/>
           <a:p>
             <a:pPr algn="ctr"/>
@@ -4517,7 +4880,7 @@
           </a:fontRef>
         </p:style>
         <p:txBody>
-          <a:bodyPr rtlCol="0" anchor="ctr" wrap="square"/>
+          <a:bodyPr wrap="square" rtlCol="0" anchor="ctr"/>
           <a:lstStyle/>
           <a:p>
             <a:pPr algn="ctr"/>
@@ -4571,7 +4934,7 @@
           </a:fontRef>
         </p:style>
         <p:txBody>
-          <a:bodyPr rtlCol="0" anchor="ctr" wrap="square"/>
+          <a:bodyPr wrap="square" rtlCol="0" anchor="ctr"/>
           <a:lstStyle/>
           <a:p>
             <a:pPr algn="ctr"/>
@@ -4589,7 +4952,7 @@
       <p:sp>
         <p:nvSpPr>
           <p:cNvPr id="12" name="Rounded Rectangle 11">
-            <a:hlinkClick action="ppaction://hlinksldjump" r:id="rId2"/>
+            <a:hlinkClick r:id="rId2" action="ppaction://hlinksldjump"/>
           </p:cNvPr>
           <p:cNvSpPr/>
           <p:nvPr/>
@@ -4644,7 +5007,7 @@
       <p:sp>
         <p:nvSpPr>
           <p:cNvPr id="13" name="Rounded Rectangle 12">
-            <a:hlinkClick action="ppaction://hlinksldjump" r:id="rId3"/>
+            <a:hlinkClick r:id="rId3" action="ppaction://hlinksldjump"/>
           </p:cNvPr>
           <p:cNvSpPr/>
           <p:nvPr/>
@@ -4705,7 +5068,7 @@
 </file>
 
 <file path=ppt/slides/slide12.xml><?xml version="1.0" encoding="utf-8"?>
-<p:sld xmlns:a="http://schemas.openxmlformats.org/drawingml/2006/main" xmlns:p="http://schemas.openxmlformats.org/presentationml/2006/main" xmlns:r="http://schemas.openxmlformats.org/officeDocument/2006/relationships">
+<p:sld xmlns:a="http://schemas.openxmlformats.org/drawingml/2006/main" xmlns:r="http://schemas.openxmlformats.org/officeDocument/2006/relationships" xmlns:p="http://schemas.openxmlformats.org/presentationml/2006/main">
   <p:cSld>
     <p:bg>
       <p:bgPr>
@@ -4721,7 +5084,14 @@
         <p:cNvGrpSpPr/>
         <p:nvPr/>
       </p:nvGrpSpPr>
-      <p:grpSpPr/>
+      <p:grpSpPr>
+        <a:xfrm>
+          <a:off x="0" y="0"/>
+          <a:ext cx="0" cy="0"/>
+          <a:chOff x="0" y="0"/>
+          <a:chExt cx="0" cy="0"/>
+        </a:xfrm>
+      </p:grpSpPr>
       <p:sp>
         <p:nvSpPr>
           <p:cNvPr id="2" name="Rectangle 1"/>
@@ -4762,6 +5132,7 @@
           <a:lstStyle/>
           <a:p>
             <a:pPr algn="ctr"/>
+            <a:endParaRPr/>
           </a:p>
         </p:txBody>
       </p:sp>
@@ -4926,6 +5297,7 @@
           <a:lstStyle/>
           <a:p>
             <a:pPr algn="ctr"/>
+            <a:endParaRPr/>
           </a:p>
         </p:txBody>
       </p:sp>
@@ -5092,6 +5464,7 @@
           <a:lstStyle/>
           <a:p>
             <a:pPr algn="ctr"/>
+            <a:endParaRPr/>
           </a:p>
         </p:txBody>
       </p:sp>
@@ -5219,7 +5592,7 @@
       <p:sp>
         <p:nvSpPr>
           <p:cNvPr id="12" name="Rounded Rectangle 11">
-            <a:hlinkClick action="ppaction://hlinksldjump" r:id="rId2"/>
+            <a:hlinkClick r:id="rId2" action="ppaction://hlinksldjump"/>
           </p:cNvPr>
           <p:cNvSpPr/>
           <p:nvPr/>
@@ -5274,7 +5647,7 @@
       <p:sp>
         <p:nvSpPr>
           <p:cNvPr id="13" name="Rounded Rectangle 12">
-            <a:hlinkClick action="ppaction://hlinksldjump" r:id="rId3"/>
+            <a:hlinkClick r:id="rId3" action="ppaction://hlinksldjump"/>
           </p:cNvPr>
           <p:cNvSpPr/>
           <p:nvPr/>
@@ -5335,7 +5708,7 @@
 </file>
 
 <file path=ppt/slides/slide13.xml><?xml version="1.0" encoding="utf-8"?>
-<p:sld xmlns:a="http://schemas.openxmlformats.org/drawingml/2006/main" xmlns:p="http://schemas.openxmlformats.org/presentationml/2006/main" xmlns:r="http://schemas.openxmlformats.org/officeDocument/2006/relationships">
+<p:sld xmlns:a="http://schemas.openxmlformats.org/drawingml/2006/main" xmlns:r="http://schemas.openxmlformats.org/officeDocument/2006/relationships" xmlns:p="http://schemas.openxmlformats.org/presentationml/2006/main">
   <p:cSld>
     <p:bg>
       <p:bgPr>
@@ -5351,7 +5724,14 @@
         <p:cNvGrpSpPr/>
         <p:nvPr/>
       </p:nvGrpSpPr>
-      <p:grpSpPr/>
+      <p:grpSpPr>
+        <a:xfrm>
+          <a:off x="0" y="0"/>
+          <a:ext cx="0" cy="0"/>
+          <a:chOff x="0" y="0"/>
+          <a:chExt cx="0" cy="0"/>
+        </a:xfrm>
+      </p:grpSpPr>
       <p:sp>
         <p:nvSpPr>
           <p:cNvPr id="2" name="Rectangle 1"/>
@@ -5392,6 +5772,7 @@
           <a:lstStyle/>
           <a:p>
             <a:pPr algn="ctr"/>
+            <a:endParaRPr/>
           </a:p>
         </p:txBody>
       </p:sp>
@@ -5556,6 +5937,7 @@
           <a:lstStyle/>
           <a:p>
             <a:pPr algn="ctr"/>
+            <a:endParaRPr/>
           </a:p>
         </p:txBody>
       </p:sp>
@@ -5722,6 +6104,7 @@
           <a:lstStyle/>
           <a:p>
             <a:pPr algn="ctr"/>
+            <a:endParaRPr/>
           </a:p>
         </p:txBody>
       </p:sp>
@@ -5764,7 +6147,7 @@
       <p:sp>
         <p:nvSpPr>
           <p:cNvPr id="11" name="Rounded Rectangle 10">
-            <a:hlinkClick action="ppaction://hlinksldjump" r:id="rId2"/>
+            <a:hlinkClick r:id="rId2" action="ppaction://hlinksldjump"/>
           </p:cNvPr>
           <p:cNvSpPr/>
           <p:nvPr/>
@@ -5825,7 +6208,7 @@
 </file>
 
 <file path=ppt/slides/slide2.xml><?xml version="1.0" encoding="utf-8"?>
-<p:sld xmlns:a="http://schemas.openxmlformats.org/drawingml/2006/main" xmlns:p="http://schemas.openxmlformats.org/presentationml/2006/main" xmlns:r="http://schemas.openxmlformats.org/officeDocument/2006/relationships">
+<p:sld xmlns:a="http://schemas.openxmlformats.org/drawingml/2006/main" xmlns:r="http://schemas.openxmlformats.org/officeDocument/2006/relationships" xmlns:p="http://schemas.openxmlformats.org/presentationml/2006/main">
   <p:cSld>
     <p:bg>
       <p:bgPr>
@@ -5841,7 +6224,14 @@
         <p:cNvGrpSpPr/>
         <p:nvPr/>
       </p:nvGrpSpPr>
-      <p:grpSpPr/>
+      <p:grpSpPr>
+        <a:xfrm>
+          <a:off x="0" y="0"/>
+          <a:ext cx="0" cy="0"/>
+          <a:chOff x="0" y="0"/>
+          <a:chExt cx="0" cy="0"/>
+        </a:xfrm>
+      </p:grpSpPr>
       <p:sp>
         <p:nvSpPr>
           <p:cNvPr id="2" name="Rectangle 1"/>
@@ -5882,6 +6272,7 @@
           <a:lstStyle/>
           <a:p>
             <a:pPr algn="ctr"/>
+            <a:endParaRPr/>
           </a:p>
         </p:txBody>
       </p:sp>
@@ -6041,7 +6432,7 @@
       <p:sp>
         <p:nvSpPr>
           <p:cNvPr id="7" name="Rounded Rectangle 6">
-            <a:hlinkClick action="ppaction://hlinksldjump" r:id="rId2"/>
+            <a:hlinkClick r:id="rId2" action="ppaction://hlinksldjump"/>
           </p:cNvPr>
           <p:cNvSpPr/>
           <p:nvPr/>
@@ -6082,6 +6473,7 @@
           <a:lstStyle/>
           <a:p>
             <a:pPr algn="ctr"/>
+            <a:endParaRPr/>
           </a:p>
         </p:txBody>
       </p:sp>
@@ -6209,7 +6601,7 @@
       <p:sp>
         <p:nvSpPr>
           <p:cNvPr id="10" name="Rounded Rectangle 9">
-            <a:hlinkClick action="ppaction://hlinksldjump" r:id="rId3"/>
+            <a:hlinkClick r:id="rId3" action="ppaction://hlinksldjump"/>
           </p:cNvPr>
           <p:cNvSpPr/>
           <p:nvPr/>
@@ -6250,6 +6642,7 @@
           <a:lstStyle/>
           <a:p>
             <a:pPr algn="ctr"/>
+            <a:endParaRPr/>
           </a:p>
         </p:txBody>
       </p:sp>
@@ -6377,7 +6770,7 @@
       <p:sp>
         <p:nvSpPr>
           <p:cNvPr id="13" name="Rounded Rectangle 12">
-            <a:hlinkClick action="ppaction://hlinksldjump" r:id="rId2"/>
+            <a:hlinkClick r:id="rId2" action="ppaction://hlinksldjump"/>
           </p:cNvPr>
           <p:cNvSpPr/>
           <p:nvPr/>
@@ -6432,7 +6825,7 @@
       <p:sp>
         <p:nvSpPr>
           <p:cNvPr id="14" name="Rounded Rectangle 13">
-            <a:hlinkClick action="ppaction://hlinksldjump" r:id="rId3"/>
+            <a:hlinkClick r:id="rId3" action="ppaction://hlinksldjump"/>
           </p:cNvPr>
           <p:cNvSpPr/>
           <p:nvPr/>
@@ -6487,7 +6880,7 @@
       <p:sp>
         <p:nvSpPr>
           <p:cNvPr id="15" name="Rounded Rectangle 14">
-            <a:hlinkClick action="ppaction://hlinksldjump" r:id="rId4"/>
+            <a:hlinkClick r:id="rId4" action="ppaction://hlinksldjump"/>
           </p:cNvPr>
           <p:cNvSpPr/>
           <p:nvPr/>
@@ -6542,7 +6935,7 @@
       <p:sp>
         <p:nvSpPr>
           <p:cNvPr id="16" name="Rounded Rectangle 15">
-            <a:hlinkClick action="ppaction://hlinksldjump" r:id="rId5"/>
+            <a:hlinkClick r:id="rId5" action="ppaction://hlinksldjump"/>
           </p:cNvPr>
           <p:cNvSpPr/>
           <p:nvPr/>
@@ -6603,7 +6996,7 @@
 </file>
 
 <file path=ppt/slides/slide3.xml><?xml version="1.0" encoding="utf-8"?>
-<p:sld xmlns:a="http://schemas.openxmlformats.org/drawingml/2006/main" xmlns:p="http://schemas.openxmlformats.org/presentationml/2006/main" xmlns:r="http://schemas.openxmlformats.org/officeDocument/2006/relationships">
+<p:sld xmlns:a="http://schemas.openxmlformats.org/drawingml/2006/main" xmlns:r="http://schemas.openxmlformats.org/officeDocument/2006/relationships" xmlns:p="http://schemas.openxmlformats.org/presentationml/2006/main">
   <p:cSld>
     <p:bg>
       <p:bgPr>
@@ -6619,7 +7012,14 @@
         <p:cNvGrpSpPr/>
         <p:nvPr/>
       </p:nvGrpSpPr>
-      <p:grpSpPr/>
+      <p:grpSpPr>
+        <a:xfrm>
+          <a:off x="0" y="0"/>
+          <a:ext cx="0" cy="0"/>
+          <a:chOff x="0" y="0"/>
+          <a:chExt cx="0" cy="0"/>
+        </a:xfrm>
+      </p:grpSpPr>
       <p:sp>
         <p:nvSpPr>
           <p:cNvPr id="2" name="Rectangle 1"/>
@@ -6660,6 +7060,7 @@
           <a:lstStyle/>
           <a:p>
             <a:pPr algn="ctr"/>
+            <a:endParaRPr/>
           </a:p>
         </p:txBody>
       </p:sp>
@@ -6824,6 +7225,7 @@
           <a:lstStyle/>
           <a:p>
             <a:pPr algn="ctr"/>
+            <a:endParaRPr/>
           </a:p>
         </p:txBody>
       </p:sp>
@@ -7025,6 +7427,7 @@
           <a:lstStyle/>
           <a:p>
             <a:pPr algn="ctr"/>
+            <a:endParaRPr/>
           </a:p>
         </p:txBody>
       </p:sp>
@@ -7182,7 +7585,7 @@
       <p:sp>
         <p:nvSpPr>
           <p:cNvPr id="14" name="Rounded Rectangle 13">
-            <a:hlinkClick action="ppaction://hlinksldjump" r:id="rId2"/>
+            <a:hlinkClick r:id="rId2" action="ppaction://hlinksldjump"/>
           </p:cNvPr>
           <p:cNvSpPr/>
           <p:nvPr/>
@@ -7243,7 +7646,7 @@
 </file>
 
 <file path=ppt/slides/slide4.xml><?xml version="1.0" encoding="utf-8"?>
-<p:sld xmlns:a="http://schemas.openxmlformats.org/drawingml/2006/main" xmlns:p="http://schemas.openxmlformats.org/presentationml/2006/main" xmlns:r="http://schemas.openxmlformats.org/officeDocument/2006/relationships">
+<p:sld xmlns:a="http://schemas.openxmlformats.org/drawingml/2006/main" xmlns:r="http://schemas.openxmlformats.org/officeDocument/2006/relationships" xmlns:p="http://schemas.openxmlformats.org/presentationml/2006/main">
   <p:cSld>
     <p:bg>
       <p:bgPr>
@@ -7259,7 +7662,14 @@
         <p:cNvGrpSpPr/>
         <p:nvPr/>
       </p:nvGrpSpPr>
-      <p:grpSpPr/>
+      <p:grpSpPr>
+        <a:xfrm>
+          <a:off x="0" y="0"/>
+          <a:ext cx="0" cy="0"/>
+          <a:chOff x="0" y="0"/>
+          <a:chExt cx="0" cy="0"/>
+        </a:xfrm>
+      </p:grpSpPr>
       <p:sp>
         <p:nvSpPr>
           <p:cNvPr id="2" name="Rectangle 1"/>
@@ -7300,6 +7710,7 @@
           <a:lstStyle/>
           <a:p>
             <a:pPr algn="ctr"/>
+            <a:endParaRPr/>
           </a:p>
         </p:txBody>
       </p:sp>
@@ -7464,6 +7875,7 @@
           <a:lstStyle/>
           <a:p>
             <a:pPr algn="ctr"/>
+            <a:endParaRPr/>
           </a:p>
         </p:txBody>
       </p:sp>
@@ -7541,6 +7953,7 @@
           <a:lstStyle/>
           <a:p>
             <a:pPr algn="ctr"/>
+            <a:endParaRPr/>
           </a:p>
         </p:txBody>
       </p:sp>
@@ -7984,7 +8397,7 @@
       <p:sp>
         <p:nvSpPr>
           <p:cNvPr id="11" name="Rounded Rectangle 10">
-            <a:hlinkClick action="ppaction://hlinksldjump" r:id="rId2"/>
+            <a:hlinkClick r:id="rId2" action="ppaction://hlinksldjump"/>
           </p:cNvPr>
           <p:cNvSpPr/>
           <p:nvPr/>
@@ -8045,7 +8458,7 @@
 </file>
 
 <file path=ppt/slides/slide5.xml><?xml version="1.0" encoding="utf-8"?>
-<p:sld xmlns:a="http://schemas.openxmlformats.org/drawingml/2006/main" xmlns:p="http://schemas.openxmlformats.org/presentationml/2006/main" xmlns:r="http://schemas.openxmlformats.org/officeDocument/2006/relationships">
+<p:sld xmlns:a="http://schemas.openxmlformats.org/drawingml/2006/main" xmlns:r="http://schemas.openxmlformats.org/officeDocument/2006/relationships" xmlns:p="http://schemas.openxmlformats.org/presentationml/2006/main">
   <p:cSld>
     <p:bg>
       <p:bgPr>
@@ -8061,7 +8474,14 @@
         <p:cNvGrpSpPr/>
         <p:nvPr/>
       </p:nvGrpSpPr>
-      <p:grpSpPr/>
+      <p:grpSpPr>
+        <a:xfrm>
+          <a:off x="0" y="0"/>
+          <a:ext cx="0" cy="0"/>
+          <a:chOff x="0" y="0"/>
+          <a:chExt cx="0" cy="0"/>
+        </a:xfrm>
+      </p:grpSpPr>
       <p:sp>
         <p:nvSpPr>
           <p:cNvPr id="2" name="Rectangle 1"/>
@@ -8102,6 +8522,7 @@
           <a:lstStyle/>
           <a:p>
             <a:pPr algn="ctr"/>
+            <a:endParaRPr/>
           </a:p>
         </p:txBody>
       </p:sp>
@@ -8419,8 +8840,8 @@
       </p:sp>
       <p:sp>
         <p:nvSpPr>
-          <p:cNvPr id="10" name="Rectangle 9">
-            <a:hlinkClick action="ppaction://hlinksldjump" r:id="rId3"/>
+          <p:cNvPr id="10" name="S003_LAW_LINK_01">
+            <a:hlinkClick r:id="rId2" action="ppaction://hlinksldjump"/>
           </p:cNvPr>
           <p:cNvSpPr/>
           <p:nvPr/>
@@ -8457,7 +8878,7 @@
           </a:fontRef>
         </p:style>
         <p:txBody>
-          <a:bodyPr rtlCol="0" anchor="ctr" wrap="square"/>
+          <a:bodyPr wrap="square" rtlCol="0" anchor="ctr"/>
           <a:lstStyle/>
           <a:p>
             <a:pPr algn="l"/>
@@ -8510,7 +8931,7 @@
           </a:fontRef>
         </p:style>
         <p:txBody>
-          <a:bodyPr rtlCol="0" anchor="ctr" wrap="square"/>
+          <a:bodyPr wrap="square" rtlCol="0" anchor="ctr"/>
           <a:lstStyle/>
           <a:p>
             <a:pPr algn="ctr"/>
@@ -8563,7 +8984,7 @@
           </a:fontRef>
         </p:style>
         <p:txBody>
-          <a:bodyPr rtlCol="0" anchor="ctr" wrap="square"/>
+          <a:bodyPr wrap="square" rtlCol="0" anchor="ctr"/>
           <a:lstStyle/>
           <a:p>
             <a:pPr algn="l"/>
@@ -8581,8 +9002,8 @@
       </p:sp>
       <p:sp>
         <p:nvSpPr>
-          <p:cNvPr id="13" name="Rectangle 12">
-            <a:hlinkClick action="ppaction://hlinksldjump" r:id="rId4"/>
+          <p:cNvPr id="13" name="S003_LAW_LINK_02">
+            <a:hlinkClick r:id="rId3" action="ppaction://hlinksldjump"/>
           </p:cNvPr>
           <p:cNvSpPr/>
           <p:nvPr/>
@@ -8619,7 +9040,7 @@
           </a:fontRef>
         </p:style>
         <p:txBody>
-          <a:bodyPr rtlCol="0" anchor="ctr" wrap="square"/>
+          <a:bodyPr wrap="square" rtlCol="0" anchor="ctr"/>
           <a:lstStyle/>
           <a:p>
             <a:pPr algn="l"/>
@@ -8672,7 +9093,7 @@
           </a:fontRef>
         </p:style>
         <p:txBody>
-          <a:bodyPr rtlCol="0" anchor="ctr" wrap="square"/>
+          <a:bodyPr wrap="square" rtlCol="0" anchor="ctr"/>
           <a:lstStyle/>
           <a:p>
             <a:pPr algn="ctr"/>
@@ -8725,7 +9146,7 @@
           </a:fontRef>
         </p:style>
         <p:txBody>
-          <a:bodyPr rtlCol="0" anchor="ctr" wrap="square"/>
+          <a:bodyPr wrap="square" rtlCol="0" anchor="ctr"/>
           <a:lstStyle/>
           <a:p>
             <a:pPr algn="l"/>
@@ -8742,8 +9163,8 @@
       </p:sp>
       <p:sp>
         <p:nvSpPr>
-          <p:cNvPr id="16" name="Rectangle 15">
-            <a:hlinkClick action="ppaction://hlinksldjump" r:id="rId5"/>
+          <p:cNvPr id="16" name="S003_LAW_LINK_03">
+            <a:hlinkClick r:id="rId4" action="ppaction://hlinksldjump"/>
           </p:cNvPr>
           <p:cNvSpPr/>
           <p:nvPr/>
@@ -8780,7 +9201,7 @@
           </a:fontRef>
         </p:style>
         <p:txBody>
-          <a:bodyPr rtlCol="0" anchor="ctr" wrap="square"/>
+          <a:bodyPr wrap="square" rtlCol="0" anchor="ctr"/>
           <a:lstStyle/>
           <a:p>
             <a:pPr algn="l"/>
@@ -8833,7 +9254,7 @@
           </a:fontRef>
         </p:style>
         <p:txBody>
-          <a:bodyPr rtlCol="0" anchor="ctr" wrap="square"/>
+          <a:bodyPr wrap="square" rtlCol="0" anchor="ctr"/>
           <a:lstStyle/>
           <a:p>
             <a:pPr algn="ctr"/>
@@ -8886,7 +9307,7 @@
           </a:fontRef>
         </p:style>
         <p:txBody>
-          <a:bodyPr rtlCol="0" anchor="ctr" wrap="square"/>
+          <a:bodyPr wrap="square" rtlCol="0" anchor="ctr"/>
           <a:lstStyle/>
           <a:p>
             <a:pPr algn="l"/>
@@ -8904,8 +9325,8 @@
       </p:sp>
       <p:sp>
         <p:nvSpPr>
-          <p:cNvPr id="19" name="Rectangle 18">
-            <a:hlinkClick action="ppaction://hlinksldjump" r:id="rId6"/>
+          <p:cNvPr id="19" name="S003_LAW_LINK_04">
+            <a:hlinkClick r:id="rId5" action="ppaction://hlinksldjump"/>
           </p:cNvPr>
           <p:cNvSpPr/>
           <p:nvPr/>
@@ -8942,7 +9363,7 @@
           </a:fontRef>
         </p:style>
         <p:txBody>
-          <a:bodyPr rtlCol="0" anchor="ctr" wrap="square"/>
+          <a:bodyPr wrap="square" rtlCol="0" anchor="ctr"/>
           <a:lstStyle/>
           <a:p>
             <a:pPr algn="l"/>
@@ -8995,7 +9416,7 @@
           </a:fontRef>
         </p:style>
         <p:txBody>
-          <a:bodyPr rtlCol="0" anchor="ctr" wrap="square"/>
+          <a:bodyPr wrap="square" rtlCol="0" anchor="ctr"/>
           <a:lstStyle/>
           <a:p>
             <a:pPr algn="ctr"/>
@@ -9048,7 +9469,7 @@
           </a:fontRef>
         </p:style>
         <p:txBody>
-          <a:bodyPr rtlCol="0" anchor="ctr" wrap="square"/>
+          <a:bodyPr wrap="square" rtlCol="0" anchor="ctr"/>
           <a:lstStyle/>
           <a:p>
             <a:pPr algn="l"/>
@@ -9063,26 +9484,180 @@
           </a:p>
         </p:txBody>
       </p:sp>
-      <p:sp>
-        <p:nvSpPr>
-          <p:cNvPr id="22" name="Rounded Rectangle 21"/>
-          <p:cNvSpPr/>
-          <p:nvPr/>
-        </p:nvSpPr>
-        <p:spPr>
+      <p:grpSp>
+        <p:nvGrpSpPr>
+          <p:cNvPr id="27" name="S003_INFO_GROUP"/>
+          <p:cNvGrpSpPr/>
+          <p:nvPr/>
+        </p:nvGrpSpPr>
+        <p:grpSpPr>
           <a:xfrm>
             <a:off x="9555480" y="1691640"/>
             <a:ext cx="1965960" cy="1965960"/>
-          </a:xfrm>
-          <a:prstGeom prst="roundRect">
-            <a:avLst/>
-          </a:prstGeom>
-          <a:solidFill>
-            <a:srgbClr val="FFFFFF"/>
-          </a:solidFill>
-          <a:ln w="19050">
+            <a:chOff x="9555480" y="1691640"/>
+            <a:chExt cx="1965960" cy="1965960"/>
+          </a:xfrm>
+        </p:grpSpPr>
+        <p:sp>
+          <p:nvSpPr>
+            <p:cNvPr id="22" name="S003_INFO_PANEL"/>
+            <p:cNvSpPr/>
+            <p:nvPr/>
+          </p:nvSpPr>
+          <p:spPr>
+            <a:xfrm>
+              <a:off x="9555480" y="1691640"/>
+              <a:ext cx="1965960" cy="1965960"/>
+            </a:xfrm>
+            <a:prstGeom prst="roundRect">
+              <a:avLst/>
+            </a:prstGeom>
+            <a:solidFill>
+              <a:srgbClr val="FFFFFF"/>
+            </a:solidFill>
+            <a:ln w="19050">
+              <a:solidFill>
+                <a:srgbClr val="42855F"/>
+              </a:solidFill>
+            </a:ln>
+          </p:spPr>
+          <p:style>
+            <a:lnRef idx="1">
+              <a:schemeClr val="accent1"/>
+            </a:lnRef>
+            <a:fillRef idx="3">
+              <a:schemeClr val="accent1"/>
+            </a:fillRef>
+            <a:effectRef idx="2">
+              <a:schemeClr val="accent1"/>
+            </a:effectRef>
+            <a:fontRef idx="minor">
+              <a:schemeClr val="lt1"/>
+            </a:fontRef>
+          </p:style>
+          <p:txBody>
+            <a:bodyPr rtlCol="0" anchor="ctr"/>
+            <a:lstStyle/>
+            <a:p>
+              <a:pPr algn="ctr"/>
+              <a:endParaRPr/>
+            </a:p>
+          </p:txBody>
+        </p:sp>
+        <p:sp>
+          <p:nvSpPr>
+            <p:cNvPr id="23" name="S003_INFO_HEAD"/>
+            <p:cNvSpPr/>
+            <p:nvPr/>
+          </p:nvSpPr>
+          <p:spPr>
+            <a:xfrm>
+              <a:off x="9555480" y="1691640"/>
+              <a:ext cx="1965960" cy="566928"/>
+            </a:xfrm>
+            <a:prstGeom prst="roundRect">
+              <a:avLst/>
+            </a:prstGeom>
             <a:solidFill>
               <a:srgbClr val="42855F"/>
+            </a:solidFill>
+            <a:ln>
+              <a:solidFill>
+                <a:srgbClr val="42855F"/>
+              </a:solidFill>
+            </a:ln>
+          </p:spPr>
+          <p:style>
+            <a:lnRef idx="1">
+              <a:schemeClr val="accent1"/>
+            </a:lnRef>
+            <a:fillRef idx="3">
+              <a:schemeClr val="accent1"/>
+            </a:fillRef>
+            <a:effectRef idx="2">
+              <a:schemeClr val="accent1"/>
+            </a:effectRef>
+            <a:fontRef idx="minor">
+              <a:schemeClr val="lt1"/>
+            </a:fontRef>
+          </p:style>
+          <p:txBody>
+            <a:bodyPr rtlCol="0" anchor="ctr"/>
+            <a:lstStyle/>
+            <a:p>
+              <a:pPr algn="ctr"/>
+              <a:r>
+                <a:rPr sz="1900" b="1">
+                  <a:solidFill>
+                    <a:srgbClr val="FFFFFF"/>
+                  </a:solidFill>
+                </a:rPr>
+                <a:t>Интерактив</a:t>
+              </a:r>
+            </a:p>
+          </p:txBody>
+        </p:sp>
+        <p:sp>
+          <p:nvSpPr>
+            <p:cNvPr id="24" name="S003_INFO_BODY"/>
+            <p:cNvSpPr txBox="1"/>
+            <p:nvPr/>
+          </p:nvSpPr>
+          <p:spPr>
+            <a:xfrm>
+              <a:off x="9784080" y="2478024"/>
+              <a:ext cx="1508760" cy="996696"/>
+            </a:xfrm>
+            <a:prstGeom prst="rect">
+              <a:avLst/>
+            </a:prstGeom>
+            <a:noFill/>
+          </p:spPr>
+          <p:txBody>
+            <a:bodyPr wrap="square">
+              <a:spAutoFit/>
+            </a:bodyPr>
+            <a:lstStyle/>
+            <a:p>
+              <a:pPr>
+                <a:spcAft>
+                  <a:spcPts val="800"/>
+                </a:spcAft>
+              </a:pPr>
+              <a:r>
+                <a:rPr sz="1500">
+                  <a:solidFill>
+                    <a:srgbClr val="212B36"/>
+                  </a:solidFill>
+                </a:rPr>
+                <a:t>Нажмите на название документа.</a:t>
+              </a:r>
+            </a:p>
+          </p:txBody>
+        </p:sp>
+      </p:grpSp>
+      <p:sp>
+        <p:nvSpPr>
+          <p:cNvPr id="25" name="S003_BACK">
+            <a:hlinkClick r:id="rId6" action="ppaction://hlinksldjump"/>
+          </p:cNvPr>
+          <p:cNvSpPr/>
+          <p:nvPr/>
+        </p:nvSpPr>
+        <p:spPr>
+          <a:xfrm>
+            <a:off x="640080" y="5989320"/>
+            <a:ext cx="2148840" cy="457200"/>
+          </a:xfrm>
+          <a:prstGeom prst="roundRect">
+            <a:avLst/>
+          </a:prstGeom>
+          <a:solidFill>
+            <a:srgbClr val="537795"/>
+          </a:solidFill>
+          <a:ln>
+            <a:solidFill>
+              <a:srgbClr val="537795"/>
             </a:solidFill>
           </a:ln>
         </p:spPr>
@@ -9105,29 +9680,39 @@
           <a:lstStyle/>
           <a:p>
             <a:pPr algn="ctr"/>
-          </a:p>
-        </p:txBody>
-      </p:sp>
-      <p:sp>
-        <p:nvSpPr>
-          <p:cNvPr id="23" name="Rounded Rectangle 22"/>
+            <a:r>
+              <a:rPr sz="1800" b="1">
+                <a:solidFill>
+                  <a:srgbClr val="FFFFFF"/>
+                </a:solidFill>
+              </a:rPr>
+              <a:t>НАЗАД</a:t>
+            </a:r>
+          </a:p>
+        </p:txBody>
+      </p:sp>
+      <p:sp>
+        <p:nvSpPr>
+          <p:cNvPr id="26" name="S003_NEXT">
+            <a:hlinkClick r:id="rId7" action="ppaction://hlinksldjump"/>
+          </p:cNvPr>
           <p:cNvSpPr/>
           <p:nvPr/>
         </p:nvSpPr>
         <p:spPr>
           <a:xfrm>
-            <a:off x="9555480" y="1691640"/>
-            <a:ext cx="1965960" cy="566928"/>
+            <a:off x="9372600" y="5989320"/>
+            <a:ext cx="2148840" cy="457200"/>
           </a:xfrm>
           <a:prstGeom prst="roundRect">
             <a:avLst/>
           </a:prstGeom>
           <a:solidFill>
-            <a:srgbClr val="42855F"/>
+            <a:srgbClr val="DE7436"/>
           </a:solidFill>
           <a:ln>
             <a:solidFill>
-              <a:srgbClr val="42855F"/>
+              <a:srgbClr val="DE7436"/>
             </a:solidFill>
           </a:ln>
         </p:spPr>
@@ -9151,154 +9736,6 @@
           <a:p>
             <a:pPr algn="ctr"/>
             <a:r>
-              <a:rPr sz="1900" b="1">
-                <a:solidFill>
-                  <a:srgbClr val="FFFFFF"/>
-                </a:solidFill>
-              </a:rPr>
-              <a:t>Интерактив</a:t>
-            </a:r>
-          </a:p>
-        </p:txBody>
-      </p:sp>
-      <p:sp>
-        <p:nvSpPr>
-          <p:cNvPr id="24" name="TextBox 23"/>
-          <p:cNvSpPr txBox="1"/>
-          <p:nvPr/>
-        </p:nvSpPr>
-        <p:spPr>
-          <a:xfrm>
-            <a:off x="9784080" y="2478024"/>
-            <a:ext cx="1508760" cy="996696"/>
-          </a:xfrm>
-          <a:prstGeom prst="rect">
-            <a:avLst/>
-          </a:prstGeom>
-          <a:noFill/>
-        </p:spPr>
-        <p:txBody>
-          <a:bodyPr wrap="square">
-            <a:spAutoFit/>
-          </a:bodyPr>
-          <a:lstStyle/>
-          <a:p>
-            <a:pPr>
-              <a:spcAft>
-                <a:spcPts val="800"/>
-              </a:spcAft>
-            </a:pPr>
-            <a:r>
-              <a:rPr sz="1500">
-                <a:solidFill>
-                  <a:srgbClr val="212B36"/>
-                </a:solidFill>
-              </a:rPr>
-              <a:t>Нажмите на название документа.</a:t>
-            </a:r>
-          </a:p>
-        </p:txBody>
-      </p:sp>
-      <p:sp>
-        <p:nvSpPr>
-          <p:cNvPr id="25" name="Rounded Rectangle 24">
-            <a:hlinkClick action="ppaction://hlinksldjump" r:id="rId2"/>
-          </p:cNvPr>
-          <p:cNvSpPr/>
-          <p:nvPr/>
-        </p:nvSpPr>
-        <p:spPr>
-          <a:xfrm>
-            <a:off x="640080" y="5989320"/>
-            <a:ext cx="2148840" cy="457200"/>
-          </a:xfrm>
-          <a:prstGeom prst="roundRect">
-            <a:avLst/>
-          </a:prstGeom>
-          <a:solidFill>
-            <a:srgbClr val="537795"/>
-          </a:solidFill>
-          <a:ln>
-            <a:solidFill>
-              <a:srgbClr val="537795"/>
-            </a:solidFill>
-          </a:ln>
-        </p:spPr>
-        <p:style>
-          <a:lnRef idx="1">
-            <a:schemeClr val="accent1"/>
-          </a:lnRef>
-          <a:fillRef idx="3">
-            <a:schemeClr val="accent1"/>
-          </a:fillRef>
-          <a:effectRef idx="2">
-            <a:schemeClr val="accent1"/>
-          </a:effectRef>
-          <a:fontRef idx="minor">
-            <a:schemeClr val="lt1"/>
-          </a:fontRef>
-        </p:style>
-        <p:txBody>
-          <a:bodyPr rtlCol="0" anchor="ctr"/>
-          <a:lstStyle/>
-          <a:p>
-            <a:pPr algn="ctr"/>
-            <a:r>
-              <a:rPr sz="1800" b="1">
-                <a:solidFill>
-                  <a:srgbClr val="FFFFFF"/>
-                </a:solidFill>
-              </a:rPr>
-              <a:t>НАЗАД</a:t>
-            </a:r>
-          </a:p>
-        </p:txBody>
-      </p:sp>
-      <p:sp>
-        <p:nvSpPr>
-          <p:cNvPr id="26" name="Rounded Rectangle 25">
-            <a:hlinkClick action="ppaction://hlinksldjump" r:id="rId7"/>
-          </p:cNvPr>
-          <p:cNvSpPr/>
-          <p:nvPr/>
-        </p:nvSpPr>
-        <p:spPr>
-          <a:xfrm>
-            <a:off x="9372600" y="5989320"/>
-            <a:ext cx="2148840" cy="457200"/>
-          </a:xfrm>
-          <a:prstGeom prst="roundRect">
-            <a:avLst/>
-          </a:prstGeom>
-          <a:solidFill>
-            <a:srgbClr val="DE7436"/>
-          </a:solidFill>
-          <a:ln>
-            <a:solidFill>
-              <a:srgbClr val="DE7436"/>
-            </a:solidFill>
-          </a:ln>
-        </p:spPr>
-        <p:style>
-          <a:lnRef idx="1">
-            <a:schemeClr val="accent1"/>
-          </a:lnRef>
-          <a:fillRef idx="3">
-            <a:schemeClr val="accent1"/>
-          </a:fillRef>
-          <a:effectRef idx="2">
-            <a:schemeClr val="accent1"/>
-          </a:effectRef>
-          <a:fontRef idx="minor">
-            <a:schemeClr val="lt1"/>
-          </a:fontRef>
-        </p:style>
-        <p:txBody>
-          <a:bodyPr rtlCol="0" anchor="ctr"/>
-          <a:lstStyle/>
-          <a:p>
-            <a:pPr algn="ctr"/>
-            <a:r>
               <a:rPr sz="1800" b="1">
                 <a:solidFill>
                   <a:srgbClr val="FFFFFF"/>
@@ -9314,11 +9751,141 @@
   <p:clrMapOvr>
     <a:masterClrMapping/>
   </p:clrMapOvr>
+  <p:timing>
+    <p:tnLst>
+      <p:par>
+        <p:cTn id="1" dur="indefinite" restart="never" nodeType="tmRoot">
+          <p:childTnLst>
+            <p:seq concurrent="1" nextAc="seek">
+              <p:cTn id="2" dur="indefinite" nodeType="mainSeq">
+                <p:childTnLst>
+                  <p:par>
+                    <p:cTn id="3" fill="hold">
+                      <p:stCondLst>
+                        <p:cond delay="indefinite"/>
+                        <p:cond evt="onBegin" delay="0">
+                          <p:tn val="2"/>
+                        </p:cond>
+                      </p:stCondLst>
+                      <p:childTnLst>
+                        <p:par>
+                          <p:cTn id="4" fill="hold">
+                            <p:stCondLst>
+                              <p:cond delay="0"/>
+                            </p:stCondLst>
+                            <p:childTnLst>
+                              <p:par>
+                                <p:cTn id="5" presetID="10" presetClass="entr" presetSubtype="0" fill="hold" nodeType="afterEffect">
+                                  <p:stCondLst>
+                                    <p:cond delay="2000"/>
+                                  </p:stCondLst>
+                                  <p:childTnLst>
+                                    <p:set>
+                                      <p:cBhvr>
+                                        <p:cTn id="6" dur="1" fill="hold">
+                                          <p:stCondLst>
+                                            <p:cond delay="0"/>
+                                          </p:stCondLst>
+                                        </p:cTn>
+                                        <p:tgtEl>
+                                          <p:spTgt spid="27"/>
+                                        </p:tgtEl>
+                                        <p:attrNameLst>
+                                          <p:attrName>style.visibility</p:attrName>
+                                        </p:attrNameLst>
+                                      </p:cBhvr>
+                                      <p:to>
+                                        <p:strVal val="visible"/>
+                                      </p:to>
+                                    </p:set>
+                                    <p:animEffect transition="in" filter="fade">
+                                      <p:cBhvr>
+                                        <p:cTn id="7" dur="900"/>
+                                        <p:tgtEl>
+                                          <p:spTgt spid="27"/>
+                                        </p:tgtEl>
+                                      </p:cBhvr>
+                                    </p:animEffect>
+                                  </p:childTnLst>
+                                </p:cTn>
+                              </p:par>
+                            </p:childTnLst>
+                          </p:cTn>
+                        </p:par>
+                        <p:par>
+                          <p:cTn id="8" fill="hold">
+                            <p:stCondLst>
+                              <p:cond delay="2900"/>
+                            </p:stCondLst>
+                            <p:childTnLst>
+                              <p:par>
+                                <p:cTn id="9" presetID="10" presetClass="exit" presetSubtype="0" fill="hold" nodeType="afterEffect">
+                                  <p:stCondLst>
+                                    <p:cond delay="5000"/>
+                                  </p:stCondLst>
+                                  <p:childTnLst>
+                                    <p:animEffect transition="out" filter="fade">
+                                      <p:cBhvr>
+                                        <p:cTn id="10" dur="900"/>
+                                        <p:tgtEl>
+                                          <p:spTgt spid="27"/>
+                                        </p:tgtEl>
+                                      </p:cBhvr>
+                                    </p:animEffect>
+                                    <p:set>
+                                      <p:cBhvr>
+                                        <p:cTn id="11" dur="1" fill="hold">
+                                          <p:stCondLst>
+                                            <p:cond delay="899"/>
+                                          </p:stCondLst>
+                                        </p:cTn>
+                                        <p:tgtEl>
+                                          <p:spTgt spid="27"/>
+                                        </p:tgtEl>
+                                        <p:attrNameLst>
+                                          <p:attrName>style.visibility</p:attrName>
+                                        </p:attrNameLst>
+                                      </p:cBhvr>
+                                      <p:to>
+                                        <p:strVal val="hidden"/>
+                                      </p:to>
+                                    </p:set>
+                                  </p:childTnLst>
+                                </p:cTn>
+                              </p:par>
+                            </p:childTnLst>
+                          </p:cTn>
+                        </p:par>
+                      </p:childTnLst>
+                    </p:cTn>
+                  </p:par>
+                </p:childTnLst>
+              </p:cTn>
+              <p:prevCondLst>
+                <p:cond evt="onPrev" delay="0">
+                  <p:tgtEl>
+                    <p:sldTgt/>
+                  </p:tgtEl>
+                </p:cond>
+              </p:prevCondLst>
+              <p:nextCondLst>
+                <p:cond evt="onNext" delay="0">
+                  <p:tgtEl>
+                    <p:sldTgt/>
+                  </p:tgtEl>
+                </p:cond>
+              </p:nextCondLst>
+            </p:seq>
+          </p:childTnLst>
+        </p:cTn>
+      </p:par>
+    </p:tnLst>
+  </p:timing>
 </p:sld>
 </file>
 
 <file path=ppt/slides/slide6.xml><?xml version="1.0" encoding="utf-8"?>
-<p:sld xmlns:a="http://schemas.openxmlformats.org/drawingml/2006/main" xmlns:p="http://schemas.openxmlformats.org/presentationml/2006/main" xmlns:r="http://schemas.openxmlformats.org/officeDocument/2006/relationships">
+<p:sld xmlns:a="http://schemas.openxmlformats.org/drawingml/2006/main" xmlns:r="http://schemas.openxmlformats.org/officeDocument/2006/relationships" xmlns:p="http://schemas.openxmlformats.org/presentationml/2006/main">
   <p:cSld>
     <p:bg>
       <p:bgPr>
@@ -9334,7 +9901,14 @@
         <p:cNvGrpSpPr/>
         <p:nvPr/>
       </p:nvGrpSpPr>
-      <p:grpSpPr/>
+      <p:grpSpPr>
+        <a:xfrm>
+          <a:off x="0" y="0"/>
+          <a:ext cx="0" cy="0"/>
+          <a:chOff x="0" y="0"/>
+          <a:chExt cx="0" cy="0"/>
+        </a:xfrm>
+      </p:grpSpPr>
       <p:sp>
         <p:nvSpPr>
           <p:cNvPr id="2" name="Rectangle 1"/>
@@ -9375,6 +9949,7 @@
           <a:lstStyle/>
           <a:p>
             <a:pPr algn="ctr"/>
+            <a:endParaRPr/>
           </a:p>
         </p:txBody>
       </p:sp>
@@ -9675,7 +10250,7 @@
           </a:fontRef>
         </p:style>
         <p:txBody>
-          <a:bodyPr rtlCol="0" anchor="ctr" wrap="square"/>
+          <a:bodyPr wrap="square" rtlCol="0" anchor="ctr"/>
           <a:lstStyle/>
           <a:p>
             <a:pPr algn="l"/>
@@ -9728,7 +10303,7 @@
           </a:fontRef>
         </p:style>
         <p:txBody>
-          <a:bodyPr rtlCol="0" anchor="ctr" wrap="square"/>
+          <a:bodyPr wrap="square" rtlCol="0" anchor="ctr"/>
           <a:lstStyle/>
           <a:p>
             <a:pPr algn="l"/>
@@ -9781,7 +10356,7 @@
           </a:fontRef>
         </p:style>
         <p:txBody>
-          <a:bodyPr rtlCol="0" anchor="ctr" wrap="square"/>
+          <a:bodyPr wrap="square" rtlCol="0" anchor="ctr"/>
           <a:lstStyle/>
           <a:p>
             <a:pPr algn="l"/>
@@ -9834,7 +10409,7 @@
           </a:fontRef>
         </p:style>
         <p:txBody>
-          <a:bodyPr rtlCol="0" anchor="ctr" wrap="square"/>
+          <a:bodyPr wrap="square" rtlCol="0" anchor="ctr"/>
           <a:lstStyle/>
           <a:p>
             <a:pPr algn="l"/>
@@ -9887,7 +10462,7 @@
           </a:fontRef>
         </p:style>
         <p:txBody>
-          <a:bodyPr rtlCol="0" anchor="ctr" wrap="square"/>
+          <a:bodyPr wrap="square" rtlCol="0" anchor="ctr"/>
           <a:lstStyle/>
           <a:p>
             <a:pPr algn="l"/>
@@ -9940,7 +10515,7 @@
           </a:fontRef>
         </p:style>
         <p:txBody>
-          <a:bodyPr rtlCol="0" anchor="ctr" wrap="square"/>
+          <a:bodyPr wrap="square" rtlCol="0" anchor="ctr"/>
           <a:lstStyle/>
           <a:p>
             <a:pPr algn="l"/>
@@ -9957,8 +10532,8 @@
       </p:sp>
       <p:sp>
         <p:nvSpPr>
-          <p:cNvPr id="15" name="Rounded Rectangle 14">
-            <a:hlinkClick action="ppaction://hlinksldjump" r:id="rId2"/>
+          <p:cNvPr id="15" name="S003_P01_BACK">
+            <a:hlinkClick r:id="rId2" action="ppaction://hlinksldjump"/>
           </p:cNvPr>
           <p:cNvSpPr/>
           <p:nvPr/>
@@ -10019,7 +10594,7 @@
 </file>
 
 <file path=ppt/slides/slide7.xml><?xml version="1.0" encoding="utf-8"?>
-<p:sld xmlns:a="http://schemas.openxmlformats.org/drawingml/2006/main" xmlns:p="http://schemas.openxmlformats.org/presentationml/2006/main" xmlns:r="http://schemas.openxmlformats.org/officeDocument/2006/relationships">
+<p:sld xmlns:a="http://schemas.openxmlformats.org/drawingml/2006/main" xmlns:r="http://schemas.openxmlformats.org/officeDocument/2006/relationships" xmlns:p="http://schemas.openxmlformats.org/presentationml/2006/main">
   <p:cSld>
     <p:bg>
       <p:bgPr>
@@ -10035,7 +10610,14 @@
         <p:cNvGrpSpPr/>
         <p:nvPr/>
       </p:nvGrpSpPr>
-      <p:grpSpPr/>
+      <p:grpSpPr>
+        <a:xfrm>
+          <a:off x="0" y="0"/>
+          <a:ext cx="0" cy="0"/>
+          <a:chOff x="0" y="0"/>
+          <a:chExt cx="0" cy="0"/>
+        </a:xfrm>
+      </p:grpSpPr>
       <p:sp>
         <p:nvSpPr>
           <p:cNvPr id="2" name="Rectangle 1"/>
@@ -10076,6 +10658,7 @@
           <a:lstStyle/>
           <a:p>
             <a:pPr algn="ctr"/>
+            <a:endParaRPr/>
           </a:p>
         </p:txBody>
       </p:sp>
@@ -10376,7 +10959,7 @@
           </a:fontRef>
         </p:style>
         <p:txBody>
-          <a:bodyPr rtlCol="0" anchor="ctr" wrap="square"/>
+          <a:bodyPr wrap="square" rtlCol="0" anchor="ctr"/>
           <a:lstStyle/>
           <a:p>
             <a:pPr algn="l"/>
@@ -10429,7 +11012,7 @@
           </a:fontRef>
         </p:style>
         <p:txBody>
-          <a:bodyPr rtlCol="0" anchor="ctr" wrap="square"/>
+          <a:bodyPr wrap="square" rtlCol="0" anchor="ctr"/>
           <a:lstStyle/>
           <a:p>
             <a:pPr algn="l"/>
@@ -10482,7 +11065,7 @@
           </a:fontRef>
         </p:style>
         <p:txBody>
-          <a:bodyPr rtlCol="0" anchor="ctr" wrap="square"/>
+          <a:bodyPr wrap="square" rtlCol="0" anchor="ctr"/>
           <a:lstStyle/>
           <a:p>
             <a:pPr algn="l"/>
@@ -10535,7 +11118,7 @@
           </a:fontRef>
         </p:style>
         <p:txBody>
-          <a:bodyPr rtlCol="0" anchor="ctr" wrap="square"/>
+          <a:bodyPr wrap="square" rtlCol="0" anchor="ctr"/>
           <a:lstStyle/>
           <a:p>
             <a:pPr algn="l"/>
@@ -10588,7 +11171,7 @@
           </a:fontRef>
         </p:style>
         <p:txBody>
-          <a:bodyPr rtlCol="0" anchor="ctr" wrap="square"/>
+          <a:bodyPr wrap="square" rtlCol="0" anchor="ctr"/>
           <a:lstStyle/>
           <a:p>
             <a:pPr algn="l"/>
@@ -10641,7 +11224,7 @@
           </a:fontRef>
         </p:style>
         <p:txBody>
-          <a:bodyPr rtlCol="0" anchor="ctr" wrap="square"/>
+          <a:bodyPr wrap="square" rtlCol="0" anchor="ctr"/>
           <a:lstStyle/>
           <a:p>
             <a:pPr algn="l"/>
@@ -10658,8 +11241,8 @@
       </p:sp>
       <p:sp>
         <p:nvSpPr>
-          <p:cNvPr id="15" name="Rounded Rectangle 14">
-            <a:hlinkClick action="ppaction://hlinksldjump" r:id="rId2"/>
+          <p:cNvPr id="15" name="S003_P02_BACK">
+            <a:hlinkClick r:id="rId2" action="ppaction://hlinksldjump"/>
           </p:cNvPr>
           <p:cNvSpPr/>
           <p:nvPr/>
@@ -10720,7 +11303,7 @@
 </file>
 
 <file path=ppt/slides/slide8.xml><?xml version="1.0" encoding="utf-8"?>
-<p:sld xmlns:a="http://schemas.openxmlformats.org/drawingml/2006/main" xmlns:p="http://schemas.openxmlformats.org/presentationml/2006/main" xmlns:r="http://schemas.openxmlformats.org/officeDocument/2006/relationships">
+<p:sld xmlns:a="http://schemas.openxmlformats.org/drawingml/2006/main" xmlns:r="http://schemas.openxmlformats.org/officeDocument/2006/relationships" xmlns:p="http://schemas.openxmlformats.org/presentationml/2006/main">
   <p:cSld>
     <p:bg>
       <p:bgPr>
@@ -10736,7 +11319,14 @@
         <p:cNvGrpSpPr/>
         <p:nvPr/>
       </p:nvGrpSpPr>
-      <p:grpSpPr/>
+      <p:grpSpPr>
+        <a:xfrm>
+          <a:off x="0" y="0"/>
+          <a:ext cx="0" cy="0"/>
+          <a:chOff x="0" y="0"/>
+          <a:chExt cx="0" cy="0"/>
+        </a:xfrm>
+      </p:grpSpPr>
       <p:sp>
         <p:nvSpPr>
           <p:cNvPr id="2" name="Rectangle 1"/>
@@ -10777,6 +11367,7 @@
           <a:lstStyle/>
           <a:p>
             <a:pPr algn="ctr"/>
+            <a:endParaRPr/>
           </a:p>
         </p:txBody>
       </p:sp>
@@ -11077,7 +11668,7 @@
           </a:fontRef>
         </p:style>
         <p:txBody>
-          <a:bodyPr rtlCol="0" anchor="ctr" wrap="square"/>
+          <a:bodyPr wrap="square" rtlCol="0" anchor="ctr"/>
           <a:lstStyle/>
           <a:p>
             <a:pPr algn="l"/>
@@ -11130,7 +11721,7 @@
           </a:fontRef>
         </p:style>
         <p:txBody>
-          <a:bodyPr rtlCol="0" anchor="ctr" wrap="square"/>
+          <a:bodyPr wrap="square" rtlCol="0" anchor="ctr"/>
           <a:lstStyle/>
           <a:p>
             <a:pPr algn="l"/>
@@ -11183,7 +11774,7 @@
           </a:fontRef>
         </p:style>
         <p:txBody>
-          <a:bodyPr rtlCol="0" anchor="ctr" wrap="square"/>
+          <a:bodyPr wrap="square" rtlCol="0" anchor="ctr"/>
           <a:lstStyle/>
           <a:p>
             <a:pPr algn="l"/>
@@ -11236,7 +11827,7 @@
           </a:fontRef>
         </p:style>
         <p:txBody>
-          <a:bodyPr rtlCol="0" anchor="ctr" wrap="square"/>
+          <a:bodyPr wrap="square" rtlCol="0" anchor="ctr"/>
           <a:lstStyle/>
           <a:p>
             <a:pPr algn="l"/>
@@ -11289,7 +11880,7 @@
           </a:fontRef>
         </p:style>
         <p:txBody>
-          <a:bodyPr rtlCol="0" anchor="ctr" wrap="square"/>
+          <a:bodyPr wrap="square" rtlCol="0" anchor="ctr"/>
           <a:lstStyle/>
           <a:p>
             <a:pPr algn="l"/>
@@ -11342,7 +11933,7 @@
           </a:fontRef>
         </p:style>
         <p:txBody>
-          <a:bodyPr rtlCol="0" anchor="ctr" wrap="square"/>
+          <a:bodyPr wrap="square" rtlCol="0" anchor="ctr"/>
           <a:lstStyle/>
           <a:p>
             <a:pPr algn="l"/>
@@ -11359,8 +11950,8 @@
       </p:sp>
       <p:sp>
         <p:nvSpPr>
-          <p:cNvPr id="15" name="Rounded Rectangle 14">
-            <a:hlinkClick action="ppaction://hlinksldjump" r:id="rId2"/>
+          <p:cNvPr id="15" name="S003_P03_BACK">
+            <a:hlinkClick r:id="rId2" action="ppaction://hlinksldjump"/>
           </p:cNvPr>
           <p:cNvSpPr/>
           <p:nvPr/>
@@ -11421,7 +12012,7 @@
 </file>
 
 <file path=ppt/slides/slide9.xml><?xml version="1.0" encoding="utf-8"?>
-<p:sld xmlns:a="http://schemas.openxmlformats.org/drawingml/2006/main" xmlns:p="http://schemas.openxmlformats.org/presentationml/2006/main" xmlns:r="http://schemas.openxmlformats.org/officeDocument/2006/relationships">
+<p:sld xmlns:a="http://schemas.openxmlformats.org/drawingml/2006/main" xmlns:r="http://schemas.openxmlformats.org/officeDocument/2006/relationships" xmlns:p="http://schemas.openxmlformats.org/presentationml/2006/main">
   <p:cSld>
     <p:bg>
       <p:bgPr>
@@ -11437,7 +12028,14 @@
         <p:cNvGrpSpPr/>
         <p:nvPr/>
       </p:nvGrpSpPr>
-      <p:grpSpPr/>
+      <p:grpSpPr>
+        <a:xfrm>
+          <a:off x="0" y="0"/>
+          <a:ext cx="0" cy="0"/>
+          <a:chOff x="0" y="0"/>
+          <a:chExt cx="0" cy="0"/>
+        </a:xfrm>
+      </p:grpSpPr>
       <p:sp>
         <p:nvSpPr>
           <p:cNvPr id="2" name="Rectangle 1"/>
@@ -11478,6 +12076,7 @@
           <a:lstStyle/>
           <a:p>
             <a:pPr algn="ctr"/>
+            <a:endParaRPr/>
           </a:p>
         </p:txBody>
       </p:sp>
@@ -11778,7 +12377,7 @@
           </a:fontRef>
         </p:style>
         <p:txBody>
-          <a:bodyPr rtlCol="0" anchor="ctr" wrap="square"/>
+          <a:bodyPr wrap="square" rtlCol="0" anchor="ctr"/>
           <a:lstStyle/>
           <a:p>
             <a:pPr algn="l"/>
@@ -11831,7 +12430,7 @@
           </a:fontRef>
         </p:style>
         <p:txBody>
-          <a:bodyPr rtlCol="0" anchor="ctr" wrap="square"/>
+          <a:bodyPr wrap="square" rtlCol="0" anchor="ctr"/>
           <a:lstStyle/>
           <a:p>
             <a:pPr algn="l"/>
@@ -11884,7 +12483,7 @@
           </a:fontRef>
         </p:style>
         <p:txBody>
-          <a:bodyPr rtlCol="0" anchor="ctr" wrap="square"/>
+          <a:bodyPr wrap="square" rtlCol="0" anchor="ctr"/>
           <a:lstStyle/>
           <a:p>
             <a:pPr algn="l"/>
@@ -11937,7 +12536,7 @@
           </a:fontRef>
         </p:style>
         <p:txBody>
-          <a:bodyPr rtlCol="0" anchor="ctr" wrap="square"/>
+          <a:bodyPr wrap="square" rtlCol="0" anchor="ctr"/>
           <a:lstStyle/>
           <a:p>
             <a:pPr algn="l"/>
@@ -11990,7 +12589,7 @@
           </a:fontRef>
         </p:style>
         <p:txBody>
-          <a:bodyPr rtlCol="0" anchor="ctr" wrap="square"/>
+          <a:bodyPr wrap="square" rtlCol="0" anchor="ctr"/>
           <a:lstStyle/>
           <a:p>
             <a:pPr algn="l"/>
@@ -12043,7 +12642,7 @@
           </a:fontRef>
         </p:style>
         <p:txBody>
-          <a:bodyPr rtlCol="0" anchor="ctr" wrap="square"/>
+          <a:bodyPr wrap="square" rtlCol="0" anchor="ctr"/>
           <a:lstStyle/>
           <a:p>
             <a:pPr algn="l"/>
@@ -12060,8 +12659,8 @@
       </p:sp>
       <p:sp>
         <p:nvSpPr>
-          <p:cNvPr id="15" name="Rounded Rectangle 14">
-            <a:hlinkClick action="ppaction://hlinksldjump" r:id="rId2"/>
+          <p:cNvPr id="15" name="S003_P04_BACK">
+            <a:hlinkClick r:id="rId2" action="ppaction://hlinksldjump"/>
           </p:cNvPr>
           <p:cNvSpPr/>
           <p:nvPr/>
